--- a/presentation/presentation.pptx
+++ b/presentation/presentation.pptx
@@ -3376,120 +3376,21 @@
                 </a:solidFill>
                 <a:latin typeface="Segoe UI Semibold"/>
               </a:rPr>
-              <a:t>Что нужно от руководства</a:t>
-            </a:r>
-          </a:p>
-        </p:txBody>
-      </p:sp>
-      <p:sp>
-        <p:nvSpPr>
-          <p:cNvPr id="4" name="TextBox 3"/>
-          <p:cNvSpPr txBox="1"/>
-          <p:nvPr/>
-        </p:nvSpPr>
-        <p:spPr>
-          <a:xfrm>
-            <a:off x="640080" y="1828800"/>
-            <a:ext cx="5760720" cy="4389120"/>
-          </a:xfrm>
-          <a:prstGeom prst="rect">
-            <a:avLst/>
-          </a:prstGeom>
-          <a:noFill/>
-        </p:spPr>
-        <p:txBody>
-          <a:bodyPr wrap="square">
-            <a:spAutoFit/>
-          </a:bodyPr>
-          <a:lstStyle/>
-          <a:p>
-            <a:pPr>
-              <a:lnSpc>
-                <a:spcPct val="125000"/>
-              </a:lnSpc>
-              <a:spcAft>
-                <a:spcPts val="800"/>
-              </a:spcAft>
-            </a:pPr>
-            <a:r>
-              <a:rPr sz="1500">
-                <a:solidFill>
-                  <a:srgbClr val="A89C88"/>
-                </a:solidFill>
-                <a:latin typeface="Segoe UI"/>
-              </a:rPr>
-              <a:t>―  Утвердить владельца DQ-инициативы (совмещение роли на первой итерации, не новый штат).</a:t>
-            </a:r>
-          </a:p>
-          <a:p>
-            <a:pPr>
-              <a:lnSpc>
-                <a:spcPct val="125000"/>
-              </a:lnSpc>
-              <a:spcAft>
-                <a:spcPts val="800"/>
-              </a:spcAft>
-            </a:pPr>
-            <a:r>
-              <a:rPr sz="1500">
-                <a:solidFill>
-                  <a:srgbClr val="A89C88"/>
-                </a:solidFill>
-                <a:latin typeface="Segoe UI"/>
-              </a:rPr>
-              <a:t>―  70 часов на разработку (Фазы 0-2) и 4 часа в месяц на поддержку правил.</a:t>
-            </a:r>
-          </a:p>
-          <a:p>
-            <a:pPr>
-              <a:lnSpc>
-                <a:spcPct val="125000"/>
-              </a:lnSpc>
-              <a:spcAft>
-                <a:spcPts val="800"/>
-              </a:spcAft>
-            </a:pPr>
-            <a:r>
-              <a:rPr sz="1500">
-                <a:solidFill>
-                  <a:srgbClr val="A89C88"/>
-                </a:solidFill>
-                <a:latin typeface="Segoe UI"/>
-              </a:rPr>
-              <a:t>―  Решение по журналу изменений витрины — без него расследования упираются в догадки.</a:t>
-            </a:r>
-          </a:p>
-          <a:p>
-            <a:pPr>
-              <a:lnSpc>
-                <a:spcPct val="125000"/>
-              </a:lnSpc>
-              <a:spcAft>
-                <a:spcPts val="800"/>
-              </a:spcAft>
-            </a:pPr>
-            <a:r>
-              <a:rPr sz="1500">
-                <a:solidFill>
-                  <a:srgbClr val="A89C88"/>
-                </a:solidFill>
-                <a:latin typeface="Segoe UI"/>
-              </a:rPr>
-              <a:t>―  30 минут юриста — классификация организаций юрлицо/ИП для применимости 152-ФЗ.</a:t>
-            </a:r>
-          </a:p>
-        </p:txBody>
-      </p:sp>
-      <p:sp>
-        <p:nvSpPr>
-          <p:cNvPr id="5" name="Rounded Rectangle 4"/>
+              <a:t>План внедрения в три фазы</a:t>
+            </a:r>
+          </a:p>
+        </p:txBody>
+      </p:sp>
+      <p:sp>
+        <p:nvSpPr>
+          <p:cNvPr id="4" name="Rounded Rectangle 3"/>
           <p:cNvSpPr/>
           <p:nvPr/>
         </p:nvSpPr>
         <p:spPr>
           <a:xfrm>
-            <a:off x="6675120" y="1828800"/>
-            <a:ext cx="4846320" cy="4389120"/>
+            <a:off x="640080" y="1691640"/>
+            <a:ext cx="3520440" cy="3611880"/>
           </a:xfrm>
           <a:prstGeom prst="roundRect">
             <a:avLst>
@@ -3530,14 +3431,53 @@
       </p:sp>
       <p:sp>
         <p:nvSpPr>
+          <p:cNvPr id="5" name="TextBox 4"/>
+          <p:cNvSpPr txBox="1"/>
+          <p:nvPr/>
+        </p:nvSpPr>
+        <p:spPr>
+          <a:xfrm>
+            <a:off x="822959" y="1828800"/>
+            <a:ext cx="3200400" cy="320040"/>
+          </a:xfrm>
+          <a:prstGeom prst="rect">
+            <a:avLst/>
+          </a:prstGeom>
+          <a:noFill/>
+        </p:spPr>
+        <p:txBody>
+          <a:bodyPr wrap="square" anchor="t">
+            <a:spAutoFit/>
+          </a:bodyPr>
+          <a:lstStyle/>
+          <a:p>
+            <a:pPr algn="l">
+              <a:lnSpc>
+                <a:spcPct val="115000"/>
+              </a:lnSpc>
+            </a:pPr>
+            <a:r>
+              <a:rPr sz="1100" b="1">
+                <a:solidFill>
+                  <a:srgbClr val="DBA25A"/>
+                </a:solidFill>
+                <a:latin typeface="Consolas"/>
+              </a:rPr>
+              <a:t>ПИЛОТ · 1–2 МЕС</a:t>
+            </a:r>
+          </a:p>
+        </p:txBody>
+      </p:sp>
+      <p:sp>
+        <p:nvSpPr>
           <p:cNvPr id="6" name="TextBox 5"/>
           <p:cNvSpPr txBox="1"/>
           <p:nvPr/>
         </p:nvSpPr>
         <p:spPr>
           <a:xfrm>
-            <a:off x="6903720" y="2011680"/>
-            <a:ext cx="4389120" cy="365760"/>
+            <a:off x="822959" y="2121408"/>
+            <a:ext cx="3200400" cy="274320"/>
           </a:xfrm>
           <a:prstGeom prst="rect">
             <a:avLst/>
@@ -3556,27 +3496,555 @@
               </a:lnSpc>
             </a:pPr>
             <a:r>
+              <a:rPr sz="1000" b="0">
+                <a:solidFill>
+                  <a:srgbClr val="756A5A"/>
+                </a:solidFill>
+                <a:latin typeface="Segoe UI"/>
+              </a:rPr>
+              <a:t>сделано в проекте</a:t>
+            </a:r>
+          </a:p>
+        </p:txBody>
+      </p:sp>
+      <p:sp>
+        <p:nvSpPr>
+          <p:cNvPr id="7" name="TextBox 6"/>
+          <p:cNvSpPr txBox="1"/>
+          <p:nvPr/>
+        </p:nvSpPr>
+        <p:spPr>
+          <a:xfrm>
+            <a:off x="822959" y="2450592"/>
+            <a:ext cx="3200400" cy="2011680"/>
+          </a:xfrm>
+          <a:prstGeom prst="rect">
+            <a:avLst/>
+          </a:prstGeom>
+          <a:noFill/>
+        </p:spPr>
+        <p:txBody>
+          <a:bodyPr wrap="square">
+            <a:spAutoFit/>
+          </a:bodyPr>
+          <a:lstStyle/>
+          <a:p>
+            <a:pPr>
+              <a:lnSpc>
+                <a:spcPct val="125000"/>
+              </a:lnSpc>
+              <a:spcAft>
+                <a:spcPts val="400"/>
+              </a:spcAft>
+            </a:pPr>
+            <a:r>
+              <a:rPr sz="1100">
+                <a:solidFill>
+                  <a:srgbClr val="A89C88"/>
+                </a:solidFill>
+                <a:latin typeface="Segoe UI"/>
+              </a:rPr>
+              <a:t>―  Одна витрина: doc_oper против приёмки list_doc</a:t>
+            </a:r>
+          </a:p>
+          <a:p>
+            <a:pPr>
+              <a:lnSpc>
+                <a:spcPct val="125000"/>
+              </a:lnSpc>
+              <a:spcAft>
+                <a:spcPts val="400"/>
+              </a:spcAft>
+            </a:pPr>
+            <a:r>
+              <a:rPr sz="1100">
+                <a:solidFill>
+                  <a:srgbClr val="A89C88"/>
+                </a:solidFill>
+                <a:latin typeface="Segoe UI"/>
+              </a:rPr>
+              <a:t>―  14 правил в SQL и Soda, DAG в Airflow с гейтом</a:t>
+            </a:r>
+          </a:p>
+          <a:p>
+            <a:pPr>
+              <a:lnSpc>
+                <a:spcPct val="125000"/>
+              </a:lnSpc>
+              <a:spcAft>
+                <a:spcPts val="400"/>
+              </a:spcAft>
+            </a:pPr>
+            <a:r>
+              <a:rPr sz="1100">
+                <a:solidFill>
+                  <a:srgbClr val="A89C88"/>
+                </a:solidFill>
+                <a:latin typeface="Segoe UI"/>
+              </a:rPr>
+              <a:t>―  Технический дашборд в Grafana, история прогонов</a:t>
+            </a:r>
+          </a:p>
+          <a:p>
+            <a:pPr>
+              <a:lnSpc>
+                <a:spcPct val="125000"/>
+              </a:lnSpc>
+              <a:spcAft>
+                <a:spcPts val="400"/>
+              </a:spcAft>
+            </a:pPr>
+            <a:r>
+              <a:rPr sz="1100">
+                <a:solidFill>
+                  <a:srgbClr val="A89C88"/>
+                </a:solidFill>
+                <a:latin typeface="Segoe UI"/>
+              </a:rPr>
+              <a:t>―  Хотфикс кода организации, дозагрузка потерянных операций</a:t>
+            </a:r>
+          </a:p>
+        </p:txBody>
+      </p:sp>
+      <p:sp>
+        <p:nvSpPr>
+          <p:cNvPr id="8" name="TextBox 7"/>
+          <p:cNvSpPr txBox="1"/>
+          <p:nvPr/>
+        </p:nvSpPr>
+        <p:spPr>
+          <a:xfrm>
+            <a:off x="822959" y="4617720"/>
+            <a:ext cx="3200400" cy="640080"/>
+          </a:xfrm>
+          <a:prstGeom prst="rect">
+            <a:avLst/>
+          </a:prstGeom>
+          <a:noFill/>
+        </p:spPr>
+        <p:txBody>
+          <a:bodyPr wrap="square" anchor="t">
+            <a:spAutoFit/>
+          </a:bodyPr>
+          <a:lstStyle/>
+          <a:p>
+            <a:pPr algn="l">
+              <a:lnSpc>
+                <a:spcPct val="115000"/>
+              </a:lnSpc>
+            </a:pPr>
+            <a:r>
+              <a:rPr sz="1000" b="0">
+                <a:solidFill>
+                  <a:srgbClr val="4CAF6D"/>
+                </a:solidFill>
+                <a:latin typeface="Segoe UI"/>
+              </a:rPr>
+              <a:t>Критерий: MTTD ≤ 24 ч; критичные правила зелёные после бэкфилла</a:t>
+            </a:r>
+          </a:p>
+        </p:txBody>
+      </p:sp>
+      <p:sp>
+        <p:nvSpPr>
+          <p:cNvPr id="9" name="Rounded Rectangle 8"/>
+          <p:cNvSpPr/>
+          <p:nvPr/>
+        </p:nvSpPr>
+        <p:spPr>
+          <a:xfrm>
+            <a:off x="4343400" y="1691640"/>
+            <a:ext cx="3520440" cy="3611880"/>
+          </a:xfrm>
+          <a:prstGeom prst="roundRect">
+            <a:avLst>
+              <a:gd name="adj" fmla="val 6000"/>
+            </a:avLst>
+          </a:prstGeom>
+          <a:solidFill>
+            <a:srgbClr val="1D1A14"/>
+          </a:solidFill>
+          <a:ln w="12700">
+            <a:solidFill>
+              <a:srgbClr val="332E24"/>
+            </a:solidFill>
+          </a:ln>
+          <a:effectLst/>
+        </p:spPr>
+        <p:style>
+          <a:lnRef idx="1">
+            <a:schemeClr val="accent1"/>
+          </a:lnRef>
+          <a:fillRef idx="3">
+            <a:schemeClr val="accent1"/>
+          </a:fillRef>
+          <a:effectRef idx="2">
+            <a:schemeClr val="accent1"/>
+          </a:effectRef>
+          <a:fontRef idx="minor">
+            <a:schemeClr val="lt1"/>
+          </a:fontRef>
+        </p:style>
+        <p:txBody>
+          <a:bodyPr rtlCol="0" anchor="ctr"/>
+          <a:lstStyle/>
+          <a:p>
+            <a:pPr algn="ctr"/>
+          </a:p>
+        </p:txBody>
+      </p:sp>
+      <p:sp>
+        <p:nvSpPr>
+          <p:cNvPr id="10" name="TextBox 9"/>
+          <p:cNvSpPr txBox="1"/>
+          <p:nvPr/>
+        </p:nvSpPr>
+        <p:spPr>
+          <a:xfrm>
+            <a:off x="4526280" y="1828800"/>
+            <a:ext cx="3200400" cy="320040"/>
+          </a:xfrm>
+          <a:prstGeom prst="rect">
+            <a:avLst/>
+          </a:prstGeom>
+          <a:noFill/>
+        </p:spPr>
+        <p:txBody>
+          <a:bodyPr wrap="square" anchor="t">
+            <a:spAutoFit/>
+          </a:bodyPr>
+          <a:lstStyle/>
+          <a:p>
+            <a:pPr algn="l">
+              <a:lnSpc>
+                <a:spcPct val="115000"/>
+              </a:lnSpc>
+            </a:pPr>
+            <a:r>
               <a:rPr sz="1100" b="1">
                 <a:solidFill>
+                  <a:srgbClr val="DBA25A"/>
+                </a:solidFill>
+                <a:latin typeface="Consolas"/>
+              </a:rPr>
+              <a:t>РАСШИРЕНИЕ · 3–6 МЕС</a:t>
+            </a:r>
+          </a:p>
+        </p:txBody>
+      </p:sp>
+      <p:sp>
+        <p:nvSpPr>
+          <p:cNvPr id="11" name="TextBox 10"/>
+          <p:cNvSpPr txBox="1"/>
+          <p:nvPr/>
+        </p:nvSpPr>
+        <p:spPr>
+          <a:xfrm>
+            <a:off x="4526280" y="2121408"/>
+            <a:ext cx="3200400" cy="274320"/>
+          </a:xfrm>
+          <a:prstGeom prst="rect">
+            <a:avLst/>
+          </a:prstGeom>
+          <a:noFill/>
+        </p:spPr>
+        <p:txBody>
+          <a:bodyPr wrap="square" anchor="t">
+            <a:spAutoFit/>
+          </a:bodyPr>
+          <a:lstStyle/>
+          <a:p>
+            <a:pPr algn="l">
+              <a:lnSpc>
+                <a:spcPct val="115000"/>
+              </a:lnSpc>
+            </a:pPr>
+            <a:r>
+              <a:rPr sz="1000" b="0">
+                <a:solidFill>
                   <a:srgbClr val="756A5A"/>
                 </a:solidFill>
+                <a:latin typeface="Segoe UI"/>
+              </a:rPr>
+              <a:t>закрываем пробелы инцидента</a:t>
+            </a:r>
+          </a:p>
+        </p:txBody>
+      </p:sp>
+      <p:sp>
+        <p:nvSpPr>
+          <p:cNvPr id="12" name="TextBox 11"/>
+          <p:cNvSpPr txBox="1"/>
+          <p:nvPr/>
+        </p:nvSpPr>
+        <p:spPr>
+          <a:xfrm>
+            <a:off x="4526280" y="2450592"/>
+            <a:ext cx="3200400" cy="2011680"/>
+          </a:xfrm>
+          <a:prstGeom prst="rect">
+            <a:avLst/>
+          </a:prstGeom>
+          <a:noFill/>
+        </p:spPr>
+        <p:txBody>
+          <a:bodyPr wrap="square">
+            <a:spAutoFit/>
+          </a:bodyPr>
+          <a:lstStyle/>
+          <a:p>
+            <a:pPr>
+              <a:lnSpc>
+                <a:spcPct val="125000"/>
+              </a:lnSpc>
+              <a:spcAft>
+                <a:spcPts val="400"/>
+              </a:spcAft>
+            </a:pPr>
+            <a:r>
+              <a:rPr sz="1100">
+                <a:solidFill>
+                  <a:srgbClr val="A89C88"/>
+                </a:solidFill>
+                <a:latin typeface="Segoe UI"/>
+              </a:rPr>
+              <a:t>―  Журнал изменений витрины; запись — только учётной записью ETL</a:t>
+            </a:r>
+          </a:p>
+          <a:p>
+            <a:pPr>
+              <a:lnSpc>
+                <a:spcPct val="125000"/>
+              </a:lnSpc>
+              <a:spcAft>
+                <a:spcPts val="400"/>
+              </a:spcAft>
+            </a:pPr>
+            <a:r>
+              <a:rPr sz="1100">
+                <a:solidFill>
+                  <a:srgbClr val="A89C88"/>
+                </a:solidFill>
+                <a:latin typeface="Segoe UI"/>
+              </a:rPr>
+              <a:t>―  Data Contract согласован с потребителями и подписан</a:t>
+            </a:r>
+          </a:p>
+          <a:p>
+            <a:pPr>
+              <a:lnSpc>
+                <a:spcPct val="125000"/>
+              </a:lnSpc>
+              <a:spcAft>
+                <a:spcPts val="400"/>
+              </a:spcAft>
+            </a:pPr>
+            <a:r>
+              <a:rPr sz="1100">
+                <a:solidFill>
+                  <a:srgbClr val="A89C88"/>
+                </a:solidFill>
+                <a:latin typeface="Segoe UI"/>
+              </a:rPr>
+              <a:t>―  Бизнес-дашборд в ежедневном обиходе управления контроля</a:t>
+            </a:r>
+          </a:p>
+          <a:p>
+            <a:pPr>
+              <a:lnSpc>
+                <a:spcPct val="125000"/>
+              </a:lnSpc>
+              <a:spcAft>
+                <a:spcPts val="400"/>
+              </a:spcAft>
+            </a:pPr>
+            <a:r>
+              <a:rPr sz="1100">
+                <a:solidFill>
+                  <a:srgbClr val="A89C88"/>
+                </a:solidFill>
+                <a:latin typeface="Segoe UI"/>
+              </a:rPr>
+              <a:t>―  Алерты в дежурный канал, учёт заявок по инцидентам</a:t>
+            </a:r>
+          </a:p>
+        </p:txBody>
+      </p:sp>
+      <p:sp>
+        <p:nvSpPr>
+          <p:cNvPr id="13" name="TextBox 12"/>
+          <p:cNvSpPr txBox="1"/>
+          <p:nvPr/>
+        </p:nvSpPr>
+        <p:spPr>
+          <a:xfrm>
+            <a:off x="4526280" y="4617720"/>
+            <a:ext cx="3200400" cy="640080"/>
+          </a:xfrm>
+          <a:prstGeom prst="rect">
+            <a:avLst/>
+          </a:prstGeom>
+          <a:noFill/>
+        </p:spPr>
+        <p:txBody>
+          <a:bodyPr wrap="square" anchor="t">
+            <a:spAutoFit/>
+          </a:bodyPr>
+          <a:lstStyle/>
+          <a:p>
+            <a:pPr algn="l">
+              <a:lnSpc>
+                <a:spcPct val="115000"/>
+              </a:lnSpc>
+            </a:pPr>
+            <a:r>
+              <a:rPr sz="1000" b="0">
+                <a:solidFill>
+                  <a:srgbClr val="4CAF6D"/>
+                </a:solidFill>
+                <a:latin typeface="Segoe UI"/>
+              </a:rPr>
+              <a:t>Критерий: 0 ручных правок витрины; 0 заявок по DQ-дефектам</a:t>
+            </a:r>
+          </a:p>
+        </p:txBody>
+      </p:sp>
+      <p:sp>
+        <p:nvSpPr>
+          <p:cNvPr id="14" name="Rounded Rectangle 13"/>
+          <p:cNvSpPr/>
+          <p:nvPr/>
+        </p:nvSpPr>
+        <p:spPr>
+          <a:xfrm>
+            <a:off x="8046719" y="1691640"/>
+            <a:ext cx="3520440" cy="3611880"/>
+          </a:xfrm>
+          <a:prstGeom prst="roundRect">
+            <a:avLst>
+              <a:gd name="adj" fmla="val 6000"/>
+            </a:avLst>
+          </a:prstGeom>
+          <a:solidFill>
+            <a:srgbClr val="1D1A14"/>
+          </a:solidFill>
+          <a:ln w="12700">
+            <a:solidFill>
+              <a:srgbClr val="332E24"/>
+            </a:solidFill>
+          </a:ln>
+          <a:effectLst/>
+        </p:spPr>
+        <p:style>
+          <a:lnRef idx="1">
+            <a:schemeClr val="accent1"/>
+          </a:lnRef>
+          <a:fillRef idx="3">
+            <a:schemeClr val="accent1"/>
+          </a:fillRef>
+          <a:effectRef idx="2">
+            <a:schemeClr val="accent1"/>
+          </a:effectRef>
+          <a:fontRef idx="minor">
+            <a:schemeClr val="lt1"/>
+          </a:fontRef>
+        </p:style>
+        <p:txBody>
+          <a:bodyPr rtlCol="0" anchor="ctr"/>
+          <a:lstStyle/>
+          <a:p>
+            <a:pPr algn="ctr"/>
+          </a:p>
+        </p:txBody>
+      </p:sp>
+      <p:sp>
+        <p:nvSpPr>
+          <p:cNvPr id="15" name="TextBox 14"/>
+          <p:cNvSpPr txBox="1"/>
+          <p:nvPr/>
+        </p:nvSpPr>
+        <p:spPr>
+          <a:xfrm>
+            <a:off x="8229599" y="1828800"/>
+            <a:ext cx="3200400" cy="320040"/>
+          </a:xfrm>
+          <a:prstGeom prst="rect">
+            <a:avLst/>
+          </a:prstGeom>
+          <a:noFill/>
+        </p:spPr>
+        <p:txBody>
+          <a:bodyPr wrap="square" anchor="t">
+            <a:spAutoFit/>
+          </a:bodyPr>
+          <a:lstStyle/>
+          <a:p>
+            <a:pPr algn="l">
+              <a:lnSpc>
+                <a:spcPct val="115000"/>
+              </a:lnSpc>
+            </a:pPr>
+            <a:r>
+              <a:rPr sz="1100" b="1">
+                <a:solidFill>
+                  <a:srgbClr val="DBA25A"/>
+                </a:solidFill>
                 <a:latin typeface="Consolas"/>
               </a:rPr>
-              <a:t>ДОРОЖНАЯ КАРТА</a:t>
-            </a:r>
-          </a:p>
-        </p:txBody>
-      </p:sp>
-      <p:sp>
-        <p:nvSpPr>
-          <p:cNvPr id="7" name="TextBox 6"/>
-          <p:cNvSpPr txBox="1"/>
-          <p:nvPr/>
-        </p:nvSpPr>
-        <p:spPr>
-          <a:xfrm>
-            <a:off x="6903720" y="2423160"/>
-            <a:ext cx="4297680" cy="3657600"/>
+              <a:t>МАСШТАБИРОВАНИЕ · 6–12 МЕС</a:t>
+            </a:r>
+          </a:p>
+        </p:txBody>
+      </p:sp>
+      <p:sp>
+        <p:nvSpPr>
+          <p:cNvPr id="16" name="TextBox 15"/>
+          <p:cNvSpPr txBox="1"/>
+          <p:nvPr/>
+        </p:nvSpPr>
+        <p:spPr>
+          <a:xfrm>
+            <a:off x="8229599" y="2121408"/>
+            <a:ext cx="3200400" cy="274320"/>
+          </a:xfrm>
+          <a:prstGeom prst="rect">
+            <a:avLst/>
+          </a:prstGeom>
+          <a:noFill/>
+        </p:spPr>
+        <p:txBody>
+          <a:bodyPr wrap="square" anchor="t">
+            <a:spAutoFit/>
+          </a:bodyPr>
+          <a:lstStyle/>
+          <a:p>
+            <a:pPr algn="l">
+              <a:lnSpc>
+                <a:spcPct val="115000"/>
+              </a:lnSpc>
+            </a:pPr>
+            <a:r>
+              <a:rPr sz="1000" b="0">
+                <a:solidFill>
+                  <a:srgbClr val="756A5A"/>
+                </a:solidFill>
+                <a:latin typeface="Segoe UI"/>
+              </a:rPr>
+              <a:t>весь контур приёмки</a:t>
+            </a:r>
+          </a:p>
+        </p:txBody>
+      </p:sp>
+      <p:sp>
+        <p:nvSpPr>
+          <p:cNvPr id="17" name="TextBox 16"/>
+          <p:cNvSpPr txBox="1"/>
+          <p:nvPr/>
+        </p:nvSpPr>
+        <p:spPr>
+          <a:xfrm>
+            <a:off x="8229599" y="2450592"/>
+            <a:ext cx="3200400" cy="2011680"/>
           </a:xfrm>
           <a:prstGeom prst="rect">
             <a:avLst/>
@@ -3594,17 +4062,17 @@
                 <a:spcPct val="125000"/>
               </a:lnSpc>
               <a:spcAft>
-                <a:spcPts val="800"/>
+                <a:spcPts val="400"/>
               </a:spcAft>
             </a:pPr>
             <a:r>
-              <a:rPr sz="1300">
+              <a:rPr sz="1100">
                 <a:solidFill>
                   <a:srgbClr val="A89C88"/>
                 </a:solidFill>
                 <a:latin typeface="Segoe UI"/>
               </a:rPr>
-              <a:t>―  Нед. 1-2 — профилирование приёмки и витрины</a:t>
+              <a:t>―  Остальные витрины — по одной в месяц, те же шаблоны правил</a:t>
             </a:r>
           </a:p>
           <a:p>
@@ -3613,17 +4081,17 @@
                 <a:spcPct val="125000"/>
               </a:lnSpc>
               <a:spcAft>
-                <a:spcPts val="800"/>
+                <a:spcPts val="400"/>
               </a:spcAft>
             </a:pPr>
             <a:r>
-              <a:rPr sz="1300">
+              <a:rPr sz="1100">
                 <a:solidFill>
                   <a:srgbClr val="A89C88"/>
                 </a:solidFill>
                 <a:latin typeface="Segoe UI"/>
               </a:rPr>
-              <a:t>―  Нед. 3-4 — глоссарий и 8-12 правил</a:t>
+              <a:t>―  Проверки на входе приёмки, до попадания в витрину</a:t>
             </a:r>
           </a:p>
           <a:p>
@@ -3632,17 +4100,17 @@
                 <a:spcPct val="125000"/>
               </a:lnSpc>
               <a:spcAft>
-                <a:spcPts val="800"/>
+                <a:spcPts val="400"/>
               </a:spcAft>
             </a:pPr>
             <a:r>
-              <a:rPr sz="1300">
+              <a:rPr sz="1100">
                 <a:solidFill>
                   <a:srgbClr val="A89C88"/>
                 </a:solidFill>
                 <a:latin typeface="Segoe UI"/>
               </a:rPr>
-              <a:t>―  Нед. 5-8 — пайплайн, Soda Core, Airflow</a:t>
+              <a:t>―  Классификация ИП / юрлицо (152-ФЗ), каталог данных с владельцами</a:t>
             </a:r>
           </a:p>
           <a:p>
@@ -3651,43 +4119,189 @@
                 <a:spcPct val="125000"/>
               </a:lnSpc>
               <a:spcAft>
-                <a:spcPts val="800"/>
+                <a:spcPts val="400"/>
               </a:spcAft>
             </a:pPr>
             <a:r>
-              <a:rPr sz="1300">
+              <a:rPr sz="1100">
                 <a:solidFill>
                   <a:srgbClr val="A89C88"/>
                 </a:solidFill>
                 <a:latin typeface="Segoe UI"/>
               </a:rPr>
-              <a:t>―  Нед. 9-10 — Data Contract, журнал изменений</a:t>
-            </a:r>
-          </a:p>
-          <a:p>
-            <a:pPr>
-              <a:lnSpc>
-                <a:spcPct val="125000"/>
-              </a:lnSpc>
-              <a:spcAft>
-                <a:spcPts val="800"/>
-              </a:spcAft>
-            </a:pPr>
-            <a:r>
-              <a:rPr sz="1300">
+              <a:t>―  Квартальный пересчёт эффекта, ревизия порогов</a:t>
+            </a:r>
+          </a:p>
+        </p:txBody>
+      </p:sp>
+      <p:sp>
+        <p:nvSpPr>
+          <p:cNvPr id="18" name="TextBox 17"/>
+          <p:cNvSpPr txBox="1"/>
+          <p:nvPr/>
+        </p:nvSpPr>
+        <p:spPr>
+          <a:xfrm>
+            <a:off x="8229599" y="4617720"/>
+            <a:ext cx="3200400" cy="640080"/>
+          </a:xfrm>
+          <a:prstGeom prst="rect">
+            <a:avLst/>
+          </a:prstGeom>
+          <a:noFill/>
+        </p:spPr>
+        <p:txBody>
+          <a:bodyPr wrap="square" anchor="t">
+            <a:spAutoFit/>
+          </a:bodyPr>
+          <a:lstStyle/>
+          <a:p>
+            <a:pPr algn="l">
+              <a:lnSpc>
+                <a:spcPct val="115000"/>
+              </a:lnSpc>
+            </a:pPr>
+            <a:r>
+              <a:rPr sz="1000" b="0">
+                <a:solidFill>
+                  <a:srgbClr val="4CAF6D"/>
+                </a:solidFill>
+                <a:latin typeface="Segoe UI"/>
+              </a:rPr>
+              <a:t>Критерий: ≥ 80% витрин под контрактом; дефекты ловятся до витрины</a:t>
+            </a:r>
+          </a:p>
+        </p:txBody>
+      </p:sp>
+      <p:sp>
+        <p:nvSpPr>
+          <p:cNvPr id="19" name="Rounded Rectangle 18"/>
+          <p:cNvSpPr/>
+          <p:nvPr/>
+        </p:nvSpPr>
+        <p:spPr>
+          <a:xfrm>
+            <a:off x="640080" y="5468112"/>
+            <a:ext cx="10881360" cy="914400"/>
+          </a:xfrm>
+          <a:prstGeom prst="roundRect">
+            <a:avLst>
+              <a:gd name="adj" fmla="val 6000"/>
+            </a:avLst>
+          </a:prstGeom>
+          <a:solidFill>
+            <a:srgbClr val="1D1A14"/>
+          </a:solidFill>
+          <a:ln w="12700">
+            <a:solidFill>
+              <a:srgbClr val="332E24"/>
+            </a:solidFill>
+          </a:ln>
+          <a:effectLst/>
+        </p:spPr>
+        <p:style>
+          <a:lnRef idx="1">
+            <a:schemeClr val="accent1"/>
+          </a:lnRef>
+          <a:fillRef idx="3">
+            <a:schemeClr val="accent1"/>
+          </a:fillRef>
+          <a:effectRef idx="2">
+            <a:schemeClr val="accent1"/>
+          </a:effectRef>
+          <a:fontRef idx="minor">
+            <a:schemeClr val="lt1"/>
+          </a:fontRef>
+        </p:style>
+        <p:txBody>
+          <a:bodyPr rtlCol="0" anchor="ctr"/>
+          <a:lstStyle/>
+          <a:p>
+            <a:pPr algn="ctr"/>
+          </a:p>
+        </p:txBody>
+      </p:sp>
+      <p:sp>
+        <p:nvSpPr>
+          <p:cNvPr id="20" name="TextBox 19"/>
+          <p:cNvSpPr txBox="1"/>
+          <p:nvPr/>
+        </p:nvSpPr>
+        <p:spPr>
+          <a:xfrm>
+            <a:off x="868680" y="5559552"/>
+            <a:ext cx="2377440" cy="320040"/>
+          </a:xfrm>
+          <a:prstGeom prst="rect">
+            <a:avLst/>
+          </a:prstGeom>
+          <a:noFill/>
+        </p:spPr>
+        <p:txBody>
+          <a:bodyPr wrap="square" anchor="t">
+            <a:spAutoFit/>
+          </a:bodyPr>
+          <a:lstStyle/>
+          <a:p>
+            <a:pPr algn="l">
+              <a:lnSpc>
+                <a:spcPct val="115000"/>
+              </a:lnSpc>
+            </a:pPr>
+            <a:r>
+              <a:rPr sz="1050" b="1">
+                <a:solidFill>
+                  <a:srgbClr val="756A5A"/>
+                </a:solidFill>
+                <a:latin typeface="Consolas"/>
+              </a:rPr>
+              <a:t>ЧТО НУЖНО ОТ РУКОВОДСТВА</a:t>
+            </a:r>
+          </a:p>
+        </p:txBody>
+      </p:sp>
+      <p:sp>
+        <p:nvSpPr>
+          <p:cNvPr id="21" name="TextBox 20"/>
+          <p:cNvSpPr txBox="1"/>
+          <p:nvPr/>
+        </p:nvSpPr>
+        <p:spPr>
+          <a:xfrm>
+            <a:off x="868680" y="5852160"/>
+            <a:ext cx="10424160" cy="502920"/>
+          </a:xfrm>
+          <a:prstGeom prst="rect">
+            <a:avLst/>
+          </a:prstGeom>
+          <a:noFill/>
+        </p:spPr>
+        <p:txBody>
+          <a:bodyPr wrap="square" anchor="t">
+            <a:spAutoFit/>
+          </a:bodyPr>
+          <a:lstStyle/>
+          <a:p>
+            <a:pPr algn="l">
+              <a:lnSpc>
+                <a:spcPct val="115000"/>
+              </a:lnSpc>
+            </a:pPr>
+            <a:r>
+              <a:rPr sz="1150" b="0">
                 <a:solidFill>
                   <a:srgbClr val="A89C88"/>
                 </a:solidFill>
                 <a:latin typeface="Segoe UI"/>
               </a:rPr>
-              <a:t>―  С нед. 10 — инциденты и учёт заявок</a:t>
-            </a:r>
-          </a:p>
-        </p:txBody>
-      </p:sp>
-      <p:sp>
-        <p:nvSpPr>
-          <p:cNvPr id="8" name="TextBox 7"/>
+              <a:t>владелец инициативы (совмещение, не новый штат)  ·  70 ч разработки + 4 ч/мес поддержки  ·  решение по журналу изменений витрины  ·  30 мин юриста на классификацию ИП / юрлицо</a:t>
+            </a:r>
+          </a:p>
+        </p:txBody>
+      </p:sp>
+      <p:sp>
+        <p:nvSpPr>
+          <p:cNvPr id="22" name="TextBox 21"/>
           <p:cNvSpPr txBox="1"/>
           <p:nvPr/>
         </p:nvSpPr>
@@ -4262,7 +4876,7 @@
                 </a:solidFill>
                 <a:latin typeface="Segoe UI"/>
               </a:rPr>
-              <a:t>ШАГ 2 · ПРОФИЛИРОВАНИЕ</a:t>
+              <a:t>ШАГ 2 · ПРОФИЛИРОВАНИЕ И КЛАССИФИКАЦИЯ</a:t>
             </a:r>
           </a:p>
         </p:txBody>
@@ -4301,909 +4915,7 @@
                 </a:solidFill>
                 <a:latin typeface="Segoe UI Semibold"/>
               </a:rPr>
-              <a:t>Что показал аудит витрины</a:t>
-            </a:r>
-          </a:p>
-        </p:txBody>
-      </p:sp>
-      <p:sp>
-        <p:nvSpPr>
-          <p:cNvPr id="4" name="Rounded Rectangle 3"/>
-          <p:cNvSpPr/>
-          <p:nvPr/>
-        </p:nvSpPr>
-        <p:spPr>
-          <a:xfrm>
-            <a:off x="640080" y="1828800"/>
-            <a:ext cx="2606040" cy="1737360"/>
-          </a:xfrm>
-          <a:prstGeom prst="roundRect">
-            <a:avLst>
-              <a:gd name="adj" fmla="val 6000"/>
-            </a:avLst>
-          </a:prstGeom>
-          <a:solidFill>
-            <a:srgbClr val="1D1A14"/>
-          </a:solidFill>
-          <a:ln w="12700">
-            <a:solidFill>
-              <a:srgbClr val="332E24"/>
-            </a:solidFill>
-          </a:ln>
-          <a:effectLst/>
-        </p:spPr>
-        <p:style>
-          <a:lnRef idx="1">
-            <a:schemeClr val="accent1"/>
-          </a:lnRef>
-          <a:fillRef idx="3">
-            <a:schemeClr val="accent1"/>
-          </a:fillRef>
-          <a:effectRef idx="2">
-            <a:schemeClr val="accent1"/>
-          </a:effectRef>
-          <a:fontRef idx="minor">
-            <a:schemeClr val="lt1"/>
-          </a:fontRef>
-        </p:style>
-        <p:txBody>
-          <a:bodyPr rtlCol="0" anchor="ctr"/>
-          <a:lstStyle/>
-          <a:p>
-            <a:pPr algn="ctr"/>
-          </a:p>
-        </p:txBody>
-      </p:sp>
-      <p:sp>
-        <p:nvSpPr>
-          <p:cNvPr id="5" name="TextBox 4"/>
-          <p:cNvSpPr txBox="1"/>
-          <p:nvPr/>
-        </p:nvSpPr>
-        <p:spPr>
-          <a:xfrm>
-            <a:off x="841247" y="1993392"/>
-            <a:ext cx="2240280" cy="320040"/>
-          </a:xfrm>
-          <a:prstGeom prst="rect">
-            <a:avLst/>
-          </a:prstGeom>
-          <a:noFill/>
-        </p:spPr>
-        <p:txBody>
-          <a:bodyPr wrap="square" anchor="t">
-            <a:spAutoFit/>
-          </a:bodyPr>
-          <a:lstStyle/>
-          <a:p>
-            <a:pPr algn="l">
-              <a:lnSpc>
-                <a:spcPct val="115000"/>
-              </a:lnSpc>
-            </a:pPr>
-            <a:r>
-              <a:rPr sz="1050" b="1">
-                <a:solidFill>
-                  <a:srgbClr val="756A5A"/>
-                </a:solidFill>
-                <a:latin typeface="Consolas"/>
-              </a:rPr>
-              <a:t>ПОЛНОТА ЗАГРУЗКИ</a:t>
-            </a:r>
-          </a:p>
-        </p:txBody>
-      </p:sp>
-      <p:sp>
-        <p:nvSpPr>
-          <p:cNvPr id="6" name="TextBox 5"/>
-          <p:cNvSpPr txBox="1"/>
-          <p:nvPr/>
-        </p:nvSpPr>
-        <p:spPr>
-          <a:xfrm>
-            <a:off x="841247" y="2331720"/>
-            <a:ext cx="2240280" cy="640080"/>
-          </a:xfrm>
-          <a:prstGeom prst="rect">
-            <a:avLst/>
-          </a:prstGeom>
-          <a:noFill/>
-        </p:spPr>
-        <p:txBody>
-          <a:bodyPr wrap="square" anchor="t">
-            <a:spAutoFit/>
-          </a:bodyPr>
-          <a:lstStyle/>
-          <a:p>
-            <a:pPr algn="l">
-              <a:lnSpc>
-                <a:spcPct val="115000"/>
-              </a:lnSpc>
-            </a:pPr>
-            <a:r>
-              <a:rPr sz="3000" b="1">
-                <a:solidFill>
-                  <a:srgbClr val="E0616B"/>
-                </a:solidFill>
-                <a:latin typeface="Consolas"/>
-              </a:rPr>
-              <a:t>90.0%</a:t>
-            </a:r>
-          </a:p>
-        </p:txBody>
-      </p:sp>
-      <p:sp>
-        <p:nvSpPr>
-          <p:cNvPr id="7" name="TextBox 6"/>
-          <p:cNvSpPr txBox="1"/>
-          <p:nvPr/>
-        </p:nvSpPr>
-        <p:spPr>
-          <a:xfrm>
-            <a:off x="841247" y="2971800"/>
-            <a:ext cx="2240280" cy="457200"/>
-          </a:xfrm>
-          <a:prstGeom prst="rect">
-            <a:avLst/>
-          </a:prstGeom>
-          <a:noFill/>
-        </p:spPr>
-        <p:txBody>
-          <a:bodyPr wrap="square" anchor="t">
-            <a:spAutoFit/>
-          </a:bodyPr>
-          <a:lstStyle/>
-          <a:p>
-            <a:pPr algn="l">
-              <a:lnSpc>
-                <a:spcPct val="115000"/>
-              </a:lnSpc>
-            </a:pPr>
-            <a:r>
-              <a:rPr sz="1150" b="0">
-                <a:solidFill>
-                  <a:srgbClr val="A89C88"/>
-                </a:solidFill>
-                <a:latin typeface="Segoe UI"/>
-              </a:rPr>
-              <a:t>100 000 операций не доехало</a:t>
-            </a:r>
-          </a:p>
-        </p:txBody>
-      </p:sp>
-      <p:sp>
-        <p:nvSpPr>
-          <p:cNvPr id="8" name="Rounded Rectangle 7"/>
-          <p:cNvSpPr/>
-          <p:nvPr/>
-        </p:nvSpPr>
-        <p:spPr>
-          <a:xfrm>
-            <a:off x="3429000" y="1828800"/>
-            <a:ext cx="2606040" cy="1737360"/>
-          </a:xfrm>
-          <a:prstGeom prst="roundRect">
-            <a:avLst>
-              <a:gd name="adj" fmla="val 6000"/>
-            </a:avLst>
-          </a:prstGeom>
-          <a:solidFill>
-            <a:srgbClr val="1D1A14"/>
-          </a:solidFill>
-          <a:ln w="12700">
-            <a:solidFill>
-              <a:srgbClr val="332E24"/>
-            </a:solidFill>
-          </a:ln>
-          <a:effectLst/>
-        </p:spPr>
-        <p:style>
-          <a:lnRef idx="1">
-            <a:schemeClr val="accent1"/>
-          </a:lnRef>
-          <a:fillRef idx="3">
-            <a:schemeClr val="accent1"/>
-          </a:fillRef>
-          <a:effectRef idx="2">
-            <a:schemeClr val="accent1"/>
-          </a:effectRef>
-          <a:fontRef idx="minor">
-            <a:schemeClr val="lt1"/>
-          </a:fontRef>
-        </p:style>
-        <p:txBody>
-          <a:bodyPr rtlCol="0" anchor="ctr"/>
-          <a:lstStyle/>
-          <a:p>
-            <a:pPr algn="ctr"/>
-          </a:p>
-        </p:txBody>
-      </p:sp>
-      <p:sp>
-        <p:nvSpPr>
-          <p:cNvPr id="9" name="TextBox 8"/>
-          <p:cNvSpPr txBox="1"/>
-          <p:nvPr/>
-        </p:nvSpPr>
-        <p:spPr>
-          <a:xfrm>
-            <a:off x="3630168" y="1993392"/>
-            <a:ext cx="2240280" cy="320040"/>
-          </a:xfrm>
-          <a:prstGeom prst="rect">
-            <a:avLst/>
-          </a:prstGeom>
-          <a:noFill/>
-        </p:spPr>
-        <p:txBody>
-          <a:bodyPr wrap="square" anchor="t">
-            <a:spAutoFit/>
-          </a:bodyPr>
-          <a:lstStyle/>
-          <a:p>
-            <a:pPr algn="l">
-              <a:lnSpc>
-                <a:spcPct val="115000"/>
-              </a:lnSpc>
-            </a:pPr>
-            <a:r>
-              <a:rPr sz="1050" b="1">
-                <a:solidFill>
-                  <a:srgbClr val="756A5A"/>
-                </a:solidFill>
-                <a:latin typeface="Consolas"/>
-              </a:rPr>
-              <a:t>ТОЧНОСТЬ КОДА ОРГ.</a:t>
-            </a:r>
-          </a:p>
-        </p:txBody>
-      </p:sp>
-      <p:sp>
-        <p:nvSpPr>
-          <p:cNvPr id="10" name="TextBox 9"/>
-          <p:cNvSpPr txBox="1"/>
-          <p:nvPr/>
-        </p:nvSpPr>
-        <p:spPr>
-          <a:xfrm>
-            <a:off x="3630168" y="2331720"/>
-            <a:ext cx="2240280" cy="640080"/>
-          </a:xfrm>
-          <a:prstGeom prst="rect">
-            <a:avLst/>
-          </a:prstGeom>
-          <a:noFill/>
-        </p:spPr>
-        <p:txBody>
-          <a:bodyPr wrap="square" anchor="t">
-            <a:spAutoFit/>
-          </a:bodyPr>
-          <a:lstStyle/>
-          <a:p>
-            <a:pPr algn="l">
-              <a:lnSpc>
-                <a:spcPct val="115000"/>
-              </a:lnSpc>
-            </a:pPr>
-            <a:r>
-              <a:rPr sz="3000" b="1">
-                <a:solidFill>
-                  <a:srgbClr val="E0616B"/>
-                </a:solidFill>
-                <a:latin typeface="Consolas"/>
-              </a:rPr>
-              <a:t>90.0%</a:t>
-            </a:r>
-          </a:p>
-        </p:txBody>
-      </p:sp>
-      <p:sp>
-        <p:nvSpPr>
-          <p:cNvPr id="11" name="TextBox 10"/>
-          <p:cNvSpPr txBox="1"/>
-          <p:nvPr/>
-        </p:nvSpPr>
-        <p:spPr>
-          <a:xfrm>
-            <a:off x="3630168" y="2971800"/>
-            <a:ext cx="2240280" cy="457200"/>
-          </a:xfrm>
-          <a:prstGeom prst="rect">
-            <a:avLst/>
-          </a:prstGeom>
-          <a:noFill/>
-        </p:spPr>
-        <p:txBody>
-          <a:bodyPr wrap="square" anchor="t">
-            <a:spAutoFit/>
-          </a:bodyPr>
-          <a:lstStyle/>
-          <a:p>
-            <a:pPr algn="l">
-              <a:lnSpc>
-                <a:spcPct val="115000"/>
-              </a:lnSpc>
-            </a:pPr>
-            <a:r>
-              <a:rPr sz="1150" b="0">
-                <a:solidFill>
-                  <a:srgbClr val="A89C88"/>
-                </a:solidFill>
-                <a:latin typeface="Segoe UI"/>
-              </a:rPr>
-              <a:t>90 000 кодов повреждены</a:t>
-            </a:r>
-          </a:p>
-        </p:txBody>
-      </p:sp>
-      <p:sp>
-        <p:nvSpPr>
-          <p:cNvPr id="12" name="Rounded Rectangle 11"/>
-          <p:cNvSpPr/>
-          <p:nvPr/>
-        </p:nvSpPr>
-        <p:spPr>
-          <a:xfrm>
-            <a:off x="6217920" y="1828800"/>
-            <a:ext cx="2606040" cy="1737360"/>
-          </a:xfrm>
-          <a:prstGeom prst="roundRect">
-            <a:avLst>
-              <a:gd name="adj" fmla="val 6000"/>
-            </a:avLst>
-          </a:prstGeom>
-          <a:solidFill>
-            <a:srgbClr val="1D1A14"/>
-          </a:solidFill>
-          <a:ln w="12700">
-            <a:solidFill>
-              <a:srgbClr val="332E24"/>
-            </a:solidFill>
-          </a:ln>
-          <a:effectLst/>
-        </p:spPr>
-        <p:style>
-          <a:lnRef idx="1">
-            <a:schemeClr val="accent1"/>
-          </a:lnRef>
-          <a:fillRef idx="3">
-            <a:schemeClr val="accent1"/>
-          </a:fillRef>
-          <a:effectRef idx="2">
-            <a:schemeClr val="accent1"/>
-          </a:effectRef>
-          <a:fontRef idx="minor">
-            <a:schemeClr val="lt1"/>
-          </a:fontRef>
-        </p:style>
-        <p:txBody>
-          <a:bodyPr rtlCol="0" anchor="ctr"/>
-          <a:lstStyle/>
-          <a:p>
-            <a:pPr algn="ctr"/>
-          </a:p>
-        </p:txBody>
-      </p:sp>
-      <p:sp>
-        <p:nvSpPr>
-          <p:cNvPr id="13" name="TextBox 12"/>
-          <p:cNvSpPr txBox="1"/>
-          <p:nvPr/>
-        </p:nvSpPr>
-        <p:spPr>
-          <a:xfrm>
-            <a:off x="6419088" y="1993392"/>
-            <a:ext cx="2240280" cy="320040"/>
-          </a:xfrm>
-          <a:prstGeom prst="rect">
-            <a:avLst/>
-          </a:prstGeom>
-          <a:noFill/>
-        </p:spPr>
-        <p:txBody>
-          <a:bodyPr wrap="square" anchor="t">
-            <a:spAutoFit/>
-          </a:bodyPr>
-          <a:lstStyle/>
-          <a:p>
-            <a:pPr algn="l">
-              <a:lnSpc>
-                <a:spcPct val="115000"/>
-              </a:lnSpc>
-            </a:pPr>
-            <a:r>
-              <a:rPr sz="1050" b="1">
-                <a:solidFill>
-                  <a:srgbClr val="756A5A"/>
-                </a:solidFill>
-                <a:latin typeface="Consolas"/>
-              </a:rPr>
-              <a:t>БАЛАНС ПЕРЕМЕЩЕНИЙ</a:t>
-            </a:r>
-          </a:p>
-        </p:txBody>
-      </p:sp>
-      <p:sp>
-        <p:nvSpPr>
-          <p:cNvPr id="14" name="TextBox 13"/>
-          <p:cNvSpPr txBox="1"/>
-          <p:nvPr/>
-        </p:nvSpPr>
-        <p:spPr>
-          <a:xfrm>
-            <a:off x="6419088" y="2331720"/>
-            <a:ext cx="2240280" cy="640080"/>
-          </a:xfrm>
-          <a:prstGeom prst="rect">
-            <a:avLst/>
-          </a:prstGeom>
-          <a:noFill/>
-        </p:spPr>
-        <p:txBody>
-          <a:bodyPr wrap="square" anchor="t">
-            <a:spAutoFit/>
-          </a:bodyPr>
-          <a:lstStyle/>
-          <a:p>
-            <a:pPr algn="l">
-              <a:lnSpc>
-                <a:spcPct val="115000"/>
-              </a:lnSpc>
-            </a:pPr>
-            <a:r>
-              <a:rPr sz="3000" b="1">
-                <a:solidFill>
-                  <a:srgbClr val="E0616B"/>
-                </a:solidFill>
-                <a:latin typeface="Consolas"/>
-              </a:rPr>
-              <a:t>65.0%</a:t>
-            </a:r>
-          </a:p>
-        </p:txBody>
-      </p:sp>
-      <p:sp>
-        <p:nvSpPr>
-          <p:cNvPr id="15" name="TextBox 14"/>
-          <p:cNvSpPr txBox="1"/>
-          <p:nvPr/>
-        </p:nvSpPr>
-        <p:spPr>
-          <a:xfrm>
-            <a:off x="6419088" y="2971800"/>
-            <a:ext cx="2240280" cy="457200"/>
-          </a:xfrm>
-          <a:prstGeom prst="rect">
-            <a:avLst/>
-          </a:prstGeom>
-          <a:noFill/>
-        </p:spPr>
-        <p:txBody>
-          <a:bodyPr wrap="square" anchor="t">
-            <a:spAutoFit/>
-          </a:bodyPr>
-          <a:lstStyle/>
-          <a:p>
-            <a:pPr algn="l">
-              <a:lnSpc>
-                <a:spcPct val="115000"/>
-              </a:lnSpc>
-            </a:pPr>
-            <a:r>
-              <a:rPr sz="1150" b="0">
-                <a:solidFill>
-                  <a:srgbClr val="A89C88"/>
-                </a:solidFill>
-                <a:latin typeface="Segoe UI"/>
-              </a:rPr>
-              <a:t>не сходится у 96 309 пар</a:t>
-            </a:r>
-          </a:p>
-        </p:txBody>
-      </p:sp>
-      <p:sp>
-        <p:nvSpPr>
-          <p:cNvPr id="16" name="Rounded Rectangle 15"/>
-          <p:cNvSpPr/>
-          <p:nvPr/>
-        </p:nvSpPr>
-        <p:spPr>
-          <a:xfrm>
-            <a:off x="9006840" y="1828800"/>
-            <a:ext cx="2514600" cy="1737360"/>
-          </a:xfrm>
-          <a:prstGeom prst="roundRect">
-            <a:avLst>
-              <a:gd name="adj" fmla="val 6000"/>
-            </a:avLst>
-          </a:prstGeom>
-          <a:solidFill>
-            <a:srgbClr val="1D1A14"/>
-          </a:solidFill>
-          <a:ln w="12700">
-            <a:solidFill>
-              <a:srgbClr val="332E24"/>
-            </a:solidFill>
-          </a:ln>
-          <a:effectLst/>
-        </p:spPr>
-        <p:style>
-          <a:lnRef idx="1">
-            <a:schemeClr val="accent1"/>
-          </a:lnRef>
-          <a:fillRef idx="3">
-            <a:schemeClr val="accent1"/>
-          </a:fillRef>
-          <a:effectRef idx="2">
-            <a:schemeClr val="accent1"/>
-          </a:effectRef>
-          <a:fontRef idx="minor">
-            <a:schemeClr val="lt1"/>
-          </a:fontRef>
-        </p:style>
-        <p:txBody>
-          <a:bodyPr rtlCol="0" anchor="ctr"/>
-          <a:lstStyle/>
-          <a:p>
-            <a:pPr algn="ctr"/>
-          </a:p>
-        </p:txBody>
-      </p:sp>
-      <p:sp>
-        <p:nvSpPr>
-          <p:cNvPr id="17" name="TextBox 16"/>
-          <p:cNvSpPr txBox="1"/>
-          <p:nvPr/>
-        </p:nvSpPr>
-        <p:spPr>
-          <a:xfrm>
-            <a:off x="9208008" y="1993392"/>
-            <a:ext cx="2148840" cy="320040"/>
-          </a:xfrm>
-          <a:prstGeom prst="rect">
-            <a:avLst/>
-          </a:prstGeom>
-          <a:noFill/>
-        </p:spPr>
-        <p:txBody>
-          <a:bodyPr wrap="square" anchor="t">
-            <a:spAutoFit/>
-          </a:bodyPr>
-          <a:lstStyle/>
-          <a:p>
-            <a:pPr algn="l">
-              <a:lnSpc>
-                <a:spcPct val="115000"/>
-              </a:lnSpc>
-            </a:pPr>
-            <a:r>
-              <a:rPr sz="1050" b="1">
-                <a:solidFill>
-                  <a:srgbClr val="756A5A"/>
-                </a:solidFill>
-                <a:latin typeface="Consolas"/>
-              </a:rPr>
-              <a:t>ПАРТИИ (СПРАВКА А)</a:t>
-            </a:r>
-          </a:p>
-        </p:txBody>
-      </p:sp>
-      <p:sp>
-        <p:nvSpPr>
-          <p:cNvPr id="18" name="TextBox 17"/>
-          <p:cNvSpPr txBox="1"/>
-          <p:nvPr/>
-        </p:nvSpPr>
-        <p:spPr>
-          <a:xfrm>
-            <a:off x="9208008" y="2331720"/>
-            <a:ext cx="2148840" cy="640080"/>
-          </a:xfrm>
-          <a:prstGeom prst="rect">
-            <a:avLst/>
-          </a:prstGeom>
-          <a:noFill/>
-        </p:spPr>
-        <p:txBody>
-          <a:bodyPr wrap="square" anchor="t">
-            <a:spAutoFit/>
-          </a:bodyPr>
-          <a:lstStyle/>
-          <a:p>
-            <a:pPr algn="l">
-              <a:lnSpc>
-                <a:spcPct val="115000"/>
-              </a:lnSpc>
-            </a:pPr>
-            <a:r>
-              <a:rPr sz="3000" b="1">
-                <a:solidFill>
-                  <a:srgbClr val="E0616B"/>
-                </a:solidFill>
-                <a:latin typeface="Consolas"/>
-              </a:rPr>
-              <a:t>10 000</a:t>
-            </a:r>
-          </a:p>
-        </p:txBody>
-      </p:sp>
-      <p:sp>
-        <p:nvSpPr>
-          <p:cNvPr id="19" name="TextBox 18"/>
-          <p:cNvSpPr txBox="1"/>
-          <p:nvPr/>
-        </p:nvSpPr>
-        <p:spPr>
-          <a:xfrm>
-            <a:off x="9208008" y="2971800"/>
-            <a:ext cx="2148840" cy="457200"/>
-          </a:xfrm>
-          <a:prstGeom prst="rect">
-            <a:avLst/>
-          </a:prstGeom>
-          <a:noFill/>
-        </p:spPr>
-        <p:txBody>
-          <a:bodyPr wrap="square" anchor="t">
-            <a:spAutoFit/>
-          </a:bodyPr>
-          <a:lstStyle/>
-          <a:p>
-            <a:pPr algn="l">
-              <a:lnSpc>
-                <a:spcPct val="115000"/>
-              </a:lnSpc>
-            </a:pPr>
-            <a:r>
-              <a:rPr sz="1150" b="0">
-                <a:solidFill>
-                  <a:srgbClr val="A89C88"/>
-                </a:solidFill>
-                <a:latin typeface="Segoe UI"/>
-              </a:rPr>
-              <a:t>задеты потерями все до одной</a:t>
-            </a:r>
-          </a:p>
-        </p:txBody>
-      </p:sp>
-      <p:sp>
-        <p:nvSpPr>
-          <p:cNvPr id="20" name="TextBox 19"/>
-          <p:cNvSpPr txBox="1"/>
-          <p:nvPr/>
-        </p:nvSpPr>
-        <p:spPr>
-          <a:xfrm>
-            <a:off x="640080" y="3977639"/>
-            <a:ext cx="10881360" cy="2286000"/>
-          </a:xfrm>
-          <a:prstGeom prst="rect">
-            <a:avLst/>
-          </a:prstGeom>
-          <a:noFill/>
-        </p:spPr>
-        <p:txBody>
-          <a:bodyPr wrap="square">
-            <a:spAutoFit/>
-          </a:bodyPr>
-          <a:lstStyle/>
-          <a:p>
-            <a:pPr>
-              <a:lnSpc>
-                <a:spcPct val="125000"/>
-              </a:lnSpc>
-              <a:spcAft>
-                <a:spcPts val="800"/>
-              </a:spcAft>
-            </a:pPr>
-            <a:r>
-              <a:rPr sz="1500">
-                <a:solidFill>
-                  <a:srgbClr val="A89C88"/>
-                </a:solidFill>
-                <a:latin typeface="Segoe UI"/>
-              </a:rPr>
-              <a:t>―  Принятый поток целостен: ключ уникален, обязательные поля заполнены, код организации на 100% валиден — данные испортились у нас.</a:t>
-            </a:r>
-          </a:p>
-          <a:p>
-            <a:pPr>
-              <a:lnSpc>
-                <a:spcPct val="125000"/>
-              </a:lnSpc>
-              <a:spcAft>
-                <a:spcPts val="800"/>
-              </a:spcAft>
-            </a:pPr>
-            <a:r>
-              <a:rPr sz="1500">
-                <a:solidFill>
-                  <a:srgbClr val="A89C88"/>
-                </a:solidFill>
-                <a:latin typeface="Segoe UI"/>
-              </a:rPr>
-              <a:t>―  Дефектов два, и они связаны: загрузка потеряла операции, их довосстановили вручную — и при этой правке испортился код организации.</a:t>
-            </a:r>
-          </a:p>
-          <a:p>
-            <a:pPr>
-              <a:lnSpc>
-                <a:spcPct val="125000"/>
-              </a:lnSpc>
-              <a:spcAft>
-                <a:spcPts val="800"/>
-              </a:spcAft>
-            </a:pPr>
-            <a:r>
-              <a:rPr sz="1500">
-                <a:solidFill>
-                  <a:srgbClr val="A89C88"/>
-                </a:solidFill>
-                <a:latin typeface="Segoe UI"/>
-              </a:rPr>
-              <a:t>―  Справка А сопровождает партию, справка Б — перемещение: номера повторяются по природе документа, поэтому проверяется иерархия, а не уникальность.</a:t>
-            </a:r>
-          </a:p>
-          <a:p>
-            <a:pPr>
-              <a:lnSpc>
-                <a:spcPct val="125000"/>
-              </a:lnSpc>
-              <a:spcAft>
-                <a:spcPts val="800"/>
-              </a:spcAft>
-            </a:pPr>
-            <a:r>
-              <a:rPr sz="1500">
-                <a:solidFill>
-                  <a:srgbClr val="A89C88"/>
-                </a:solidFill>
-                <a:latin typeface="Segoe UI"/>
-              </a:rPr>
-              <a:t>―  Приёмка (12 колонок) шире витрины (9) — при загрузке 3 атрибута теряются молча, плюс сужается точность количества.</a:t>
-            </a:r>
-          </a:p>
-        </p:txBody>
-      </p:sp>
-      <p:sp>
-        <p:nvSpPr>
-          <p:cNvPr id="21" name="TextBox 20"/>
-          <p:cNvSpPr txBox="1"/>
-          <p:nvPr/>
-        </p:nvSpPr>
-        <p:spPr>
-          <a:xfrm>
-            <a:off x="11475720" y="6473952"/>
-            <a:ext cx="548640" cy="320040"/>
-          </a:xfrm>
-          <a:prstGeom prst="rect">
-            <a:avLst/>
-          </a:prstGeom>
-          <a:noFill/>
-        </p:spPr>
-        <p:txBody>
-          <a:bodyPr wrap="square" anchor="t">
-            <a:spAutoFit/>
-          </a:bodyPr>
-          <a:lstStyle/>
-          <a:p>
-            <a:pPr algn="r">
-              <a:lnSpc>
-                <a:spcPct val="115000"/>
-              </a:lnSpc>
-            </a:pPr>
-            <a:r>
-              <a:rPr sz="1100" b="0">
-                <a:solidFill>
-                  <a:srgbClr val="756A5A"/>
-                </a:solidFill>
-                <a:latin typeface="Consolas"/>
-              </a:rPr>
-              <a:t>3</a:t>
-            </a:r>
-          </a:p>
-        </p:txBody>
-      </p:sp>
-    </p:spTree>
-  </p:cSld>
-  <p:clrMapOvr>
-    <a:masterClrMapping/>
-  </p:clrMapOvr>
-</p:sld>
-</file>
-
-<file path=ppt/slides/slide4.xml><?xml version="1.0" encoding="utf-8"?>
-<p:sld xmlns:a="http://schemas.openxmlformats.org/drawingml/2006/main" xmlns:p="http://schemas.openxmlformats.org/presentationml/2006/main" xmlns:r="http://schemas.openxmlformats.org/officeDocument/2006/relationships">
-  <p:cSld>
-    <p:bg>
-      <p:bgPr>
-        <a:solidFill>
-          <a:srgbClr val="17140F"/>
-        </a:solidFill>
-        <a:effectLst/>
-      </p:bgPr>
-    </p:bg>
-    <p:spTree>
-      <p:nvGrpSpPr>
-        <p:cNvPr id="1" name=""/>
-        <p:cNvGrpSpPr/>
-        <p:nvPr/>
-      </p:nvGrpSpPr>
-      <p:grpSpPr/>
-      <p:sp>
-        <p:nvSpPr>
-          <p:cNvPr id="2" name="TextBox 1"/>
-          <p:cNvSpPr txBox="1"/>
-          <p:nvPr/>
-        </p:nvSpPr>
-        <p:spPr>
-          <a:xfrm>
-            <a:off x="640080" y="411480"/>
-            <a:ext cx="9144000" cy="365760"/>
-          </a:xfrm>
-          <a:prstGeom prst="rect">
-            <a:avLst/>
-          </a:prstGeom>
-          <a:noFill/>
-        </p:spPr>
-        <p:txBody>
-          <a:bodyPr wrap="square" anchor="t">
-            <a:spAutoFit/>
-          </a:bodyPr>
-          <a:lstStyle/>
-          <a:p>
-            <a:pPr algn="l">
-              <a:lnSpc>
-                <a:spcPct val="115000"/>
-              </a:lnSpc>
-            </a:pPr>
-            <a:r>
-              <a:rPr sz="1250" b="1">
-                <a:solidFill>
-                  <a:srgbClr val="DBA25A"/>
-                </a:solidFill>
-                <a:latin typeface="Segoe UI"/>
-              </a:rPr>
-              <a:t>ШАГ 2 · КЛАССИФИКАЦИЯ ПРОБЛЕМ</a:t>
-            </a:r>
-          </a:p>
-        </p:txBody>
-      </p:sp>
-      <p:sp>
-        <p:nvSpPr>
-          <p:cNvPr id="3" name="TextBox 2"/>
-          <p:cNvSpPr txBox="1"/>
-          <p:nvPr/>
-        </p:nvSpPr>
-        <p:spPr>
-          <a:xfrm>
-            <a:off x="640080" y="731520"/>
-            <a:ext cx="10881360" cy="914400"/>
-          </a:xfrm>
-          <a:prstGeom prst="rect">
-            <a:avLst/>
-          </a:prstGeom>
-          <a:noFill/>
-        </p:spPr>
-        <p:txBody>
-          <a:bodyPr wrap="square" anchor="t">
-            <a:spAutoFit/>
-          </a:bodyPr>
-          <a:lstStyle/>
-          <a:p>
-            <a:pPr algn="l">
-              <a:lnSpc>
-                <a:spcPct val="115000"/>
-              </a:lnSpc>
-            </a:pPr>
-            <a:r>
-              <a:rPr sz="3000" b="1">
-                <a:solidFill>
-                  <a:srgbClr val="EDE6D9"/>
-                </a:solidFill>
-                <a:latin typeface="Segoe UI Semibold"/>
-              </a:rPr>
-              <a:t>Что нашли и как это классифицировали</a:t>
+              <a:t>Что показал аудит: шесть проблем и их масштаб</a:t>
             </a:r>
           </a:p>
         </p:txBody>
@@ -5217,8 +4929,8 @@
           <p:nvPr/>
         </p:nvGraphicFramePr>
         <p:xfrm>
-          <a:off x="640080" y="1828800"/>
-          <a:ext cx="10881360" cy="3291840"/>
+          <a:off x="640080" y="1691640"/>
+          <a:ext cx="10881360" cy="3429000"/>
         </p:xfrm>
         <a:graphic>
           <a:graphicData uri="http://schemas.openxmlformats.org/drawingml/2006/table">
@@ -5227,13 +4939,13 @@
                 <a:tableStyleId>{5C22544A-7EE6-4342-B048-85BDC9FD1C3A}</a:tableStyleId>
               </a:tblPr>
               <a:tblGrid>
-                <a:gridCol w="457200"/>
-                <a:gridCol w="4297680"/>
+                <a:gridCol w="411480"/>
+                <a:gridCol w="4663440"/>
+                <a:gridCol w="1965960"/>
                 <a:gridCol w="2377440"/>
-                <a:gridCol w="1920240"/>
-                <a:gridCol w="1828800"/>
+                <a:gridCol w="1463040"/>
               </a:tblGrid>
-              <a:tr h="548640">
+              <a:tr h="489857">
                 <a:tc>
                   <a:txBody>
                     <a:bodyPr/>
@@ -5316,7 +5028,7 @@
                           </a:solidFill>
                           <a:latin typeface="Segoe UI"/>
                         </a:rPr>
-                        <a:t>Затронуто</a:t>
+                        <a:t>Масштаб</a:t>
                       </a:r>
                     </a:p>
                   </a:txBody>
@@ -5350,7 +5062,7 @@
                   </a:tcPr>
                 </a:tc>
               </a:tr>
-              <a:tr h="548640">
+              <a:tr h="489857">
                 <a:tc>
                   <a:txBody>
                     <a:bodyPr/>
@@ -5385,7 +5097,7 @@
                           </a:solidFill>
                           <a:latin typeface="Consolas"/>
                         </a:rPr>
-                        <a:t>100 000 принятых операций не дошли до витрины</a:t>
+                        <a:t>Принятые операции не дошли до витрины при загрузке</a:t>
                       </a:r>
                     </a:p>
                   </a:txBody>
@@ -5429,7 +5141,7 @@
                           </a:solidFill>
                           <a:latin typeface="Consolas"/>
                         </a:rPr>
-                        <a:t>10% потока</a:t>
+                        <a:t>100 000 операций · 10% потока</a:t>
                       </a:r>
                     </a:p>
                   </a:txBody>
@@ -5451,7 +5163,7 @@
                           </a:solidFill>
                           <a:latin typeface="Consolas"/>
                         </a:rPr>
-                        <a:t>Высокая</a:t>
+                        <a:t>Критичная</a:t>
                       </a:r>
                     </a:p>
                   </a:txBody>
@@ -5462,7 +5174,7 @@
                   </a:tcPr>
                 </a:tc>
               </a:tr>
-              <a:tr h="548640">
+              <a:tr h="489857">
                 <a:tc>
                   <a:txBody>
                     <a:bodyPr/>
@@ -5541,7 +5253,7 @@
                           </a:solidFill>
                           <a:latin typeface="Consolas"/>
                         </a:rPr>
-                        <a:t>10% витрины</a:t>
+                        <a:t>90 000 операций · 10% витрины</a:t>
                       </a:r>
                     </a:p>
                   </a:txBody>
@@ -5563,7 +5275,7 @@
                           </a:solidFill>
                           <a:latin typeface="Consolas"/>
                         </a:rPr>
-                        <a:t>Высокая</a:t>
+                        <a:t>Критичная</a:t>
                       </a:r>
                     </a:p>
                   </a:txBody>
@@ -5574,7 +5286,7 @@
                   </a:tcPr>
                 </a:tc>
               </a:tr>
-              <a:tr h="548640">
+              <a:tr h="489857">
                 <a:tc>
                   <a:txBody>
                     <a:bodyPr/>
@@ -5609,7 +5321,7 @@
                           </a:solidFill>
                           <a:latin typeface="Consolas"/>
                         </a:rPr>
-                        <a:t>Баланс перемещений не сходится</a:t>
+                        <a:t>Баланс перемещений не сходится: списано больше, чем получено</a:t>
                       </a:r>
                     </a:p>
                   </a:txBody>
@@ -5631,7 +5343,7 @@
                           </a:solidFill>
                           <a:latin typeface="Consolas"/>
                         </a:rPr>
-                        <a:t>Согласованность</a:t>
+                        <a:t>Бизнес-логика</a:t>
                       </a:r>
                     </a:p>
                   </a:txBody>
@@ -5653,7 +5365,7 @@
                           </a:solidFill>
                           <a:latin typeface="Consolas"/>
                         </a:rPr>
-                        <a:t>35% пар</a:t>
+                        <a:t>96 309 пар · 35%</a:t>
                       </a:r>
                     </a:p>
                   </a:txBody>
@@ -5675,7 +5387,7 @@
                           </a:solidFill>
                           <a:latin typeface="Consolas"/>
                         </a:rPr>
-                        <a:t>Высокая</a:t>
+                        <a:t>Критичная</a:t>
                       </a:r>
                     </a:p>
                   </a:txBody>
@@ -5686,7 +5398,7 @@
                   </a:tcPr>
                 </a:tc>
               </a:tr>
-              <a:tr h="548640">
+              <a:tr h="489857">
                 <a:tc>
                   <a:txBody>
                     <a:bodyPr/>
@@ -5765,7 +5477,7 @@
                           </a:solidFill>
                           <a:latin typeface="Consolas"/>
                         </a:rPr>
-                        <a:t>10 000 партий</a:t>
+                        <a:t>10 000 партий · 100%</a:t>
                       </a:r>
                     </a:p>
                   </a:txBody>
@@ -5798,7 +5510,7 @@
                   </a:tcPr>
                 </a:tc>
               </a:tr>
-              <a:tr h="548640">
+              <a:tr h="489857">
                 <a:tc>
                   <a:txBody>
                     <a:bodyPr/>
@@ -5812,6 +5524,118 @@
                           <a:latin typeface="Consolas"/>
                         </a:rPr>
                         <a:t>5</a:t>
+                      </a:r>
+                    </a:p>
+                  </a:txBody>
+                  <a:tcPr>
+                    <a:solidFill>
+                      <a:srgbClr val="1D1A14"/>
+                    </a:solidFill>
+                  </a:tcPr>
+                </a:tc>
+                <a:tc>
+                  <a:txBody>
+                    <a:bodyPr/>
+                    <a:lstStyle/>
+                    <a:p>
+                      <a:r>
+                        <a:rPr sz="1150">
+                          <a:solidFill>
+                            <a:srgbClr val="A89C88"/>
+                          </a:solidFill>
+                          <a:latin typeface="Consolas"/>
+                        </a:rPr>
+                        <a:t>bottling_date и wbpid не заполнены ни разу</a:t>
+                      </a:r>
+                    </a:p>
+                  </a:txBody>
+                  <a:tcPr>
+                    <a:solidFill>
+                      <a:srgbClr val="1D1A14"/>
+                    </a:solidFill>
+                  </a:tcPr>
+                </a:tc>
+                <a:tc>
+                  <a:txBody>
+                    <a:bodyPr/>
+                    <a:lstStyle/>
+                    <a:p>
+                      <a:r>
+                        <a:rPr sz="1150">
+                          <a:solidFill>
+                            <a:srgbClr val="A89C88"/>
+                          </a:solidFill>
+                          <a:latin typeface="Consolas"/>
+                        </a:rPr>
+                        <a:t>Полнота (схема)</a:t>
+                      </a:r>
+                    </a:p>
+                  </a:txBody>
+                  <a:tcPr>
+                    <a:solidFill>
+                      <a:srgbClr val="1D1A14"/>
+                    </a:solidFill>
+                  </a:tcPr>
+                </a:tc>
+                <a:tc>
+                  <a:txBody>
+                    <a:bodyPr/>
+                    <a:lstStyle/>
+                    <a:p>
+                      <a:r>
+                        <a:rPr sz="1150">
+                          <a:solidFill>
+                            <a:srgbClr val="A89C88"/>
+                          </a:solidFill>
+                          <a:latin typeface="Consolas"/>
+                        </a:rPr>
+                        <a:t>1 000 000 строк · 100%</a:t>
+                      </a:r>
+                    </a:p>
+                  </a:txBody>
+                  <a:tcPr>
+                    <a:solidFill>
+                      <a:srgbClr val="1D1A14"/>
+                    </a:solidFill>
+                  </a:tcPr>
+                </a:tc>
+                <a:tc>
+                  <a:txBody>
+                    <a:bodyPr/>
+                    <a:lstStyle/>
+                    <a:p>
+                      <a:r>
+                        <a:rPr sz="1150">
+                          <a:solidFill>
+                            <a:srgbClr val="A89C88"/>
+                          </a:solidFill>
+                          <a:latin typeface="Consolas"/>
+                        </a:rPr>
+                        <a:t>Средняя</a:t>
+                      </a:r>
+                    </a:p>
+                  </a:txBody>
+                  <a:tcPr>
+                    <a:solidFill>
+                      <a:srgbClr val="1D1A14"/>
+                    </a:solidFill>
+                  </a:tcPr>
+                </a:tc>
+              </a:tr>
+              <a:tr h="489858">
+                <a:tc>
+                  <a:txBody>
+                    <a:bodyPr/>
+                    <a:lstStyle/>
+                    <a:p>
+                      <a:r>
+                        <a:rPr sz="1150">
+                          <a:solidFill>
+                            <a:srgbClr val="A89C88"/>
+                          </a:solidFill>
+                          <a:latin typeface="Consolas"/>
+                        </a:rPr>
+                        <a:t>6</a:t>
                       </a:r>
                     </a:p>
                   </a:txBody>
@@ -5877,7 +5701,7 @@
                           </a:solidFill>
                           <a:latin typeface="Consolas"/>
                         </a:rPr>
-                        <a:t>—</a:t>
+                        <a:t>вся витрина</a:t>
                       </a:r>
                     </a:p>
                   </a:txBody>
@@ -5922,7 +5746,7 @@
         </p:nvSpPr>
         <p:spPr>
           <a:xfrm>
-            <a:off x="640080" y="5394960"/>
+            <a:off x="640080" y="5303520"/>
             <a:ext cx="10881360" cy="1188720"/>
           </a:xfrm>
           <a:prstGeom prst="rect">
@@ -5941,17 +5765,36 @@
                 <a:spcPct val="125000"/>
               </a:lnSpc>
               <a:spcAft>
-                <a:spcPts val="800"/>
+                <a:spcPts val="400"/>
               </a:spcAft>
             </a:pPr>
             <a:r>
-              <a:rPr sz="1400">
+              <a:rPr sz="1250">
                 <a:solidFill>
                   <a:srgbClr val="756A5A"/>
                 </a:solidFill>
                 <a:latin typeface="Segoe UI"/>
               </a:rPr>
-              <a:t>―  Проблема 2 — следствие попытки починить проблему 1: данные довставили вручную и не заметили побочного эффекта (Шаг 6).</a:t>
+              <a:t>―  Принятый поток целостен: ключ уникален, поля заполнены, код организации валиден на 100% — все дефекты возникли внутри контура.</a:t>
+            </a:r>
+          </a:p>
+          <a:p>
+            <a:pPr>
+              <a:lnSpc>
+                <a:spcPct val="125000"/>
+              </a:lnSpc>
+              <a:spcAft>
+                <a:spcPts val="400"/>
+              </a:spcAft>
+            </a:pPr>
+            <a:r>
+              <a:rPr sz="1250">
+                <a:solidFill>
+                  <a:srgbClr val="756A5A"/>
+                </a:solidFill>
+                <a:latin typeface="Segoe UI"/>
+              </a:rPr>
+              <a:t>―  Проблема 2 — следствие попытки починить проблему 1. Проблема 3 — их общее последствие и одновременно инструмент разбора.</a:t>
             </a:r>
           </a:p>
         </p:txBody>
@@ -5959,6 +5802,2553 @@
       <p:sp>
         <p:nvSpPr>
           <p:cNvPr id="6" name="TextBox 5"/>
+          <p:cNvSpPr txBox="1"/>
+          <p:nvPr/>
+        </p:nvSpPr>
+        <p:spPr>
+          <a:xfrm>
+            <a:off x="11475720" y="6473952"/>
+            <a:ext cx="548640" cy="320040"/>
+          </a:xfrm>
+          <a:prstGeom prst="rect">
+            <a:avLst/>
+          </a:prstGeom>
+          <a:noFill/>
+        </p:spPr>
+        <p:txBody>
+          <a:bodyPr wrap="square" anchor="t">
+            <a:spAutoFit/>
+          </a:bodyPr>
+          <a:lstStyle/>
+          <a:p>
+            <a:pPr algn="r">
+              <a:lnSpc>
+                <a:spcPct val="115000"/>
+              </a:lnSpc>
+            </a:pPr>
+            <a:r>
+              <a:rPr sz="1100" b="0">
+                <a:solidFill>
+                  <a:srgbClr val="756A5A"/>
+                </a:solidFill>
+                <a:latin typeface="Consolas"/>
+              </a:rPr>
+              <a:t>3</a:t>
+            </a:r>
+          </a:p>
+        </p:txBody>
+      </p:sp>
+    </p:spTree>
+  </p:cSld>
+  <p:clrMapOvr>
+    <a:masterClrMapping/>
+  </p:clrMapOvr>
+</p:sld>
+</file>
+
+<file path=ppt/slides/slide4.xml><?xml version="1.0" encoding="utf-8"?>
+<p:sld xmlns:a="http://schemas.openxmlformats.org/drawingml/2006/main" xmlns:p="http://schemas.openxmlformats.org/presentationml/2006/main" xmlns:r="http://schemas.openxmlformats.org/officeDocument/2006/relationships">
+  <p:cSld>
+    <p:bg>
+      <p:bgPr>
+        <a:solidFill>
+          <a:srgbClr val="17140F"/>
+        </a:solidFill>
+        <a:effectLst/>
+      </p:bgPr>
+    </p:bg>
+    <p:spTree>
+      <p:nvGrpSpPr>
+        <p:cNvPr id="1" name=""/>
+        <p:cNvGrpSpPr/>
+        <p:nvPr/>
+      </p:nvGrpSpPr>
+      <p:grpSpPr/>
+      <p:sp>
+        <p:nvSpPr>
+          <p:cNvPr id="2" name="TextBox 1"/>
+          <p:cNvSpPr txBox="1"/>
+          <p:nvPr/>
+        </p:nvSpPr>
+        <p:spPr>
+          <a:xfrm>
+            <a:off x="640080" y="411480"/>
+            <a:ext cx="9144000" cy="365760"/>
+          </a:xfrm>
+          <a:prstGeom prst="rect">
+            <a:avLst/>
+          </a:prstGeom>
+          <a:noFill/>
+        </p:spPr>
+        <p:txBody>
+          <a:bodyPr wrap="square" anchor="t">
+            <a:spAutoFit/>
+          </a:bodyPr>
+          <a:lstStyle/>
+          <a:p>
+            <a:pPr algn="l">
+              <a:lnSpc>
+                <a:spcPct val="115000"/>
+              </a:lnSpc>
+            </a:pPr>
+            <a:r>
+              <a:rPr sz="1250" b="1">
+                <a:solidFill>
+                  <a:srgbClr val="DBA25A"/>
+                </a:solidFill>
+                <a:latin typeface="Segoe UI"/>
+              </a:rPr>
+              <a:t>ШАГ 4 · АРХИТЕКТУРА</a:t>
+            </a:r>
+          </a:p>
+        </p:txBody>
+      </p:sp>
+      <p:sp>
+        <p:nvSpPr>
+          <p:cNvPr id="3" name="TextBox 2"/>
+          <p:cNvSpPr txBox="1"/>
+          <p:nvPr/>
+        </p:nvSpPr>
+        <p:spPr>
+          <a:xfrm>
+            <a:off x="640080" y="731520"/>
+            <a:ext cx="10881360" cy="914400"/>
+          </a:xfrm>
+          <a:prstGeom prst="rect">
+            <a:avLst/>
+          </a:prstGeom>
+          <a:noFill/>
+        </p:spPr>
+        <p:txBody>
+          <a:bodyPr wrap="square" anchor="t">
+            <a:spAutoFit/>
+          </a:bodyPr>
+          <a:lstStyle/>
+          <a:p>
+            <a:pPr algn="l">
+              <a:lnSpc>
+                <a:spcPct val="115000"/>
+              </a:lnSpc>
+            </a:pPr>
+            <a:r>
+              <a:rPr sz="3000" b="1">
+                <a:solidFill>
+                  <a:srgbClr val="EDE6D9"/>
+                </a:solidFill>
+                <a:latin typeface="Segoe UI Semibold"/>
+              </a:rPr>
+              <a:t>Как устроен поток данных и контур контроля</a:t>
+            </a:r>
+          </a:p>
+        </p:txBody>
+      </p:sp>
+      <p:sp>
+        <p:nvSpPr>
+          <p:cNvPr id="4" name="TextBox 3"/>
+          <p:cNvSpPr txBox="1"/>
+          <p:nvPr/>
+        </p:nvSpPr>
+        <p:spPr>
+          <a:xfrm>
+            <a:off x="640080" y="1417320"/>
+            <a:ext cx="5486400" cy="274320"/>
+          </a:xfrm>
+          <a:prstGeom prst="rect">
+            <a:avLst/>
+          </a:prstGeom>
+          <a:noFill/>
+        </p:spPr>
+        <p:txBody>
+          <a:bodyPr wrap="square" anchor="t">
+            <a:spAutoFit/>
+          </a:bodyPr>
+          <a:lstStyle/>
+          <a:p>
+            <a:pPr algn="l">
+              <a:lnSpc>
+                <a:spcPct val="115000"/>
+              </a:lnSpc>
+            </a:pPr>
+            <a:r>
+              <a:rPr sz="1000" b="1">
+                <a:solidFill>
+                  <a:srgbClr val="756A5A"/>
+                </a:solidFill>
+                <a:latin typeface="Consolas"/>
+              </a:rPr>
+              <a:t>ПОТОК ДАННЫХ</a:t>
+            </a:r>
+          </a:p>
+        </p:txBody>
+      </p:sp>
+      <p:sp>
+        <p:nvSpPr>
+          <p:cNvPr id="5" name="Rounded Rectangle 4"/>
+          <p:cNvSpPr/>
+          <p:nvPr/>
+        </p:nvSpPr>
+        <p:spPr>
+          <a:xfrm>
+            <a:off x="640080" y="1691640"/>
+            <a:ext cx="1737360" cy="868680"/>
+          </a:xfrm>
+          <a:prstGeom prst="roundRect">
+            <a:avLst>
+              <a:gd name="adj" fmla="val 6000"/>
+            </a:avLst>
+          </a:prstGeom>
+          <a:solidFill>
+            <a:srgbClr val="1D1A14"/>
+          </a:solidFill>
+          <a:ln w="19050">
+            <a:solidFill>
+              <a:srgbClr val="332E24"/>
+            </a:solidFill>
+          </a:ln>
+          <a:effectLst/>
+        </p:spPr>
+        <p:style>
+          <a:lnRef idx="1">
+            <a:schemeClr val="accent1"/>
+          </a:lnRef>
+          <a:fillRef idx="3">
+            <a:schemeClr val="accent1"/>
+          </a:fillRef>
+          <a:effectRef idx="2">
+            <a:schemeClr val="accent1"/>
+          </a:effectRef>
+          <a:fontRef idx="minor">
+            <a:schemeClr val="lt1"/>
+          </a:fontRef>
+        </p:style>
+        <p:txBody>
+          <a:bodyPr rtlCol="0" anchor="ctr"/>
+          <a:lstStyle/>
+          <a:p>
+            <a:pPr algn="ctr"/>
+          </a:p>
+        </p:txBody>
+      </p:sp>
+      <p:sp>
+        <p:nvSpPr>
+          <p:cNvPr id="6" name="TextBox 5"/>
+          <p:cNvSpPr txBox="1"/>
+          <p:nvPr/>
+        </p:nvSpPr>
+        <p:spPr>
+          <a:xfrm>
+            <a:off x="713231" y="1783080"/>
+            <a:ext cx="1591056" cy="365760"/>
+          </a:xfrm>
+          <a:prstGeom prst="rect">
+            <a:avLst/>
+          </a:prstGeom>
+          <a:noFill/>
+        </p:spPr>
+        <p:txBody>
+          <a:bodyPr wrap="square" anchor="t">
+            <a:spAutoFit/>
+          </a:bodyPr>
+          <a:lstStyle/>
+          <a:p>
+            <a:pPr algn="ctr">
+              <a:lnSpc>
+                <a:spcPct val="115000"/>
+              </a:lnSpc>
+            </a:pPr>
+            <a:r>
+              <a:rPr sz="1150" b="1">
+                <a:solidFill>
+                  <a:srgbClr val="EDE6D9"/>
+                </a:solidFill>
+                <a:latin typeface="Consolas"/>
+              </a:rPr>
+              <a:t>ОРГАНИЗАЦИИ</a:t>
+            </a:r>
+          </a:p>
+        </p:txBody>
+      </p:sp>
+      <p:sp>
+        <p:nvSpPr>
+          <p:cNvPr id="7" name="TextBox 6"/>
+          <p:cNvSpPr txBox="1"/>
+          <p:nvPr/>
+        </p:nvSpPr>
+        <p:spPr>
+          <a:xfrm>
+            <a:off x="713231" y="2112264"/>
+            <a:ext cx="1591056" cy="411479"/>
+          </a:xfrm>
+          <a:prstGeom prst="rect">
+            <a:avLst/>
+          </a:prstGeom>
+          <a:noFill/>
+        </p:spPr>
+        <p:txBody>
+          <a:bodyPr wrap="square" anchor="t">
+            <a:spAutoFit/>
+          </a:bodyPr>
+          <a:lstStyle/>
+          <a:p>
+            <a:pPr algn="ctr">
+              <a:lnSpc>
+                <a:spcPct val="110000"/>
+              </a:lnSpc>
+            </a:pPr>
+            <a:r>
+              <a:rPr sz="900" b="0">
+                <a:solidFill>
+                  <a:srgbClr val="A89C88"/>
+                </a:solidFill>
+                <a:latin typeface="Segoe UI"/>
+              </a:rPr>
+              <a:t>5 000 участников рынка</a:t>
+            </a:r>
+          </a:p>
+          <a:p>
+            <a:pPr algn="ctr">
+              <a:lnSpc>
+                <a:spcPct val="110000"/>
+              </a:lnSpc>
+            </a:pPr>
+            <a:r>
+              <a:rPr sz="900" b="0">
+                <a:solidFill>
+                  <a:srgbClr val="A89C88"/>
+                </a:solidFill>
+                <a:latin typeface="Segoe UI"/>
+              </a:rPr>
+              <a:t>передают операции</a:t>
+            </a:r>
+          </a:p>
+        </p:txBody>
+      </p:sp>
+      <p:sp>
+        <p:nvSpPr>
+          <p:cNvPr id="8" name="Rounded Rectangle 7"/>
+          <p:cNvSpPr/>
+          <p:nvPr/>
+        </p:nvSpPr>
+        <p:spPr>
+          <a:xfrm>
+            <a:off x="2606040" y="1691640"/>
+            <a:ext cx="1920240" cy="868680"/>
+          </a:xfrm>
+          <a:prstGeom prst="roundRect">
+            <a:avLst>
+              <a:gd name="adj" fmla="val 6000"/>
+            </a:avLst>
+          </a:prstGeom>
+          <a:solidFill>
+            <a:srgbClr val="1D1A14"/>
+          </a:solidFill>
+          <a:ln w="19050">
+            <a:solidFill>
+              <a:srgbClr val="332E24"/>
+            </a:solidFill>
+          </a:ln>
+          <a:effectLst/>
+        </p:spPr>
+        <p:style>
+          <a:lnRef idx="1">
+            <a:schemeClr val="accent1"/>
+          </a:lnRef>
+          <a:fillRef idx="3">
+            <a:schemeClr val="accent1"/>
+          </a:fillRef>
+          <a:effectRef idx="2">
+            <a:schemeClr val="accent1"/>
+          </a:effectRef>
+          <a:fontRef idx="minor">
+            <a:schemeClr val="lt1"/>
+          </a:fontRef>
+        </p:style>
+        <p:txBody>
+          <a:bodyPr rtlCol="0" anchor="ctr"/>
+          <a:lstStyle/>
+          <a:p>
+            <a:pPr algn="ctr"/>
+          </a:p>
+        </p:txBody>
+      </p:sp>
+      <p:sp>
+        <p:nvSpPr>
+          <p:cNvPr id="9" name="TextBox 8"/>
+          <p:cNvSpPr txBox="1"/>
+          <p:nvPr/>
+        </p:nvSpPr>
+        <p:spPr>
+          <a:xfrm>
+            <a:off x="2679192" y="1783080"/>
+            <a:ext cx="1773936" cy="365760"/>
+          </a:xfrm>
+          <a:prstGeom prst="rect">
+            <a:avLst/>
+          </a:prstGeom>
+          <a:noFill/>
+        </p:spPr>
+        <p:txBody>
+          <a:bodyPr wrap="square" anchor="t">
+            <a:spAutoFit/>
+          </a:bodyPr>
+          <a:lstStyle/>
+          <a:p>
+            <a:pPr algn="ctr">
+              <a:lnSpc>
+                <a:spcPct val="115000"/>
+              </a:lnSpc>
+            </a:pPr>
+            <a:r>
+              <a:rPr sz="1150" b="1">
+                <a:solidFill>
+                  <a:srgbClr val="EDE6D9"/>
+                </a:solidFill>
+                <a:latin typeface="Consolas"/>
+              </a:rPr>
+              <a:t>ПРИЁМКА list_doc</a:t>
+            </a:r>
+          </a:p>
+        </p:txBody>
+      </p:sp>
+      <p:sp>
+        <p:nvSpPr>
+          <p:cNvPr id="10" name="TextBox 9"/>
+          <p:cNvSpPr txBox="1"/>
+          <p:nvPr/>
+        </p:nvSpPr>
+        <p:spPr>
+          <a:xfrm>
+            <a:off x="2679192" y="2112264"/>
+            <a:ext cx="1773936" cy="411479"/>
+          </a:xfrm>
+          <a:prstGeom prst="rect">
+            <a:avLst/>
+          </a:prstGeom>
+          <a:noFill/>
+        </p:spPr>
+        <p:txBody>
+          <a:bodyPr wrap="square" anchor="t">
+            <a:spAutoFit/>
+          </a:bodyPr>
+          <a:lstStyle/>
+          <a:p>
+            <a:pPr algn="ctr">
+              <a:lnSpc>
+                <a:spcPct val="110000"/>
+              </a:lnSpc>
+            </a:pPr>
+            <a:r>
+              <a:rPr sz="900" b="0">
+                <a:solidFill>
+                  <a:srgbClr val="A89C88"/>
+                </a:solidFill>
+                <a:latin typeface="Segoe UI"/>
+              </a:rPr>
+              <a:t>1 000 000 операций</a:t>
+            </a:r>
+          </a:p>
+          <a:p>
+            <a:pPr algn="ctr">
+              <a:lnSpc>
+                <a:spcPct val="110000"/>
+              </a:lnSpc>
+            </a:pPr>
+            <a:r>
+              <a:rPr sz="900" b="0">
+                <a:solidFill>
+                  <a:srgbClr val="A89C88"/>
+                </a:solidFill>
+                <a:latin typeface="Segoe UI"/>
+              </a:rPr>
+              <a:t>эталон, целостен</a:t>
+            </a:r>
+          </a:p>
+        </p:txBody>
+      </p:sp>
+      <p:sp>
+        <p:nvSpPr>
+          <p:cNvPr id="11" name="Rounded Rectangle 10"/>
+          <p:cNvSpPr/>
+          <p:nvPr/>
+        </p:nvSpPr>
+        <p:spPr>
+          <a:xfrm>
+            <a:off x="4754880" y="1691640"/>
+            <a:ext cx="1554480" cy="868680"/>
+          </a:xfrm>
+          <a:prstGeom prst="roundRect">
+            <a:avLst>
+              <a:gd name="adj" fmla="val 6000"/>
+            </a:avLst>
+          </a:prstGeom>
+          <a:solidFill>
+            <a:srgbClr val="1D1A14"/>
+          </a:solidFill>
+          <a:ln w="19050">
+            <a:solidFill>
+              <a:srgbClr val="332E24"/>
+            </a:solidFill>
+          </a:ln>
+          <a:effectLst/>
+        </p:spPr>
+        <p:style>
+          <a:lnRef idx="1">
+            <a:schemeClr val="accent1"/>
+          </a:lnRef>
+          <a:fillRef idx="3">
+            <a:schemeClr val="accent1"/>
+          </a:fillRef>
+          <a:effectRef idx="2">
+            <a:schemeClr val="accent1"/>
+          </a:effectRef>
+          <a:fontRef idx="minor">
+            <a:schemeClr val="lt1"/>
+          </a:fontRef>
+        </p:style>
+        <p:txBody>
+          <a:bodyPr rtlCol="0" anchor="ctr"/>
+          <a:lstStyle/>
+          <a:p>
+            <a:pPr algn="ctr"/>
+          </a:p>
+        </p:txBody>
+      </p:sp>
+      <p:sp>
+        <p:nvSpPr>
+          <p:cNvPr id="12" name="TextBox 11"/>
+          <p:cNvSpPr txBox="1"/>
+          <p:nvPr/>
+        </p:nvSpPr>
+        <p:spPr>
+          <a:xfrm>
+            <a:off x="4828032" y="1783080"/>
+            <a:ext cx="1408176" cy="365760"/>
+          </a:xfrm>
+          <a:prstGeom prst="rect">
+            <a:avLst/>
+          </a:prstGeom>
+          <a:noFill/>
+        </p:spPr>
+        <p:txBody>
+          <a:bodyPr wrap="square" anchor="t">
+            <a:spAutoFit/>
+          </a:bodyPr>
+          <a:lstStyle/>
+          <a:p>
+            <a:pPr algn="ctr">
+              <a:lnSpc>
+                <a:spcPct val="115000"/>
+              </a:lnSpc>
+            </a:pPr>
+            <a:r>
+              <a:rPr sz="1150" b="1">
+                <a:solidFill>
+                  <a:srgbClr val="EDE6D9"/>
+                </a:solidFill>
+                <a:latin typeface="Consolas"/>
+              </a:rPr>
+              <a:t>ETL</a:t>
+            </a:r>
+          </a:p>
+        </p:txBody>
+      </p:sp>
+      <p:sp>
+        <p:nvSpPr>
+          <p:cNvPr id="13" name="TextBox 12"/>
+          <p:cNvSpPr txBox="1"/>
+          <p:nvPr/>
+        </p:nvSpPr>
+        <p:spPr>
+          <a:xfrm>
+            <a:off x="4828032" y="2112264"/>
+            <a:ext cx="1408176" cy="411479"/>
+          </a:xfrm>
+          <a:prstGeom prst="rect">
+            <a:avLst/>
+          </a:prstGeom>
+          <a:noFill/>
+        </p:spPr>
+        <p:txBody>
+          <a:bodyPr wrap="square" anchor="t">
+            <a:spAutoFit/>
+          </a:bodyPr>
+          <a:lstStyle/>
+          <a:p>
+            <a:pPr algn="ctr">
+              <a:lnSpc>
+                <a:spcPct val="110000"/>
+              </a:lnSpc>
+            </a:pPr>
+            <a:r>
+              <a:rPr sz="900" b="0">
+                <a:solidFill>
+                  <a:srgbClr val="A89C88"/>
+                </a:solidFill>
+                <a:latin typeface="Segoe UI"/>
+              </a:rPr>
+              <a:t>загрузка: здесь</a:t>
+            </a:r>
+          </a:p>
+          <a:p>
+            <a:pPr algn="ctr">
+              <a:lnSpc>
+                <a:spcPct val="110000"/>
+              </a:lnSpc>
+            </a:pPr>
+            <a:r>
+              <a:rPr sz="900" b="0">
+                <a:solidFill>
+                  <a:srgbClr val="A89C88"/>
+                </a:solidFill>
+                <a:latin typeface="Segoe UI"/>
+              </a:rPr>
+              <a:t>теряется 10%</a:t>
+            </a:r>
+          </a:p>
+        </p:txBody>
+      </p:sp>
+      <p:sp>
+        <p:nvSpPr>
+          <p:cNvPr id="14" name="Rounded Rectangle 13"/>
+          <p:cNvSpPr/>
+          <p:nvPr/>
+        </p:nvSpPr>
+        <p:spPr>
+          <a:xfrm>
+            <a:off x="6537960" y="1691640"/>
+            <a:ext cx="1828800" cy="868680"/>
+          </a:xfrm>
+          <a:prstGeom prst="roundRect">
+            <a:avLst>
+              <a:gd name="adj" fmla="val 6000"/>
+            </a:avLst>
+          </a:prstGeom>
+          <a:solidFill>
+            <a:srgbClr val="1D1A14"/>
+          </a:solidFill>
+          <a:ln w="19050">
+            <a:solidFill>
+              <a:srgbClr val="332E24"/>
+            </a:solidFill>
+          </a:ln>
+          <a:effectLst/>
+        </p:spPr>
+        <p:style>
+          <a:lnRef idx="1">
+            <a:schemeClr val="accent1"/>
+          </a:lnRef>
+          <a:fillRef idx="3">
+            <a:schemeClr val="accent1"/>
+          </a:fillRef>
+          <a:effectRef idx="2">
+            <a:schemeClr val="accent1"/>
+          </a:effectRef>
+          <a:fontRef idx="minor">
+            <a:schemeClr val="lt1"/>
+          </a:fontRef>
+        </p:style>
+        <p:txBody>
+          <a:bodyPr rtlCol="0" anchor="ctr"/>
+          <a:lstStyle/>
+          <a:p>
+            <a:pPr algn="ctr"/>
+          </a:p>
+        </p:txBody>
+      </p:sp>
+      <p:sp>
+        <p:nvSpPr>
+          <p:cNvPr id="15" name="TextBox 14"/>
+          <p:cNvSpPr txBox="1"/>
+          <p:nvPr/>
+        </p:nvSpPr>
+        <p:spPr>
+          <a:xfrm>
+            <a:off x="6611112" y="1783080"/>
+            <a:ext cx="1682496" cy="365760"/>
+          </a:xfrm>
+          <a:prstGeom prst="rect">
+            <a:avLst/>
+          </a:prstGeom>
+          <a:noFill/>
+        </p:spPr>
+        <p:txBody>
+          <a:bodyPr wrap="square" anchor="t">
+            <a:spAutoFit/>
+          </a:bodyPr>
+          <a:lstStyle/>
+          <a:p>
+            <a:pPr algn="ctr">
+              <a:lnSpc>
+                <a:spcPct val="115000"/>
+              </a:lnSpc>
+            </a:pPr>
+            <a:r>
+              <a:rPr sz="1150" b="1">
+                <a:solidFill>
+                  <a:srgbClr val="EDE6D9"/>
+                </a:solidFill>
+                <a:latin typeface="Consolas"/>
+              </a:rPr>
+              <a:t>ВИТРИНА doc_oper</a:t>
+            </a:r>
+          </a:p>
+        </p:txBody>
+      </p:sp>
+      <p:sp>
+        <p:nvSpPr>
+          <p:cNvPr id="16" name="TextBox 15"/>
+          <p:cNvSpPr txBox="1"/>
+          <p:nvPr/>
+        </p:nvSpPr>
+        <p:spPr>
+          <a:xfrm>
+            <a:off x="6611112" y="2112264"/>
+            <a:ext cx="1682496" cy="411479"/>
+          </a:xfrm>
+          <a:prstGeom prst="rect">
+            <a:avLst/>
+          </a:prstGeom>
+          <a:noFill/>
+        </p:spPr>
+        <p:txBody>
+          <a:bodyPr wrap="square" anchor="t">
+            <a:spAutoFit/>
+          </a:bodyPr>
+          <a:lstStyle/>
+          <a:p>
+            <a:pPr algn="ctr">
+              <a:lnSpc>
+                <a:spcPct val="110000"/>
+              </a:lnSpc>
+            </a:pPr>
+            <a:r>
+              <a:rPr sz="900" b="0">
+                <a:solidFill>
+                  <a:srgbClr val="A89C88"/>
+                </a:solidFill>
+                <a:latin typeface="Segoe UI"/>
+              </a:rPr>
+              <a:t>900 000 операций</a:t>
+            </a:r>
+          </a:p>
+          <a:p>
+            <a:pPr algn="ctr">
+              <a:lnSpc>
+                <a:spcPct val="110000"/>
+              </a:lnSpc>
+            </a:pPr>
+            <a:r>
+              <a:rPr sz="900" b="0">
+                <a:solidFill>
+                  <a:srgbClr val="A89C88"/>
+                </a:solidFill>
+                <a:latin typeface="Segoe UI"/>
+              </a:rPr>
+              <a:t>объект аудита</a:t>
+            </a:r>
+          </a:p>
+        </p:txBody>
+      </p:sp>
+      <p:sp>
+        <p:nvSpPr>
+          <p:cNvPr id="17" name="Rounded Rectangle 16"/>
+          <p:cNvSpPr/>
+          <p:nvPr/>
+        </p:nvSpPr>
+        <p:spPr>
+          <a:xfrm>
+            <a:off x="8641080" y="1691640"/>
+            <a:ext cx="1051560" cy="868680"/>
+          </a:xfrm>
+          <a:prstGeom prst="roundRect">
+            <a:avLst>
+              <a:gd name="adj" fmla="val 6000"/>
+            </a:avLst>
+          </a:prstGeom>
+          <a:solidFill>
+            <a:srgbClr val="1D1A14"/>
+          </a:solidFill>
+          <a:ln w="19050">
+            <a:solidFill>
+              <a:srgbClr val="E0616B"/>
+            </a:solidFill>
+          </a:ln>
+          <a:effectLst/>
+        </p:spPr>
+        <p:style>
+          <a:lnRef idx="1">
+            <a:schemeClr val="accent1"/>
+          </a:lnRef>
+          <a:fillRef idx="3">
+            <a:schemeClr val="accent1"/>
+          </a:fillRef>
+          <a:effectRef idx="2">
+            <a:schemeClr val="accent1"/>
+          </a:effectRef>
+          <a:fontRef idx="minor">
+            <a:schemeClr val="lt1"/>
+          </a:fontRef>
+        </p:style>
+        <p:txBody>
+          <a:bodyPr rtlCol="0" anchor="ctr"/>
+          <a:lstStyle/>
+          <a:p>
+            <a:pPr algn="ctr"/>
+          </a:p>
+        </p:txBody>
+      </p:sp>
+      <p:sp>
+        <p:nvSpPr>
+          <p:cNvPr id="18" name="TextBox 17"/>
+          <p:cNvSpPr txBox="1"/>
+          <p:nvPr/>
+        </p:nvSpPr>
+        <p:spPr>
+          <a:xfrm>
+            <a:off x="8714232" y="1783080"/>
+            <a:ext cx="905255" cy="365760"/>
+          </a:xfrm>
+          <a:prstGeom prst="rect">
+            <a:avLst/>
+          </a:prstGeom>
+          <a:noFill/>
+        </p:spPr>
+        <p:txBody>
+          <a:bodyPr wrap="square" anchor="t">
+            <a:spAutoFit/>
+          </a:bodyPr>
+          <a:lstStyle/>
+          <a:p>
+            <a:pPr algn="ctr">
+              <a:lnSpc>
+                <a:spcPct val="115000"/>
+              </a:lnSpc>
+            </a:pPr>
+            <a:r>
+              <a:rPr sz="1150" b="1">
+                <a:solidFill>
+                  <a:srgbClr val="E0616B"/>
+                </a:solidFill>
+                <a:latin typeface="Consolas"/>
+              </a:rPr>
+              <a:t>ГЕЙТ</a:t>
+            </a:r>
+          </a:p>
+        </p:txBody>
+      </p:sp>
+      <p:sp>
+        <p:nvSpPr>
+          <p:cNvPr id="19" name="TextBox 18"/>
+          <p:cNvSpPr txBox="1"/>
+          <p:nvPr/>
+        </p:nvSpPr>
+        <p:spPr>
+          <a:xfrm>
+            <a:off x="8714232" y="2112264"/>
+            <a:ext cx="905255" cy="411479"/>
+          </a:xfrm>
+          <a:prstGeom prst="rect">
+            <a:avLst/>
+          </a:prstGeom>
+          <a:noFill/>
+        </p:spPr>
+        <p:txBody>
+          <a:bodyPr wrap="square" anchor="t">
+            <a:spAutoFit/>
+          </a:bodyPr>
+          <a:lstStyle/>
+          <a:p>
+            <a:pPr algn="ctr">
+              <a:lnSpc>
+                <a:spcPct val="110000"/>
+              </a:lnSpc>
+            </a:pPr>
+            <a:r>
+              <a:rPr sz="900" b="0">
+                <a:solidFill>
+                  <a:srgbClr val="A89C88"/>
+                </a:solidFill>
+                <a:latin typeface="Segoe UI"/>
+              </a:rPr>
+              <a:t>только</a:t>
+            </a:r>
+          </a:p>
+          <a:p>
+            <a:pPr algn="ctr">
+              <a:lnSpc>
+                <a:spcPct val="110000"/>
+              </a:lnSpc>
+            </a:pPr>
+            <a:r>
+              <a:rPr sz="900" b="0">
+                <a:solidFill>
+                  <a:srgbClr val="A89C88"/>
+                </a:solidFill>
+                <a:latin typeface="Segoe UI"/>
+              </a:rPr>
+              <a:t>при PASS</a:t>
+            </a:r>
+          </a:p>
+        </p:txBody>
+      </p:sp>
+      <p:sp>
+        <p:nvSpPr>
+          <p:cNvPr id="20" name="Rounded Rectangle 19"/>
+          <p:cNvSpPr/>
+          <p:nvPr/>
+        </p:nvSpPr>
+        <p:spPr>
+          <a:xfrm>
+            <a:off x="9966960" y="1691640"/>
+            <a:ext cx="1600200" cy="868680"/>
+          </a:xfrm>
+          <a:prstGeom prst="roundRect">
+            <a:avLst>
+              <a:gd name="adj" fmla="val 6000"/>
+            </a:avLst>
+          </a:prstGeom>
+          <a:solidFill>
+            <a:srgbClr val="1D1A14"/>
+          </a:solidFill>
+          <a:ln w="19050">
+            <a:solidFill>
+              <a:srgbClr val="332E24"/>
+            </a:solidFill>
+          </a:ln>
+          <a:effectLst/>
+        </p:spPr>
+        <p:style>
+          <a:lnRef idx="1">
+            <a:schemeClr val="accent1"/>
+          </a:lnRef>
+          <a:fillRef idx="3">
+            <a:schemeClr val="accent1"/>
+          </a:fillRef>
+          <a:effectRef idx="2">
+            <a:schemeClr val="accent1"/>
+          </a:effectRef>
+          <a:fontRef idx="minor">
+            <a:schemeClr val="lt1"/>
+          </a:fontRef>
+        </p:style>
+        <p:txBody>
+          <a:bodyPr rtlCol="0" anchor="ctr"/>
+          <a:lstStyle/>
+          <a:p>
+            <a:pPr algn="ctr"/>
+          </a:p>
+        </p:txBody>
+      </p:sp>
+      <p:sp>
+        <p:nvSpPr>
+          <p:cNvPr id="21" name="TextBox 20"/>
+          <p:cNvSpPr txBox="1"/>
+          <p:nvPr/>
+        </p:nvSpPr>
+        <p:spPr>
+          <a:xfrm>
+            <a:off x="10040112" y="1783080"/>
+            <a:ext cx="1453896" cy="365760"/>
+          </a:xfrm>
+          <a:prstGeom prst="rect">
+            <a:avLst/>
+          </a:prstGeom>
+          <a:noFill/>
+        </p:spPr>
+        <p:txBody>
+          <a:bodyPr wrap="square" anchor="t">
+            <a:spAutoFit/>
+          </a:bodyPr>
+          <a:lstStyle/>
+          <a:p>
+            <a:pPr algn="ctr">
+              <a:lnSpc>
+                <a:spcPct val="115000"/>
+              </a:lnSpc>
+            </a:pPr>
+            <a:r>
+              <a:rPr sz="1150" b="1">
+                <a:solidFill>
+                  <a:srgbClr val="EDE6D9"/>
+                </a:solidFill>
+                <a:latin typeface="Consolas"/>
+              </a:rPr>
+              <a:t>КОНТРОЛЬ</a:t>
+            </a:r>
+          </a:p>
+        </p:txBody>
+      </p:sp>
+      <p:sp>
+        <p:nvSpPr>
+          <p:cNvPr id="22" name="TextBox 21"/>
+          <p:cNvSpPr txBox="1"/>
+          <p:nvPr/>
+        </p:nvSpPr>
+        <p:spPr>
+          <a:xfrm>
+            <a:off x="10040112" y="2112264"/>
+            <a:ext cx="1453896" cy="411479"/>
+          </a:xfrm>
+          <a:prstGeom prst="rect">
+            <a:avLst/>
+          </a:prstGeom>
+          <a:noFill/>
+        </p:spPr>
+        <p:txBody>
+          <a:bodyPr wrap="square" anchor="t">
+            <a:spAutoFit/>
+          </a:bodyPr>
+          <a:lstStyle/>
+          <a:p>
+            <a:pPr algn="ctr">
+              <a:lnSpc>
+                <a:spcPct val="110000"/>
+              </a:lnSpc>
+            </a:pPr>
+            <a:r>
+              <a:rPr sz="900" b="0">
+                <a:solidFill>
+                  <a:srgbClr val="A89C88"/>
+                </a:solidFill>
+                <a:latin typeface="Segoe UI"/>
+              </a:rPr>
+              <a:t>сверка деклараций,</a:t>
+            </a:r>
+          </a:p>
+          <a:p>
+            <a:pPr algn="ctr">
+              <a:lnSpc>
+                <a:spcPct val="110000"/>
+              </a:lnSpc>
+            </a:pPr>
+            <a:r>
+              <a:rPr sz="900" b="0">
+                <a:solidFill>
+                  <a:srgbClr val="A89C88"/>
+                </a:solidFill>
+                <a:latin typeface="Segoe UI"/>
+              </a:rPr>
+              <a:t>статистика</a:t>
+            </a:r>
+          </a:p>
+        </p:txBody>
+      </p:sp>
+      <p:cxnSp>
+        <p:nvCxnSpPr>
+          <p:cNvPr id="23" name="Connector 22"/>
+          <p:cNvCxnSpPr/>
+          <p:nvPr/>
+        </p:nvCxnSpPr>
+        <p:spPr>
+          <a:xfrm>
+            <a:off x="2377440" y="2125980"/>
+            <a:ext cx="228600" cy="0"/>
+          </a:xfrm>
+          <a:prstGeom prst="line">
+            <a:avLst/>
+          </a:prstGeom>
+          <a:ln w="19050">
+            <a:solidFill>
+              <a:srgbClr val="756A5A"/>
+            </a:solidFill>
+            <a:tailEnd type="triangle" w="med" len="med"/>
+          </a:ln>
+        </p:spPr>
+        <p:style>
+          <a:lnRef idx="2">
+            <a:schemeClr val="accent1"/>
+          </a:lnRef>
+          <a:fillRef idx="0">
+            <a:schemeClr val="accent1"/>
+          </a:fillRef>
+          <a:effectRef idx="1">
+            <a:schemeClr val="accent1"/>
+          </a:effectRef>
+          <a:fontRef idx="minor">
+            <a:schemeClr val="tx1"/>
+          </a:fontRef>
+        </p:style>
+      </p:cxnSp>
+      <p:cxnSp>
+        <p:nvCxnSpPr>
+          <p:cNvPr id="24" name="Connector 23"/>
+          <p:cNvCxnSpPr/>
+          <p:nvPr/>
+        </p:nvCxnSpPr>
+        <p:spPr>
+          <a:xfrm>
+            <a:off x="4526280" y="2125980"/>
+            <a:ext cx="228600" cy="0"/>
+          </a:xfrm>
+          <a:prstGeom prst="line">
+            <a:avLst/>
+          </a:prstGeom>
+          <a:ln w="19050">
+            <a:solidFill>
+              <a:srgbClr val="756A5A"/>
+            </a:solidFill>
+            <a:tailEnd type="triangle" w="med" len="med"/>
+          </a:ln>
+        </p:spPr>
+        <p:style>
+          <a:lnRef idx="2">
+            <a:schemeClr val="accent1"/>
+          </a:lnRef>
+          <a:fillRef idx="0">
+            <a:schemeClr val="accent1"/>
+          </a:fillRef>
+          <a:effectRef idx="1">
+            <a:schemeClr val="accent1"/>
+          </a:effectRef>
+          <a:fontRef idx="minor">
+            <a:schemeClr val="tx1"/>
+          </a:fontRef>
+        </p:style>
+      </p:cxnSp>
+      <p:cxnSp>
+        <p:nvCxnSpPr>
+          <p:cNvPr id="25" name="Connector 24"/>
+          <p:cNvCxnSpPr/>
+          <p:nvPr/>
+        </p:nvCxnSpPr>
+        <p:spPr>
+          <a:xfrm>
+            <a:off x="6309360" y="2125980"/>
+            <a:ext cx="228600" cy="0"/>
+          </a:xfrm>
+          <a:prstGeom prst="line">
+            <a:avLst/>
+          </a:prstGeom>
+          <a:ln w="19050">
+            <a:solidFill>
+              <a:srgbClr val="756A5A"/>
+            </a:solidFill>
+            <a:tailEnd type="triangle" w="med" len="med"/>
+          </a:ln>
+        </p:spPr>
+        <p:style>
+          <a:lnRef idx="2">
+            <a:schemeClr val="accent1"/>
+          </a:lnRef>
+          <a:fillRef idx="0">
+            <a:schemeClr val="accent1"/>
+          </a:fillRef>
+          <a:effectRef idx="1">
+            <a:schemeClr val="accent1"/>
+          </a:effectRef>
+          <a:fontRef idx="minor">
+            <a:schemeClr val="tx1"/>
+          </a:fontRef>
+        </p:style>
+      </p:cxnSp>
+      <p:cxnSp>
+        <p:nvCxnSpPr>
+          <p:cNvPr id="26" name="Connector 25"/>
+          <p:cNvCxnSpPr/>
+          <p:nvPr/>
+        </p:nvCxnSpPr>
+        <p:spPr>
+          <a:xfrm>
+            <a:off x="8366760" y="2125980"/>
+            <a:ext cx="274320" cy="0"/>
+          </a:xfrm>
+          <a:prstGeom prst="line">
+            <a:avLst/>
+          </a:prstGeom>
+          <a:ln w="19050">
+            <a:solidFill>
+              <a:srgbClr val="756A5A"/>
+            </a:solidFill>
+            <a:tailEnd type="triangle" w="med" len="med"/>
+          </a:ln>
+        </p:spPr>
+        <p:style>
+          <a:lnRef idx="2">
+            <a:schemeClr val="accent1"/>
+          </a:lnRef>
+          <a:fillRef idx="0">
+            <a:schemeClr val="accent1"/>
+          </a:fillRef>
+          <a:effectRef idx="1">
+            <a:schemeClr val="accent1"/>
+          </a:effectRef>
+          <a:fontRef idx="minor">
+            <a:schemeClr val="tx1"/>
+          </a:fontRef>
+        </p:style>
+      </p:cxnSp>
+      <p:cxnSp>
+        <p:nvCxnSpPr>
+          <p:cNvPr id="27" name="Connector 26"/>
+          <p:cNvCxnSpPr/>
+          <p:nvPr/>
+        </p:nvCxnSpPr>
+        <p:spPr>
+          <a:xfrm>
+            <a:off x="9692640" y="2125980"/>
+            <a:ext cx="274320" cy="0"/>
+          </a:xfrm>
+          <a:prstGeom prst="line">
+            <a:avLst/>
+          </a:prstGeom>
+          <a:ln w="19050">
+            <a:solidFill>
+              <a:srgbClr val="756A5A"/>
+            </a:solidFill>
+            <a:tailEnd type="triangle" w="med" len="med"/>
+          </a:ln>
+        </p:spPr>
+        <p:style>
+          <a:lnRef idx="2">
+            <a:schemeClr val="accent1"/>
+          </a:lnRef>
+          <a:fillRef idx="0">
+            <a:schemeClr val="accent1"/>
+          </a:fillRef>
+          <a:effectRef idx="1">
+            <a:schemeClr val="accent1"/>
+          </a:effectRef>
+          <a:fontRef idx="minor">
+            <a:schemeClr val="tx1"/>
+          </a:fontRef>
+        </p:style>
+      </p:cxnSp>
+      <p:sp>
+        <p:nvSpPr>
+          <p:cNvPr id="28" name="TextBox 27"/>
+          <p:cNvSpPr txBox="1"/>
+          <p:nvPr/>
+        </p:nvSpPr>
+        <p:spPr>
+          <a:xfrm>
+            <a:off x="640080" y="3154680"/>
+            <a:ext cx="5486400" cy="274320"/>
+          </a:xfrm>
+          <a:prstGeom prst="rect">
+            <a:avLst/>
+          </a:prstGeom>
+          <a:noFill/>
+        </p:spPr>
+        <p:txBody>
+          <a:bodyPr wrap="square" anchor="t">
+            <a:spAutoFit/>
+          </a:bodyPr>
+          <a:lstStyle/>
+          <a:p>
+            <a:pPr algn="l">
+              <a:lnSpc>
+                <a:spcPct val="115000"/>
+              </a:lnSpc>
+            </a:pPr>
+            <a:r>
+              <a:rPr sz="1000" b="1">
+                <a:solidFill>
+                  <a:srgbClr val="DBA25A"/>
+                </a:solidFill>
+                <a:latin typeface="Consolas"/>
+              </a:rPr>
+              <a:t>КОНТУР КОНТРОЛЯ КАЧЕСТВА</a:t>
+            </a:r>
+          </a:p>
+        </p:txBody>
+      </p:sp>
+      <p:sp>
+        <p:nvSpPr>
+          <p:cNvPr id="29" name="Rounded Rectangle 28"/>
+          <p:cNvSpPr/>
+          <p:nvPr/>
+        </p:nvSpPr>
+        <p:spPr>
+          <a:xfrm>
+            <a:off x="640080" y="3429000"/>
+            <a:ext cx="1737360" cy="868680"/>
+          </a:xfrm>
+          <a:prstGeom prst="roundRect">
+            <a:avLst>
+              <a:gd name="adj" fmla="val 6000"/>
+            </a:avLst>
+          </a:prstGeom>
+          <a:solidFill>
+            <a:srgbClr val="1D1A14"/>
+          </a:solidFill>
+          <a:ln w="19050">
+            <a:solidFill>
+              <a:srgbClr val="DBA25A"/>
+            </a:solidFill>
+          </a:ln>
+          <a:effectLst/>
+        </p:spPr>
+        <p:style>
+          <a:lnRef idx="1">
+            <a:schemeClr val="accent1"/>
+          </a:lnRef>
+          <a:fillRef idx="3">
+            <a:schemeClr val="accent1"/>
+          </a:fillRef>
+          <a:effectRef idx="2">
+            <a:schemeClr val="accent1"/>
+          </a:effectRef>
+          <a:fontRef idx="minor">
+            <a:schemeClr val="lt1"/>
+          </a:fontRef>
+        </p:style>
+        <p:txBody>
+          <a:bodyPr rtlCol="0" anchor="ctr"/>
+          <a:lstStyle/>
+          <a:p>
+            <a:pPr algn="ctr"/>
+          </a:p>
+        </p:txBody>
+      </p:sp>
+      <p:sp>
+        <p:nvSpPr>
+          <p:cNvPr id="30" name="TextBox 29"/>
+          <p:cNvSpPr txBox="1"/>
+          <p:nvPr/>
+        </p:nvSpPr>
+        <p:spPr>
+          <a:xfrm>
+            <a:off x="713231" y="3520440"/>
+            <a:ext cx="1591056" cy="365760"/>
+          </a:xfrm>
+          <a:prstGeom prst="rect">
+            <a:avLst/>
+          </a:prstGeom>
+          <a:noFill/>
+        </p:spPr>
+        <p:txBody>
+          <a:bodyPr wrap="square" anchor="t">
+            <a:spAutoFit/>
+          </a:bodyPr>
+          <a:lstStyle/>
+          <a:p>
+            <a:pPr algn="ctr">
+              <a:lnSpc>
+                <a:spcPct val="115000"/>
+              </a:lnSpc>
+            </a:pPr>
+            <a:r>
+              <a:rPr sz="1150" b="1">
+                <a:solidFill>
+                  <a:srgbClr val="EDE6D9"/>
+                </a:solidFill>
+                <a:latin typeface="Consolas"/>
+              </a:rPr>
+              <a:t>AIRFLOW DAG</a:t>
+            </a:r>
+          </a:p>
+        </p:txBody>
+      </p:sp>
+      <p:sp>
+        <p:nvSpPr>
+          <p:cNvPr id="31" name="TextBox 30"/>
+          <p:cNvSpPr txBox="1"/>
+          <p:nvPr/>
+        </p:nvSpPr>
+        <p:spPr>
+          <a:xfrm>
+            <a:off x="713231" y="3849624"/>
+            <a:ext cx="1591056" cy="411479"/>
+          </a:xfrm>
+          <a:prstGeom prst="rect">
+            <a:avLst/>
+          </a:prstGeom>
+          <a:noFill/>
+        </p:spPr>
+        <p:txBody>
+          <a:bodyPr wrap="square" anchor="t">
+            <a:spAutoFit/>
+          </a:bodyPr>
+          <a:lstStyle/>
+          <a:p>
+            <a:pPr algn="ctr">
+              <a:lnSpc>
+                <a:spcPct val="110000"/>
+              </a:lnSpc>
+            </a:pPr>
+            <a:r>
+              <a:rPr sz="900" b="0">
+                <a:solidFill>
+                  <a:srgbClr val="A89C88"/>
+                </a:solidFill>
+                <a:latin typeface="Segoe UI"/>
+              </a:rPr>
+              <a:t>06:00 UTC ежедневно</a:t>
+            </a:r>
+          </a:p>
+          <a:p>
+            <a:pPr algn="ctr">
+              <a:lnSpc>
+                <a:spcPct val="110000"/>
+              </a:lnSpc>
+            </a:pPr>
+            <a:r>
+              <a:rPr sz="900" b="0">
+                <a:solidFill>
+                  <a:srgbClr val="A89C88"/>
+                </a:solidFill>
+                <a:latin typeface="Segoe UI"/>
+              </a:rPr>
+              <a:t>креды из Connection</a:t>
+            </a:r>
+          </a:p>
+        </p:txBody>
+      </p:sp>
+      <p:sp>
+        <p:nvSpPr>
+          <p:cNvPr id="32" name="Rounded Rectangle 31"/>
+          <p:cNvSpPr/>
+          <p:nvPr/>
+        </p:nvSpPr>
+        <p:spPr>
+          <a:xfrm>
+            <a:off x="2606040" y="3429000"/>
+            <a:ext cx="1920240" cy="868680"/>
+          </a:xfrm>
+          <a:prstGeom prst="roundRect">
+            <a:avLst>
+              <a:gd name="adj" fmla="val 6000"/>
+            </a:avLst>
+          </a:prstGeom>
+          <a:solidFill>
+            <a:srgbClr val="1D1A14"/>
+          </a:solidFill>
+          <a:ln w="19050">
+            <a:solidFill>
+              <a:srgbClr val="DBA25A"/>
+            </a:solidFill>
+          </a:ln>
+          <a:effectLst/>
+        </p:spPr>
+        <p:style>
+          <a:lnRef idx="1">
+            <a:schemeClr val="accent1"/>
+          </a:lnRef>
+          <a:fillRef idx="3">
+            <a:schemeClr val="accent1"/>
+          </a:fillRef>
+          <a:effectRef idx="2">
+            <a:schemeClr val="accent1"/>
+          </a:effectRef>
+          <a:fontRef idx="minor">
+            <a:schemeClr val="lt1"/>
+          </a:fontRef>
+        </p:style>
+        <p:txBody>
+          <a:bodyPr rtlCol="0" anchor="ctr"/>
+          <a:lstStyle/>
+          <a:p>
+            <a:pPr algn="ctr"/>
+          </a:p>
+        </p:txBody>
+      </p:sp>
+      <p:sp>
+        <p:nvSpPr>
+          <p:cNvPr id="33" name="TextBox 32"/>
+          <p:cNvSpPr txBox="1"/>
+          <p:nvPr/>
+        </p:nvSpPr>
+        <p:spPr>
+          <a:xfrm>
+            <a:off x="2679192" y="3520440"/>
+            <a:ext cx="1773936" cy="365760"/>
+          </a:xfrm>
+          <a:prstGeom prst="rect">
+            <a:avLst/>
+          </a:prstGeom>
+          <a:noFill/>
+        </p:spPr>
+        <p:txBody>
+          <a:bodyPr wrap="square" anchor="t">
+            <a:spAutoFit/>
+          </a:bodyPr>
+          <a:lstStyle/>
+          <a:p>
+            <a:pPr algn="ctr">
+              <a:lnSpc>
+                <a:spcPct val="115000"/>
+              </a:lnSpc>
+            </a:pPr>
+            <a:r>
+              <a:rPr sz="1150" b="1">
+                <a:solidFill>
+                  <a:srgbClr val="EDE6D9"/>
+                </a:solidFill>
+                <a:latin typeface="Consolas"/>
+              </a:rPr>
+              <a:t>ПАЙПЛАЙН</a:t>
+            </a:r>
+          </a:p>
+        </p:txBody>
+      </p:sp>
+      <p:sp>
+        <p:nvSpPr>
+          <p:cNvPr id="34" name="TextBox 33"/>
+          <p:cNvSpPr txBox="1"/>
+          <p:nvPr/>
+        </p:nvSpPr>
+        <p:spPr>
+          <a:xfrm>
+            <a:off x="2679192" y="3849624"/>
+            <a:ext cx="1773936" cy="411479"/>
+          </a:xfrm>
+          <a:prstGeom prst="rect">
+            <a:avLst/>
+          </a:prstGeom>
+          <a:noFill/>
+        </p:spPr>
+        <p:txBody>
+          <a:bodyPr wrap="square" anchor="t">
+            <a:spAutoFit/>
+          </a:bodyPr>
+          <a:lstStyle/>
+          <a:p>
+            <a:pPr algn="ctr">
+              <a:lnSpc>
+                <a:spcPct val="110000"/>
+              </a:lnSpc>
+            </a:pPr>
+            <a:r>
+              <a:rPr sz="900" b="0">
+                <a:solidFill>
+                  <a:srgbClr val="A89C88"/>
+                </a:solidFill>
+                <a:latin typeface="Segoe UI"/>
+              </a:rPr>
+              <a:t>dq_pipeline.py</a:t>
+            </a:r>
+          </a:p>
+          <a:p>
+            <a:pPr algn="ctr">
+              <a:lnSpc>
+                <a:spcPct val="110000"/>
+              </a:lnSpc>
+            </a:pPr>
+            <a:r>
+              <a:rPr sz="900" b="0">
+                <a:solidFill>
+                  <a:srgbClr val="A89C88"/>
+                </a:solidFill>
+                <a:latin typeface="Segoe UI"/>
+              </a:rPr>
+              <a:t>14 правил, один SQL</a:t>
+            </a:r>
+          </a:p>
+        </p:txBody>
+      </p:sp>
+      <p:sp>
+        <p:nvSpPr>
+          <p:cNvPr id="35" name="Rounded Rectangle 34"/>
+          <p:cNvSpPr/>
+          <p:nvPr/>
+        </p:nvSpPr>
+        <p:spPr>
+          <a:xfrm>
+            <a:off x="4754880" y="3429000"/>
+            <a:ext cx="1828800" cy="868680"/>
+          </a:xfrm>
+          <a:prstGeom prst="roundRect">
+            <a:avLst>
+              <a:gd name="adj" fmla="val 6000"/>
+            </a:avLst>
+          </a:prstGeom>
+          <a:solidFill>
+            <a:srgbClr val="1D1A14"/>
+          </a:solidFill>
+          <a:ln w="19050">
+            <a:solidFill>
+              <a:srgbClr val="DBA25A"/>
+            </a:solidFill>
+          </a:ln>
+          <a:effectLst/>
+        </p:spPr>
+        <p:style>
+          <a:lnRef idx="1">
+            <a:schemeClr val="accent1"/>
+          </a:lnRef>
+          <a:fillRef idx="3">
+            <a:schemeClr val="accent1"/>
+          </a:fillRef>
+          <a:effectRef idx="2">
+            <a:schemeClr val="accent1"/>
+          </a:effectRef>
+          <a:fontRef idx="minor">
+            <a:schemeClr val="lt1"/>
+          </a:fontRef>
+        </p:style>
+        <p:txBody>
+          <a:bodyPr rtlCol="0" anchor="ctr"/>
+          <a:lstStyle/>
+          <a:p>
+            <a:pPr algn="ctr"/>
+          </a:p>
+        </p:txBody>
+      </p:sp>
+      <p:sp>
+        <p:nvSpPr>
+          <p:cNvPr id="36" name="TextBox 35"/>
+          <p:cNvSpPr txBox="1"/>
+          <p:nvPr/>
+        </p:nvSpPr>
+        <p:spPr>
+          <a:xfrm>
+            <a:off x="4828032" y="3520440"/>
+            <a:ext cx="1682496" cy="365760"/>
+          </a:xfrm>
+          <a:prstGeom prst="rect">
+            <a:avLst/>
+          </a:prstGeom>
+          <a:noFill/>
+        </p:spPr>
+        <p:txBody>
+          <a:bodyPr wrap="square" anchor="t">
+            <a:spAutoFit/>
+          </a:bodyPr>
+          <a:lstStyle/>
+          <a:p>
+            <a:pPr algn="ctr">
+              <a:lnSpc>
+                <a:spcPct val="115000"/>
+              </a:lnSpc>
+            </a:pPr>
+            <a:r>
+              <a:rPr sz="1150" b="1">
+                <a:solidFill>
+                  <a:srgbClr val="EDE6D9"/>
+                </a:solidFill>
+                <a:latin typeface="Consolas"/>
+              </a:rPr>
+              <a:t>ИСТОРИЯ ПРОГОНОВ</a:t>
+            </a:r>
+          </a:p>
+        </p:txBody>
+      </p:sp>
+      <p:sp>
+        <p:nvSpPr>
+          <p:cNvPr id="37" name="TextBox 36"/>
+          <p:cNvSpPr txBox="1"/>
+          <p:nvPr/>
+        </p:nvSpPr>
+        <p:spPr>
+          <a:xfrm>
+            <a:off x="4828032" y="3849624"/>
+            <a:ext cx="1682496" cy="411479"/>
+          </a:xfrm>
+          <a:prstGeom prst="rect">
+            <a:avLst/>
+          </a:prstGeom>
+          <a:noFill/>
+        </p:spPr>
+        <p:txBody>
+          <a:bodyPr wrap="square" anchor="t">
+            <a:spAutoFit/>
+          </a:bodyPr>
+          <a:lstStyle/>
+          <a:p>
+            <a:pPr algn="ctr">
+              <a:lnSpc>
+                <a:spcPct val="110000"/>
+              </a:lnSpc>
+            </a:pPr>
+            <a:r>
+              <a:rPr sz="900" b="0">
+                <a:solidFill>
+                  <a:srgbClr val="A89C88"/>
+                </a:solidFill>
+                <a:latin typeface="Segoe UI"/>
+              </a:rPr>
+              <a:t>dq_run_history</a:t>
+            </a:r>
+          </a:p>
+          <a:p>
+            <a:pPr algn="ctr">
+              <a:lnSpc>
+                <a:spcPct val="110000"/>
+              </a:lnSpc>
+            </a:pPr>
+            <a:r>
+              <a:rPr sz="900" b="0">
+                <a:solidFill>
+                  <a:srgbClr val="A89C88"/>
+                </a:solidFill>
+                <a:latin typeface="Segoe UI"/>
+              </a:rPr>
+              <a:t>dq_check_results</a:t>
+            </a:r>
+          </a:p>
+        </p:txBody>
+      </p:sp>
+      <p:sp>
+        <p:nvSpPr>
+          <p:cNvPr id="38" name="Rounded Rectangle 37"/>
+          <p:cNvSpPr/>
+          <p:nvPr/>
+        </p:nvSpPr>
+        <p:spPr>
+          <a:xfrm>
+            <a:off x="6812280" y="3429000"/>
+            <a:ext cx="1828800" cy="868680"/>
+          </a:xfrm>
+          <a:prstGeom prst="roundRect">
+            <a:avLst>
+              <a:gd name="adj" fmla="val 6000"/>
+            </a:avLst>
+          </a:prstGeom>
+          <a:solidFill>
+            <a:srgbClr val="1D1A14"/>
+          </a:solidFill>
+          <a:ln w="19050">
+            <a:solidFill>
+              <a:srgbClr val="DBA25A"/>
+            </a:solidFill>
+          </a:ln>
+          <a:effectLst/>
+        </p:spPr>
+        <p:style>
+          <a:lnRef idx="1">
+            <a:schemeClr val="accent1"/>
+          </a:lnRef>
+          <a:fillRef idx="3">
+            <a:schemeClr val="accent1"/>
+          </a:fillRef>
+          <a:effectRef idx="2">
+            <a:schemeClr val="accent1"/>
+          </a:effectRef>
+          <a:fontRef idx="minor">
+            <a:schemeClr val="lt1"/>
+          </a:fontRef>
+        </p:style>
+        <p:txBody>
+          <a:bodyPr rtlCol="0" anchor="ctr"/>
+          <a:lstStyle/>
+          <a:p>
+            <a:pPr algn="ctr"/>
+          </a:p>
+        </p:txBody>
+      </p:sp>
+      <p:sp>
+        <p:nvSpPr>
+          <p:cNvPr id="39" name="TextBox 38"/>
+          <p:cNvSpPr txBox="1"/>
+          <p:nvPr/>
+        </p:nvSpPr>
+        <p:spPr>
+          <a:xfrm>
+            <a:off x="6885432" y="3520440"/>
+            <a:ext cx="1682496" cy="365760"/>
+          </a:xfrm>
+          <a:prstGeom prst="rect">
+            <a:avLst/>
+          </a:prstGeom>
+          <a:noFill/>
+        </p:spPr>
+        <p:txBody>
+          <a:bodyPr wrap="square" anchor="t">
+            <a:spAutoFit/>
+          </a:bodyPr>
+          <a:lstStyle/>
+          <a:p>
+            <a:pPr algn="ctr">
+              <a:lnSpc>
+                <a:spcPct val="115000"/>
+              </a:lnSpc>
+            </a:pPr>
+            <a:r>
+              <a:rPr sz="1150" b="1">
+                <a:solidFill>
+                  <a:srgbClr val="EDE6D9"/>
+                </a:solidFill>
+                <a:latin typeface="Consolas"/>
+              </a:rPr>
+              <a:t>GRAFANA</a:t>
+            </a:r>
+          </a:p>
+        </p:txBody>
+      </p:sp>
+      <p:sp>
+        <p:nvSpPr>
+          <p:cNvPr id="40" name="TextBox 39"/>
+          <p:cNvSpPr txBox="1"/>
+          <p:nvPr/>
+        </p:nvSpPr>
+        <p:spPr>
+          <a:xfrm>
+            <a:off x="6885432" y="3849624"/>
+            <a:ext cx="1682496" cy="411479"/>
+          </a:xfrm>
+          <a:prstGeom prst="rect">
+            <a:avLst/>
+          </a:prstGeom>
+          <a:noFill/>
+        </p:spPr>
+        <p:txBody>
+          <a:bodyPr wrap="square" anchor="t">
+            <a:spAutoFit/>
+          </a:bodyPr>
+          <a:lstStyle/>
+          <a:p>
+            <a:pPr algn="ctr">
+              <a:lnSpc>
+                <a:spcPct val="110000"/>
+              </a:lnSpc>
+            </a:pPr>
+            <a:r>
+              <a:rPr sz="900" b="0">
+                <a:solidFill>
+                  <a:srgbClr val="A89C88"/>
+                </a:solidFill>
+                <a:latin typeface="Segoe UI"/>
+              </a:rPr>
+              <a:t>технический дашборд</a:t>
+            </a:r>
+          </a:p>
+          <a:p>
+            <a:pPr algn="ctr">
+              <a:lnSpc>
+                <a:spcPct val="110000"/>
+              </a:lnSpc>
+            </a:pPr>
+            <a:r>
+              <a:rPr sz="900" b="0">
+                <a:solidFill>
+                  <a:srgbClr val="A89C88"/>
+                </a:solidFill>
+                <a:latin typeface="Segoe UI"/>
+              </a:rPr>
+              <a:t>бизнес-дашборд</a:t>
+            </a:r>
+          </a:p>
+        </p:txBody>
+      </p:sp>
+      <p:cxnSp>
+        <p:nvCxnSpPr>
+          <p:cNvPr id="41" name="Connector 40"/>
+          <p:cNvCxnSpPr/>
+          <p:nvPr/>
+        </p:nvCxnSpPr>
+        <p:spPr>
+          <a:xfrm>
+            <a:off x="2377440" y="3863339"/>
+            <a:ext cx="228600" cy="0"/>
+          </a:xfrm>
+          <a:prstGeom prst="line">
+            <a:avLst/>
+          </a:prstGeom>
+          <a:ln w="19050">
+            <a:solidFill>
+              <a:srgbClr val="DBA25A"/>
+            </a:solidFill>
+            <a:tailEnd type="triangle" w="med" len="med"/>
+          </a:ln>
+        </p:spPr>
+        <p:style>
+          <a:lnRef idx="2">
+            <a:schemeClr val="accent1"/>
+          </a:lnRef>
+          <a:fillRef idx="0">
+            <a:schemeClr val="accent1"/>
+          </a:fillRef>
+          <a:effectRef idx="1">
+            <a:schemeClr val="accent1"/>
+          </a:effectRef>
+          <a:fontRef idx="minor">
+            <a:schemeClr val="tx1"/>
+          </a:fontRef>
+        </p:style>
+      </p:cxnSp>
+      <p:cxnSp>
+        <p:nvCxnSpPr>
+          <p:cNvPr id="42" name="Connector 41"/>
+          <p:cNvCxnSpPr/>
+          <p:nvPr/>
+        </p:nvCxnSpPr>
+        <p:spPr>
+          <a:xfrm>
+            <a:off x="4526280" y="3863339"/>
+            <a:ext cx="228600" cy="0"/>
+          </a:xfrm>
+          <a:prstGeom prst="line">
+            <a:avLst/>
+          </a:prstGeom>
+          <a:ln w="19050">
+            <a:solidFill>
+              <a:srgbClr val="DBA25A"/>
+            </a:solidFill>
+            <a:tailEnd type="triangle" w="med" len="med"/>
+          </a:ln>
+        </p:spPr>
+        <p:style>
+          <a:lnRef idx="2">
+            <a:schemeClr val="accent1"/>
+          </a:lnRef>
+          <a:fillRef idx="0">
+            <a:schemeClr val="accent1"/>
+          </a:fillRef>
+          <a:effectRef idx="1">
+            <a:schemeClr val="accent1"/>
+          </a:effectRef>
+          <a:fontRef idx="minor">
+            <a:schemeClr val="tx1"/>
+          </a:fontRef>
+        </p:style>
+      </p:cxnSp>
+      <p:cxnSp>
+        <p:nvCxnSpPr>
+          <p:cNvPr id="43" name="Connector 42"/>
+          <p:cNvCxnSpPr/>
+          <p:nvPr/>
+        </p:nvCxnSpPr>
+        <p:spPr>
+          <a:xfrm>
+            <a:off x="6583680" y="3863339"/>
+            <a:ext cx="228600" cy="0"/>
+          </a:xfrm>
+          <a:prstGeom prst="line">
+            <a:avLst/>
+          </a:prstGeom>
+          <a:ln w="19050">
+            <a:solidFill>
+              <a:srgbClr val="DBA25A"/>
+            </a:solidFill>
+            <a:tailEnd type="triangle" w="med" len="med"/>
+          </a:ln>
+        </p:spPr>
+        <p:style>
+          <a:lnRef idx="2">
+            <a:schemeClr val="accent1"/>
+          </a:lnRef>
+          <a:fillRef idx="0">
+            <a:schemeClr val="accent1"/>
+          </a:fillRef>
+          <a:effectRef idx="1">
+            <a:schemeClr val="accent1"/>
+          </a:effectRef>
+          <a:fontRef idx="minor">
+            <a:schemeClr val="tx1"/>
+          </a:fontRef>
+        </p:style>
+      </p:cxnSp>
+      <p:cxnSp>
+        <p:nvCxnSpPr>
+          <p:cNvPr id="44" name="Connector 43"/>
+          <p:cNvCxnSpPr/>
+          <p:nvPr/>
+        </p:nvCxnSpPr>
+        <p:spPr>
+          <a:xfrm>
+            <a:off x="3566160" y="2560320"/>
+            <a:ext cx="0" cy="868680"/>
+          </a:xfrm>
+          <a:prstGeom prst="line">
+            <a:avLst/>
+          </a:prstGeom>
+          <a:ln w="19050">
+            <a:solidFill>
+              <a:srgbClr val="DBA25A"/>
+            </a:solidFill>
+            <a:tailEnd type="triangle" w="med" len="med"/>
+          </a:ln>
+        </p:spPr>
+        <p:style>
+          <a:lnRef idx="2">
+            <a:schemeClr val="accent1"/>
+          </a:lnRef>
+          <a:fillRef idx="0">
+            <a:schemeClr val="accent1"/>
+          </a:fillRef>
+          <a:effectRef idx="1">
+            <a:schemeClr val="accent1"/>
+          </a:effectRef>
+          <a:fontRef idx="minor">
+            <a:schemeClr val="tx1"/>
+          </a:fontRef>
+        </p:style>
+      </p:cxnSp>
+      <p:cxnSp>
+        <p:nvCxnSpPr>
+          <p:cNvPr id="45" name="Connector 44"/>
+          <p:cNvCxnSpPr/>
+          <p:nvPr/>
+        </p:nvCxnSpPr>
+        <p:spPr>
+          <a:xfrm flipH="1">
+            <a:off x="4206240" y="2560320"/>
+            <a:ext cx="3246120" cy="868680"/>
+          </a:xfrm>
+          <a:prstGeom prst="line">
+            <a:avLst/>
+          </a:prstGeom>
+          <a:ln w="19050">
+            <a:solidFill>
+              <a:srgbClr val="DBA25A"/>
+            </a:solidFill>
+            <a:tailEnd type="triangle" w="med" len="med"/>
+          </a:ln>
+        </p:spPr>
+        <p:style>
+          <a:lnRef idx="2">
+            <a:schemeClr val="accent1"/>
+          </a:lnRef>
+          <a:fillRef idx="0">
+            <a:schemeClr val="accent1"/>
+          </a:fillRef>
+          <a:effectRef idx="1">
+            <a:schemeClr val="accent1"/>
+          </a:effectRef>
+          <a:fontRef idx="minor">
+            <a:schemeClr val="tx1"/>
+          </a:fontRef>
+        </p:style>
+      </p:cxnSp>
+      <p:sp>
+        <p:nvSpPr>
+          <p:cNvPr id="46" name="TextBox 45"/>
+          <p:cNvSpPr txBox="1"/>
+          <p:nvPr/>
+        </p:nvSpPr>
+        <p:spPr>
+          <a:xfrm>
+            <a:off x="3703320" y="2743200"/>
+            <a:ext cx="3291840" cy="274320"/>
+          </a:xfrm>
+          <a:prstGeom prst="rect">
+            <a:avLst/>
+          </a:prstGeom>
+          <a:noFill/>
+        </p:spPr>
+        <p:txBody>
+          <a:bodyPr wrap="square" anchor="t">
+            <a:spAutoFit/>
+          </a:bodyPr>
+          <a:lstStyle/>
+          <a:p>
+            <a:pPr algn="l">
+              <a:lnSpc>
+                <a:spcPct val="115000"/>
+              </a:lnSpc>
+            </a:pPr>
+            <a:r>
+              <a:rPr sz="900" b="0">
+                <a:solidFill>
+                  <a:srgbClr val="DBA25A"/>
+                </a:solidFill>
+                <a:latin typeface="Consolas"/>
+              </a:rPr>
+              <a:t>сверка витрины с эталоном</a:t>
+            </a:r>
+          </a:p>
+        </p:txBody>
+      </p:sp>
+      <p:cxnSp>
+        <p:nvCxnSpPr>
+          <p:cNvPr id="47" name="Connector 46"/>
+          <p:cNvCxnSpPr/>
+          <p:nvPr/>
+        </p:nvCxnSpPr>
+        <p:spPr>
+          <a:xfrm flipV="1">
+            <a:off x="4114800" y="2560320"/>
+            <a:ext cx="5029200" cy="868680"/>
+          </a:xfrm>
+          <a:prstGeom prst="line">
+            <a:avLst/>
+          </a:prstGeom>
+          <a:ln w="22225">
+            <a:solidFill>
+              <a:srgbClr val="E0616B"/>
+            </a:solidFill>
+            <a:tailEnd type="triangle" w="med" len="med"/>
+          </a:ln>
+        </p:spPr>
+        <p:style>
+          <a:lnRef idx="2">
+            <a:schemeClr val="accent1"/>
+          </a:lnRef>
+          <a:fillRef idx="0">
+            <a:schemeClr val="accent1"/>
+          </a:fillRef>
+          <a:effectRef idx="1">
+            <a:schemeClr val="accent1"/>
+          </a:effectRef>
+          <a:fontRef idx="minor">
+            <a:schemeClr val="tx1"/>
+          </a:fontRef>
+        </p:style>
+      </p:cxnSp>
+      <p:sp>
+        <p:nvSpPr>
+          <p:cNvPr id="48" name="TextBox 47"/>
+          <p:cNvSpPr txBox="1"/>
+          <p:nvPr/>
+        </p:nvSpPr>
+        <p:spPr>
+          <a:xfrm>
+            <a:off x="6720840" y="2788920"/>
+            <a:ext cx="2926080" cy="274320"/>
+          </a:xfrm>
+          <a:prstGeom prst="rect">
+            <a:avLst/>
+          </a:prstGeom>
+          <a:noFill/>
+        </p:spPr>
+        <p:txBody>
+          <a:bodyPr wrap="square" anchor="t">
+            <a:spAutoFit/>
+          </a:bodyPr>
+          <a:lstStyle/>
+          <a:p>
+            <a:pPr algn="r">
+              <a:lnSpc>
+                <a:spcPct val="115000"/>
+              </a:lnSpc>
+            </a:pPr>
+            <a:r>
+              <a:rPr sz="900" b="0">
+                <a:solidFill>
+                  <a:srgbClr val="E0616B"/>
+                </a:solidFill>
+                <a:latin typeface="Consolas"/>
+              </a:rPr>
+              <a:t>PASS / FAIL → гейт</a:t>
+            </a:r>
+          </a:p>
+        </p:txBody>
+      </p:sp>
+      <p:sp>
+        <p:nvSpPr>
+          <p:cNvPr id="49" name="Rounded Rectangle 48"/>
+          <p:cNvSpPr/>
+          <p:nvPr/>
+        </p:nvSpPr>
+        <p:spPr>
+          <a:xfrm>
+            <a:off x="2606040" y="4846320"/>
+            <a:ext cx="1920240" cy="777240"/>
+          </a:xfrm>
+          <a:prstGeom prst="roundRect">
+            <a:avLst>
+              <a:gd name="adj" fmla="val 6000"/>
+            </a:avLst>
+          </a:prstGeom>
+          <a:solidFill>
+            <a:srgbClr val="1D1A14"/>
+          </a:solidFill>
+          <a:ln w="19050">
+            <a:solidFill>
+              <a:srgbClr val="7FB0E0"/>
+            </a:solidFill>
+          </a:ln>
+          <a:effectLst/>
+        </p:spPr>
+        <p:style>
+          <a:lnRef idx="1">
+            <a:schemeClr val="accent1"/>
+          </a:lnRef>
+          <a:fillRef idx="3">
+            <a:schemeClr val="accent1"/>
+          </a:fillRef>
+          <a:effectRef idx="2">
+            <a:schemeClr val="accent1"/>
+          </a:effectRef>
+          <a:fontRef idx="minor">
+            <a:schemeClr val="lt1"/>
+          </a:fontRef>
+        </p:style>
+        <p:txBody>
+          <a:bodyPr rtlCol="0" anchor="ctr"/>
+          <a:lstStyle/>
+          <a:p>
+            <a:pPr algn="ctr"/>
+          </a:p>
+        </p:txBody>
+      </p:sp>
+      <p:sp>
+        <p:nvSpPr>
+          <p:cNvPr id="50" name="TextBox 49"/>
+          <p:cNvSpPr txBox="1"/>
+          <p:nvPr/>
+        </p:nvSpPr>
+        <p:spPr>
+          <a:xfrm>
+            <a:off x="2679192" y="4937759"/>
+            <a:ext cx="1773936" cy="365760"/>
+          </a:xfrm>
+          <a:prstGeom prst="rect">
+            <a:avLst/>
+          </a:prstGeom>
+          <a:noFill/>
+        </p:spPr>
+        <p:txBody>
+          <a:bodyPr wrap="square" anchor="t">
+            <a:spAutoFit/>
+          </a:bodyPr>
+          <a:lstStyle/>
+          <a:p>
+            <a:pPr algn="ctr">
+              <a:lnSpc>
+                <a:spcPct val="115000"/>
+              </a:lnSpc>
+            </a:pPr>
+            <a:r>
+              <a:rPr sz="1150" b="1">
+                <a:solidFill>
+                  <a:srgbClr val="EDE6D9"/>
+                </a:solidFill>
+                <a:latin typeface="Consolas"/>
+              </a:rPr>
+              <a:t>SODA CORE</a:t>
+            </a:r>
+          </a:p>
+        </p:txBody>
+      </p:sp>
+      <p:sp>
+        <p:nvSpPr>
+          <p:cNvPr id="51" name="TextBox 50"/>
+          <p:cNvSpPr txBox="1"/>
+          <p:nvPr/>
+        </p:nvSpPr>
+        <p:spPr>
+          <a:xfrm>
+            <a:off x="2679192" y="5266944"/>
+            <a:ext cx="1773936" cy="320040"/>
+          </a:xfrm>
+          <a:prstGeom prst="rect">
+            <a:avLst/>
+          </a:prstGeom>
+          <a:noFill/>
+        </p:spPr>
+        <p:txBody>
+          <a:bodyPr wrap="square" anchor="t">
+            <a:spAutoFit/>
+          </a:bodyPr>
+          <a:lstStyle/>
+          <a:p>
+            <a:pPr algn="ctr">
+              <a:lnSpc>
+                <a:spcPct val="110000"/>
+              </a:lnSpc>
+            </a:pPr>
+            <a:r>
+              <a:rPr sz="900" b="0">
+                <a:solidFill>
+                  <a:srgbClr val="A89C88"/>
+                </a:solidFill>
+                <a:latin typeface="Segoe UI"/>
+              </a:rPr>
+              <a:t>checks.yml — те же правила,</a:t>
+            </a:r>
+          </a:p>
+          <a:p>
+            <a:pPr algn="ctr">
+              <a:lnSpc>
+                <a:spcPct val="110000"/>
+              </a:lnSpc>
+            </a:pPr>
+            <a:r>
+              <a:rPr sz="900" b="0">
+                <a:solidFill>
+                  <a:srgbClr val="A89C88"/>
+                </a:solidFill>
+                <a:latin typeface="Segoe UI"/>
+              </a:rPr>
+              <a:t>вердикт совпал</a:t>
+            </a:r>
+          </a:p>
+        </p:txBody>
+      </p:sp>
+      <p:cxnSp>
+        <p:nvCxnSpPr>
+          <p:cNvPr id="52" name="Connector 51"/>
+          <p:cNvCxnSpPr/>
+          <p:nvPr/>
+        </p:nvCxnSpPr>
+        <p:spPr>
+          <a:xfrm>
+            <a:off x="3566160" y="4297680"/>
+            <a:ext cx="0" cy="548640"/>
+          </a:xfrm>
+          <a:prstGeom prst="line">
+            <a:avLst/>
+          </a:prstGeom>
+          <a:ln w="19050">
+            <a:solidFill>
+              <a:srgbClr val="7FB0E0"/>
+            </a:solidFill>
+            <a:prstDash val="dash"/>
+            <a:tailEnd type="triangle" w="med" len="med"/>
+          </a:ln>
+        </p:spPr>
+        <p:style>
+          <a:lnRef idx="2">
+            <a:schemeClr val="accent1"/>
+          </a:lnRef>
+          <a:fillRef idx="0">
+            <a:schemeClr val="accent1"/>
+          </a:fillRef>
+          <a:effectRef idx="1">
+            <a:schemeClr val="accent1"/>
+          </a:effectRef>
+          <a:fontRef idx="minor">
+            <a:schemeClr val="tx1"/>
+          </a:fontRef>
+        </p:style>
+      </p:cxnSp>
+      <p:sp>
+        <p:nvSpPr>
+          <p:cNvPr id="53" name="Rounded Rectangle 52"/>
+          <p:cNvSpPr/>
+          <p:nvPr/>
+        </p:nvSpPr>
+        <p:spPr>
+          <a:xfrm>
+            <a:off x="4754880" y="4846320"/>
+            <a:ext cx="1828800" cy="777240"/>
+          </a:xfrm>
+          <a:prstGeom prst="roundRect">
+            <a:avLst>
+              <a:gd name="adj" fmla="val 6000"/>
+            </a:avLst>
+          </a:prstGeom>
+          <a:solidFill>
+            <a:srgbClr val="1D1A14"/>
+          </a:solidFill>
+          <a:ln w="19050">
+            <a:solidFill>
+              <a:srgbClr val="E0616B"/>
+            </a:solidFill>
+          </a:ln>
+          <a:effectLst/>
+        </p:spPr>
+        <p:style>
+          <a:lnRef idx="1">
+            <a:schemeClr val="accent1"/>
+          </a:lnRef>
+          <a:fillRef idx="3">
+            <a:schemeClr val="accent1"/>
+          </a:fillRef>
+          <a:effectRef idx="2">
+            <a:schemeClr val="accent1"/>
+          </a:effectRef>
+          <a:fontRef idx="minor">
+            <a:schemeClr val="lt1"/>
+          </a:fontRef>
+        </p:style>
+        <p:txBody>
+          <a:bodyPr rtlCol="0" anchor="ctr"/>
+          <a:lstStyle/>
+          <a:p>
+            <a:pPr algn="ctr"/>
+          </a:p>
+        </p:txBody>
+      </p:sp>
+      <p:sp>
+        <p:nvSpPr>
+          <p:cNvPr id="54" name="TextBox 53"/>
+          <p:cNvSpPr txBox="1"/>
+          <p:nvPr/>
+        </p:nvSpPr>
+        <p:spPr>
+          <a:xfrm>
+            <a:off x="4828032" y="4937759"/>
+            <a:ext cx="1682496" cy="365760"/>
+          </a:xfrm>
+          <a:prstGeom prst="rect">
+            <a:avLst/>
+          </a:prstGeom>
+          <a:noFill/>
+        </p:spPr>
+        <p:txBody>
+          <a:bodyPr wrap="square" anchor="t">
+            <a:spAutoFit/>
+          </a:bodyPr>
+          <a:lstStyle/>
+          <a:p>
+            <a:pPr algn="ctr">
+              <a:lnSpc>
+                <a:spcPct val="115000"/>
+              </a:lnSpc>
+            </a:pPr>
+            <a:r>
+              <a:rPr sz="1150" b="1">
+                <a:solidFill>
+                  <a:srgbClr val="E0616B"/>
+                </a:solidFill>
+                <a:latin typeface="Consolas"/>
+              </a:rPr>
+              <a:t>АЛЕРТ</a:t>
+            </a:r>
+          </a:p>
+        </p:txBody>
+      </p:sp>
+      <p:sp>
+        <p:nvSpPr>
+          <p:cNvPr id="55" name="TextBox 54"/>
+          <p:cNvSpPr txBox="1"/>
+          <p:nvPr/>
+        </p:nvSpPr>
+        <p:spPr>
+          <a:xfrm>
+            <a:off x="4828032" y="5266944"/>
+            <a:ext cx="1682496" cy="320040"/>
+          </a:xfrm>
+          <a:prstGeom prst="rect">
+            <a:avLst/>
+          </a:prstGeom>
+          <a:noFill/>
+        </p:spPr>
+        <p:txBody>
+          <a:bodyPr wrap="square" anchor="t">
+            <a:spAutoFit/>
+          </a:bodyPr>
+          <a:lstStyle/>
+          <a:p>
+            <a:pPr algn="ctr">
+              <a:lnSpc>
+                <a:spcPct val="110000"/>
+              </a:lnSpc>
+            </a:pPr>
+            <a:r>
+              <a:rPr sz="900" b="0">
+                <a:solidFill>
+                  <a:srgbClr val="A89C88"/>
+                </a:solidFill>
+                <a:latin typeface="Segoe UI"/>
+              </a:rPr>
+              <a:t>notify_on_failure в DAG</a:t>
+            </a:r>
+          </a:p>
+          <a:p>
+            <a:pPr algn="ctr">
+              <a:lnSpc>
+                <a:spcPct val="110000"/>
+              </a:lnSpc>
+            </a:pPr>
+            <a:r>
+              <a:rPr sz="900" b="0">
+                <a:solidFill>
+                  <a:srgbClr val="A89C88"/>
+                </a:solidFill>
+                <a:latin typeface="Segoe UI"/>
+              </a:rPr>
+              <a:t>alerts.yml в Grafana</a:t>
+            </a:r>
+          </a:p>
+        </p:txBody>
+      </p:sp>
+      <p:cxnSp>
+        <p:nvCxnSpPr>
+          <p:cNvPr id="56" name="Connector 55"/>
+          <p:cNvCxnSpPr/>
+          <p:nvPr/>
+        </p:nvCxnSpPr>
+        <p:spPr>
+          <a:xfrm>
+            <a:off x="4526280" y="4297680"/>
+            <a:ext cx="228600" cy="731520"/>
+          </a:xfrm>
+          <a:prstGeom prst="line">
+            <a:avLst/>
+          </a:prstGeom>
+          <a:ln w="19050">
+            <a:solidFill>
+              <a:srgbClr val="E0616B"/>
+            </a:solidFill>
+            <a:tailEnd type="triangle" w="med" len="med"/>
+          </a:ln>
+        </p:spPr>
+        <p:style>
+          <a:lnRef idx="2">
+            <a:schemeClr val="accent1"/>
+          </a:lnRef>
+          <a:fillRef idx="0">
+            <a:schemeClr val="accent1"/>
+          </a:fillRef>
+          <a:effectRef idx="1">
+            <a:schemeClr val="accent1"/>
+          </a:effectRef>
+          <a:fontRef idx="minor">
+            <a:schemeClr val="tx1"/>
+          </a:fontRef>
+        </p:style>
+      </p:cxnSp>
+      <p:cxnSp>
+        <p:nvCxnSpPr>
+          <p:cNvPr id="57" name="Connector 56"/>
+          <p:cNvCxnSpPr/>
+          <p:nvPr/>
+        </p:nvCxnSpPr>
+        <p:spPr>
+          <a:xfrm flipH="1">
+            <a:off x="6583680" y="4297680"/>
+            <a:ext cx="1142999" cy="731520"/>
+          </a:xfrm>
+          <a:prstGeom prst="line">
+            <a:avLst/>
+          </a:prstGeom>
+          <a:ln w="19050">
+            <a:solidFill>
+              <a:srgbClr val="E0616B"/>
+            </a:solidFill>
+            <a:tailEnd type="triangle" w="med" len="med"/>
+          </a:ln>
+        </p:spPr>
+        <p:style>
+          <a:lnRef idx="2">
+            <a:schemeClr val="accent1"/>
+          </a:lnRef>
+          <a:fillRef idx="0">
+            <a:schemeClr val="accent1"/>
+          </a:fillRef>
+          <a:effectRef idx="1">
+            <a:schemeClr val="accent1"/>
+          </a:effectRef>
+          <a:fontRef idx="minor">
+            <a:schemeClr val="tx1"/>
+          </a:fontRef>
+        </p:style>
+      </p:cxnSp>
+      <p:sp>
+        <p:nvSpPr>
+          <p:cNvPr id="58" name="TextBox 57"/>
+          <p:cNvSpPr txBox="1"/>
+          <p:nvPr/>
+        </p:nvSpPr>
+        <p:spPr>
+          <a:xfrm>
+            <a:off x="6949440" y="4846320"/>
+            <a:ext cx="4572000" cy="1280160"/>
+          </a:xfrm>
+          <a:prstGeom prst="rect">
+            <a:avLst/>
+          </a:prstGeom>
+          <a:noFill/>
+        </p:spPr>
+        <p:txBody>
+          <a:bodyPr wrap="square" anchor="t">
+            <a:spAutoFit/>
+          </a:bodyPr>
+          <a:lstStyle/>
+          <a:p>
+            <a:pPr algn="l">
+              <a:lnSpc>
+                <a:spcPct val="125000"/>
+              </a:lnSpc>
+            </a:pPr>
+            <a:r>
+              <a:rPr sz="1100" b="0">
+                <a:solidFill>
+                  <a:srgbClr val="A89C88"/>
+                </a:solidFill>
+                <a:latin typeface="Segoe UI"/>
+              </a:rPr>
+              <a:t>Гейт и алерт — разные вещи: алерт сообщает людям, гейт не выпускает данные. Провал критичного правила (DQ-02/03/04/11/14) → DAG красный → таск публикации не запускается.</a:t>
+            </a:r>
+          </a:p>
+        </p:txBody>
+      </p:sp>
+      <p:sp>
+        <p:nvSpPr>
+          <p:cNvPr id="59" name="TextBox 58"/>
           <p:cNvSpPr txBox="1"/>
           <p:nvPr/>
         </p:nvSpPr>
@@ -6055,7 +8445,7 @@
                 </a:solidFill>
                 <a:latin typeface="Segoe UI"/>
               </a:rPr>
-              <a:t>ШАГИ 3-4 · ПРАВИЛА И АВТОМАТИЗАЦИЯ</a:t>
+              <a:t>ШАГ 3 · РЕЕСТР ПРАВИЛ</a:t>
             </a:r>
           </a:p>
         </p:txBody>
@@ -6094,120 +8484,21 @@
                 </a:solidFill>
                 <a:latin typeface="Segoe UI Semibold"/>
               </a:rPr>
-              <a:t>14 правил → SQL и Soda Core → ежедневный DAG</a:t>
-            </a:r>
-          </a:p>
-        </p:txBody>
-      </p:sp>
-      <p:sp>
-        <p:nvSpPr>
-          <p:cNvPr id="4" name="TextBox 3"/>
-          <p:cNvSpPr txBox="1"/>
-          <p:nvPr/>
-        </p:nvSpPr>
-        <p:spPr>
-          <a:xfrm>
-            <a:off x="640080" y="1783080"/>
-            <a:ext cx="5760720" cy="4389120"/>
-          </a:xfrm>
-          <a:prstGeom prst="rect">
-            <a:avLst/>
-          </a:prstGeom>
-          <a:noFill/>
-        </p:spPr>
-        <p:txBody>
-          <a:bodyPr wrap="square">
-            <a:spAutoFit/>
-          </a:bodyPr>
-          <a:lstStyle/>
-          <a:p>
-            <a:pPr>
-              <a:lnSpc>
-                <a:spcPct val="125000"/>
-              </a:lnSpc>
-              <a:spcAft>
-                <a:spcPts val="800"/>
-              </a:spcAft>
-            </a:pPr>
-            <a:r>
-              <a:rPr sz="1450">
-                <a:solidFill>
-                  <a:srgbClr val="A89C88"/>
-                </a:solidFill>
-                <a:latin typeface="Segoe UI"/>
-              </a:rPr>
-              <a:t>―  Реестр из 14 бизнес-правил (полнота, точность, валидность, уникальность, согласованность, своевременность, целостность) с владельцами и порогами.</a:t>
-            </a:r>
-          </a:p>
-          <a:p>
-            <a:pPr>
-              <a:lnSpc>
-                <a:spcPct val="125000"/>
-              </a:lnSpc>
-              <a:spcAft>
-                <a:spcPts val="800"/>
-              </a:spcAft>
-            </a:pPr>
-            <a:r>
-              <a:rPr sz="1450">
-                <a:solidFill>
-                  <a:srgbClr val="A89C88"/>
-                </a:solidFill>
-                <a:latin typeface="Segoe UI"/>
-              </a:rPr>
-              <a:t>―  DQ-14 — баланс перемещения: списать по справке Б больше, чем получено, нельзя. Именно он ловит последствия ручных правок и служит инструментом разбора заявок.</a:t>
-            </a:r>
-          </a:p>
-          <a:p>
-            <a:pPr>
-              <a:lnSpc>
-                <a:spcPct val="125000"/>
-              </a:lnSpc>
-              <a:spcAft>
-                <a:spcPts val="800"/>
-              </a:spcAft>
-            </a:pPr>
-            <a:r>
-              <a:rPr sz="1450">
-                <a:solidFill>
-                  <a:srgbClr val="A89C88"/>
-                </a:solidFill>
-                <a:latin typeface="Segoe UI"/>
-              </a:rPr>
-              <a:t>―  Каждое правило — исполняемый SQL (02_dq_rules.sql) и конфиг Soda Core (checks.yml); обе реализации прогнаны на реальной БД и дали одинаковый вердикт.</a:t>
-            </a:r>
-          </a:p>
-          <a:p>
-            <a:pPr>
-              <a:lnSpc>
-                <a:spcPct val="125000"/>
-              </a:lnSpc>
-              <a:spcAft>
-                <a:spcPts val="800"/>
-              </a:spcAft>
-            </a:pPr>
-            <a:r>
-              <a:rPr sz="1450">
-                <a:solidFill>
-                  <a:srgbClr val="A89C88"/>
-                </a:solidFill>
-                <a:latin typeface="Segoe UI"/>
-              </a:rPr>
-              <a:t>―  Airflow DAG развёрнут и работает по расписанию с 23.08: креды из Connection, гейт блокирует публикацию витрины в контур контроля.</a:t>
-            </a:r>
-          </a:p>
-        </p:txBody>
-      </p:sp>
-      <p:sp>
-        <p:nvSpPr>
-          <p:cNvPr id="5" name="Rounded Rectangle 4"/>
+              <a:t>14 правил в трёх категориях — SQL и Soda Core</a:t>
+            </a:r>
+          </a:p>
+        </p:txBody>
+      </p:sp>
+      <p:sp>
+        <p:nvSpPr>
+          <p:cNvPr id="4" name="Rounded Rectangle 3"/>
           <p:cNvSpPr/>
           <p:nvPr/>
         </p:nvSpPr>
         <p:spPr>
           <a:xfrm>
-            <a:off x="6675120" y="1783080"/>
-            <a:ext cx="4846320" cy="4389120"/>
+            <a:off x="640080" y="1691640"/>
+            <a:ext cx="3520440" cy="4160520"/>
           </a:xfrm>
           <a:prstGeom prst="roundRect">
             <a:avLst>
@@ -6248,14 +8539,53 @@
       </p:sp>
       <p:sp>
         <p:nvSpPr>
+          <p:cNvPr id="5" name="TextBox 4"/>
+          <p:cNvSpPr txBox="1"/>
+          <p:nvPr/>
+        </p:nvSpPr>
+        <p:spPr>
+          <a:xfrm>
+            <a:off x="822959" y="1828800"/>
+            <a:ext cx="3200400" cy="320040"/>
+          </a:xfrm>
+          <a:prstGeom prst="rect">
+            <a:avLst/>
+          </a:prstGeom>
+          <a:noFill/>
+        </p:spPr>
+        <p:txBody>
+          <a:bodyPr wrap="square" anchor="t">
+            <a:spAutoFit/>
+          </a:bodyPr>
+          <a:lstStyle/>
+          <a:p>
+            <a:pPr algn="l">
+              <a:lnSpc>
+                <a:spcPct val="115000"/>
+              </a:lnSpc>
+            </a:pPr>
+            <a:r>
+              <a:rPr sz="1100" b="1">
+                <a:solidFill>
+                  <a:srgbClr val="DBA25A"/>
+                </a:solidFill>
+                <a:latin typeface="Consolas"/>
+              </a:rPr>
+              <a:t>ПОЛНОТА И ЦЕЛОСТНОСТЬ</a:t>
+            </a:r>
+          </a:p>
+        </p:txBody>
+      </p:sp>
+      <p:sp>
+        <p:nvSpPr>
           <p:cNvPr id="6" name="TextBox 5"/>
           <p:cNvSpPr txBox="1"/>
           <p:nvPr/>
         </p:nvSpPr>
         <p:spPr>
           <a:xfrm>
-            <a:off x="6903720" y="1965960"/>
-            <a:ext cx="4389120" cy="365760"/>
+            <a:off x="822959" y="2240280"/>
+            <a:ext cx="2240280" cy="274320"/>
           </a:xfrm>
           <a:prstGeom prst="rect">
             <a:avLst/>
@@ -6276,25 +8606,64 @@
             <a:r>
               <a:rPr sz="1100" b="1">
                 <a:solidFill>
-                  <a:srgbClr val="756A5A"/>
+                  <a:srgbClr val="EDE6D9"/>
+                </a:solidFill>
+                <a:latin typeface="Segoe UI"/>
+              </a:rPr>
+              <a:t>DQ-01  Заполненность</a:t>
+            </a:r>
+          </a:p>
+        </p:txBody>
+      </p:sp>
+      <p:sp>
+        <p:nvSpPr>
+          <p:cNvPr id="7" name="TextBox 6"/>
+          <p:cNvSpPr txBox="1"/>
+          <p:nvPr/>
+        </p:nvSpPr>
+        <p:spPr>
+          <a:xfrm>
+            <a:off x="3017520" y="2240280"/>
+            <a:ext cx="960120" cy="274320"/>
+          </a:xfrm>
+          <a:prstGeom prst="rect">
+            <a:avLst/>
+          </a:prstGeom>
+          <a:noFill/>
+        </p:spPr>
+        <p:txBody>
+          <a:bodyPr wrap="square" anchor="t">
+            <a:spAutoFit/>
+          </a:bodyPr>
+          <a:lstStyle/>
+          <a:p>
+            <a:pPr algn="r">
+              <a:lnSpc>
+                <a:spcPct val="115000"/>
+              </a:lnSpc>
+            </a:pPr>
+            <a:r>
+              <a:rPr sz="1000" b="1">
+                <a:solidFill>
+                  <a:srgbClr val="4CAF6D"/>
                 </a:solidFill>
                 <a:latin typeface="Consolas"/>
               </a:rPr>
-              <a:t>ПОСЛЕДНИЙ ПРОГОН</a:t>
-            </a:r>
-          </a:p>
-        </p:txBody>
-      </p:sp>
-      <p:sp>
-        <p:nvSpPr>
-          <p:cNvPr id="7" name="TextBox 6"/>
-          <p:cNvSpPr txBox="1"/>
-          <p:nvPr/>
-        </p:nvSpPr>
-        <p:spPr>
-          <a:xfrm>
-            <a:off x="6903720" y="2286000"/>
-            <a:ext cx="2286000" cy="274320"/>
+              <a:t>PASS 100%</a:t>
+            </a:r>
+          </a:p>
+        </p:txBody>
+      </p:sp>
+      <p:sp>
+        <p:nvSpPr>
+          <p:cNvPr id="8" name="TextBox 7"/>
+          <p:cNvSpPr txBox="1"/>
+          <p:nvPr/>
+        </p:nvSpPr>
+        <p:spPr>
+          <a:xfrm>
+            <a:off x="822959" y="2496312"/>
+            <a:ext cx="3154680" cy="548640"/>
           </a:xfrm>
           <a:prstGeom prst="rect">
             <a:avLst/>
@@ -6313,36 +8682,391 @@
               </a:lnSpc>
             </a:pPr>
             <a:r>
-              <a:rPr sz="1100" b="0">
+              <a:rPr sz="1000" b="0">
                 <a:solidFill>
                   <a:srgbClr val="A89C88"/>
                 </a:solidFill>
+                <a:latin typeface="Segoe UI"/>
+              </a:rPr>
+              <a:t>Все 8 обязательных полей операции не пусты</a:t>
+            </a:r>
+          </a:p>
+        </p:txBody>
+      </p:sp>
+      <p:sp>
+        <p:nvSpPr>
+          <p:cNvPr id="9" name="TextBox 8"/>
+          <p:cNvSpPr txBox="1"/>
+          <p:nvPr/>
+        </p:nvSpPr>
+        <p:spPr>
+          <a:xfrm>
+            <a:off x="822959" y="3136392"/>
+            <a:ext cx="2240280" cy="274320"/>
+          </a:xfrm>
+          <a:prstGeom prst="rect">
+            <a:avLst/>
+          </a:prstGeom>
+          <a:noFill/>
+        </p:spPr>
+        <p:txBody>
+          <a:bodyPr wrap="square" anchor="t">
+            <a:spAutoFit/>
+          </a:bodyPr>
+          <a:lstStyle/>
+          <a:p>
+            <a:pPr algn="l">
+              <a:lnSpc>
+                <a:spcPct val="115000"/>
+              </a:lnSpc>
+            </a:pPr>
+            <a:r>
+              <a:rPr sz="1100" b="1">
+                <a:solidFill>
+                  <a:srgbClr val="EDE6D9"/>
+                </a:solidFill>
+                <a:latin typeface="Segoe UI"/>
+              </a:rPr>
+              <a:t>DQ-02  Полнота загрузки</a:t>
+            </a:r>
+          </a:p>
+        </p:txBody>
+      </p:sp>
+      <p:sp>
+        <p:nvSpPr>
+          <p:cNvPr id="10" name="TextBox 9"/>
+          <p:cNvSpPr txBox="1"/>
+          <p:nvPr/>
+        </p:nvSpPr>
+        <p:spPr>
+          <a:xfrm>
+            <a:off x="3017520" y="3136392"/>
+            <a:ext cx="960120" cy="274320"/>
+          </a:xfrm>
+          <a:prstGeom prst="rect">
+            <a:avLst/>
+          </a:prstGeom>
+          <a:noFill/>
+        </p:spPr>
+        <p:txBody>
+          <a:bodyPr wrap="square" anchor="t">
+            <a:spAutoFit/>
+          </a:bodyPr>
+          <a:lstStyle/>
+          <a:p>
+            <a:pPr algn="r">
+              <a:lnSpc>
+                <a:spcPct val="115000"/>
+              </a:lnSpc>
+            </a:pPr>
+            <a:r>
+              <a:rPr sz="1000" b="1">
+                <a:solidFill>
+                  <a:srgbClr val="E0616B"/>
+                </a:solidFill>
                 <a:latin typeface="Consolas"/>
               </a:rPr>
-              <a:t>DQ-01 Заполненность</a:t>
-            </a:r>
-          </a:p>
-        </p:txBody>
-      </p:sp>
-      <p:sp>
-        <p:nvSpPr>
-          <p:cNvPr id="8" name="Rounded Rectangle 7"/>
+              <a:t>FAIL 90%</a:t>
+            </a:r>
+          </a:p>
+        </p:txBody>
+      </p:sp>
+      <p:sp>
+        <p:nvSpPr>
+          <p:cNvPr id="11" name="TextBox 10"/>
+          <p:cNvSpPr txBox="1"/>
+          <p:nvPr/>
+        </p:nvSpPr>
+        <p:spPr>
+          <a:xfrm>
+            <a:off x="822959" y="3392424"/>
+            <a:ext cx="3154680" cy="548640"/>
+          </a:xfrm>
+          <a:prstGeom prst="rect">
+            <a:avLst/>
+          </a:prstGeom>
+          <a:noFill/>
+        </p:spPr>
+        <p:txBody>
+          <a:bodyPr wrap="square" anchor="t">
+            <a:spAutoFit/>
+          </a:bodyPr>
+          <a:lstStyle/>
+          <a:p>
+            <a:pPr algn="l">
+              <a:lnSpc>
+                <a:spcPct val="115000"/>
+              </a:lnSpc>
+            </a:pPr>
+            <a:r>
+              <a:rPr sz="1000" b="0">
+                <a:solidFill>
+                  <a:srgbClr val="A89C88"/>
+                </a:solidFill>
+                <a:latin typeface="Segoe UI"/>
+              </a:rPr>
+              <a:t>Сколько принято — столько и доехало до витрины</a:t>
+            </a:r>
+          </a:p>
+        </p:txBody>
+      </p:sp>
+      <p:sp>
+        <p:nvSpPr>
+          <p:cNvPr id="12" name="TextBox 11"/>
+          <p:cNvSpPr txBox="1"/>
+          <p:nvPr/>
+        </p:nvSpPr>
+        <p:spPr>
+          <a:xfrm>
+            <a:off x="822959" y="4032504"/>
+            <a:ext cx="2240280" cy="274320"/>
+          </a:xfrm>
+          <a:prstGeom prst="rect">
+            <a:avLst/>
+          </a:prstGeom>
+          <a:noFill/>
+        </p:spPr>
+        <p:txBody>
+          <a:bodyPr wrap="square" anchor="t">
+            <a:spAutoFit/>
+          </a:bodyPr>
+          <a:lstStyle/>
+          <a:p>
+            <a:pPr algn="l">
+              <a:lnSpc>
+                <a:spcPct val="115000"/>
+              </a:lnSpc>
+            </a:pPr>
+            <a:r>
+              <a:rPr sz="1100" b="1">
+                <a:solidFill>
+                  <a:srgbClr val="EDE6D9"/>
+                </a:solidFill>
+                <a:latin typeface="Segoe UI"/>
+              </a:rPr>
+              <a:t>DQ-05  Уникальность</a:t>
+            </a:r>
+          </a:p>
+        </p:txBody>
+      </p:sp>
+      <p:sp>
+        <p:nvSpPr>
+          <p:cNvPr id="13" name="TextBox 12"/>
+          <p:cNvSpPr txBox="1"/>
+          <p:nvPr/>
+        </p:nvSpPr>
+        <p:spPr>
+          <a:xfrm>
+            <a:off x="3017520" y="4032504"/>
+            <a:ext cx="960120" cy="274320"/>
+          </a:xfrm>
+          <a:prstGeom prst="rect">
+            <a:avLst/>
+          </a:prstGeom>
+          <a:noFill/>
+        </p:spPr>
+        <p:txBody>
+          <a:bodyPr wrap="square" anchor="t">
+            <a:spAutoFit/>
+          </a:bodyPr>
+          <a:lstStyle/>
+          <a:p>
+            <a:pPr algn="r">
+              <a:lnSpc>
+                <a:spcPct val="115000"/>
+              </a:lnSpc>
+            </a:pPr>
+            <a:r>
+              <a:rPr sz="1000" b="1">
+                <a:solidFill>
+                  <a:srgbClr val="4CAF6D"/>
+                </a:solidFill>
+                <a:latin typeface="Consolas"/>
+              </a:rPr>
+              <a:t>PASS 100%</a:t>
+            </a:r>
+          </a:p>
+        </p:txBody>
+      </p:sp>
+      <p:sp>
+        <p:nvSpPr>
+          <p:cNvPr id="14" name="TextBox 13"/>
+          <p:cNvSpPr txBox="1"/>
+          <p:nvPr/>
+        </p:nvSpPr>
+        <p:spPr>
+          <a:xfrm>
+            <a:off x="822959" y="4288536"/>
+            <a:ext cx="3154680" cy="548640"/>
+          </a:xfrm>
+          <a:prstGeom prst="rect">
+            <a:avLst/>
+          </a:prstGeom>
+          <a:noFill/>
+        </p:spPr>
+        <p:txBody>
+          <a:bodyPr wrap="square" anchor="t">
+            <a:spAutoFit/>
+          </a:bodyPr>
+          <a:lstStyle/>
+          <a:p>
+            <a:pPr algn="l">
+              <a:lnSpc>
+                <a:spcPct val="115000"/>
+              </a:lnSpc>
+            </a:pPr>
+            <a:r>
+              <a:rPr sz="1000" b="0">
+                <a:solidFill>
+                  <a:srgbClr val="A89C88"/>
+                </a:solidFill>
+                <a:latin typeface="Segoe UI"/>
+              </a:rPr>
+              <a:t>Операция не задвоена повторной загрузкой</a:t>
+            </a:r>
+          </a:p>
+        </p:txBody>
+      </p:sp>
+      <p:sp>
+        <p:nvSpPr>
+          <p:cNvPr id="15" name="TextBox 14"/>
+          <p:cNvSpPr txBox="1"/>
+          <p:nvPr/>
+        </p:nvSpPr>
+        <p:spPr>
+          <a:xfrm>
+            <a:off x="822959" y="4928616"/>
+            <a:ext cx="2240280" cy="274320"/>
+          </a:xfrm>
+          <a:prstGeom prst="rect">
+            <a:avLst/>
+          </a:prstGeom>
+          <a:noFill/>
+        </p:spPr>
+        <p:txBody>
+          <a:bodyPr wrap="square" anchor="t">
+            <a:spAutoFit/>
+          </a:bodyPr>
+          <a:lstStyle/>
+          <a:p>
+            <a:pPr algn="l">
+              <a:lnSpc>
+                <a:spcPct val="115000"/>
+              </a:lnSpc>
+            </a:pPr>
+            <a:r>
+              <a:rPr sz="1100" b="1">
+                <a:solidFill>
+                  <a:srgbClr val="EDE6D9"/>
+                </a:solidFill>
+                <a:latin typeface="Segoe UI"/>
+              </a:rPr>
+              <a:t>DQ-11  Происхождение</a:t>
+            </a:r>
+          </a:p>
+        </p:txBody>
+      </p:sp>
+      <p:sp>
+        <p:nvSpPr>
+          <p:cNvPr id="16" name="TextBox 15"/>
+          <p:cNvSpPr txBox="1"/>
+          <p:nvPr/>
+        </p:nvSpPr>
+        <p:spPr>
+          <a:xfrm>
+            <a:off x="3017520" y="4928616"/>
+            <a:ext cx="960120" cy="274320"/>
+          </a:xfrm>
+          <a:prstGeom prst="rect">
+            <a:avLst/>
+          </a:prstGeom>
+          <a:noFill/>
+        </p:spPr>
+        <p:txBody>
+          <a:bodyPr wrap="square" anchor="t">
+            <a:spAutoFit/>
+          </a:bodyPr>
+          <a:lstStyle/>
+          <a:p>
+            <a:pPr algn="r">
+              <a:lnSpc>
+                <a:spcPct val="115000"/>
+              </a:lnSpc>
+            </a:pPr>
+            <a:r>
+              <a:rPr sz="1000" b="1">
+                <a:solidFill>
+                  <a:srgbClr val="4CAF6D"/>
+                </a:solidFill>
+                <a:latin typeface="Consolas"/>
+              </a:rPr>
+              <a:t>PASS 100%</a:t>
+            </a:r>
+          </a:p>
+        </p:txBody>
+      </p:sp>
+      <p:sp>
+        <p:nvSpPr>
+          <p:cNvPr id="17" name="TextBox 16"/>
+          <p:cNvSpPr txBox="1"/>
+          <p:nvPr/>
+        </p:nvSpPr>
+        <p:spPr>
+          <a:xfrm>
+            <a:off x="822959" y="5184648"/>
+            <a:ext cx="3154680" cy="548640"/>
+          </a:xfrm>
+          <a:prstGeom prst="rect">
+            <a:avLst/>
+          </a:prstGeom>
+          <a:noFill/>
+        </p:spPr>
+        <p:txBody>
+          <a:bodyPr wrap="square" anchor="t">
+            <a:spAutoFit/>
+          </a:bodyPr>
+          <a:lstStyle/>
+          <a:p>
+            <a:pPr algn="l">
+              <a:lnSpc>
+                <a:spcPct val="115000"/>
+              </a:lnSpc>
+            </a:pPr>
+            <a:r>
+              <a:rPr sz="1000" b="0">
+                <a:solidFill>
+                  <a:srgbClr val="A89C88"/>
+                </a:solidFill>
+                <a:latin typeface="Segoe UI"/>
+              </a:rPr>
+              <a:t>В витрине нет записей, которых не было в приёмке</a:t>
+            </a:r>
+          </a:p>
+        </p:txBody>
+      </p:sp>
+      <p:sp>
+        <p:nvSpPr>
+          <p:cNvPr id="18" name="Rounded Rectangle 17"/>
           <p:cNvSpPr/>
           <p:nvPr/>
         </p:nvSpPr>
         <p:spPr>
           <a:xfrm>
-            <a:off x="9281160" y="2304288"/>
-            <a:ext cx="1828800" cy="164592"/>
+            <a:off x="4343400" y="1691640"/>
+            <a:ext cx="3520440" cy="4160520"/>
           </a:xfrm>
           <a:prstGeom prst="roundRect">
-            <a:avLst/>
+            <a:avLst>
+              <a:gd name="adj" fmla="val 6000"/>
+            </a:avLst>
           </a:prstGeom>
           <a:solidFill>
-            <a:srgbClr val="4CAF6D"/>
+            <a:srgbClr val="1D1A14"/>
           </a:solidFill>
-          <a:ln>
-            <a:noFill/>
+          <a:ln w="12700">
+            <a:solidFill>
+              <a:srgbClr val="332E24"/>
+            </a:solidFill>
           </a:ln>
           <a:effectLst/>
         </p:spPr>
@@ -6370,14 +9094,14 @@
       </p:sp>
       <p:sp>
         <p:nvSpPr>
-          <p:cNvPr id="9" name="TextBox 8"/>
-          <p:cNvSpPr txBox="1"/>
-          <p:nvPr/>
-        </p:nvSpPr>
-        <p:spPr>
-          <a:xfrm>
-            <a:off x="11137392" y="2267712"/>
-            <a:ext cx="822960" cy="274320"/>
+          <p:cNvPr id="19" name="TextBox 18"/>
+          <p:cNvSpPr txBox="1"/>
+          <p:nvPr/>
+        </p:nvSpPr>
+        <p:spPr>
+          <a:xfrm>
+            <a:off x="4526280" y="1828800"/>
+            <a:ext cx="3200400" cy="320040"/>
           </a:xfrm>
           <a:prstGeom prst="rect">
             <a:avLst/>
@@ -6396,27 +9120,222 @@
               </a:lnSpc>
             </a:pPr>
             <a:r>
-              <a:rPr sz="1050" b="0">
+              <a:rPr sz="1100" b="1">
+                <a:solidFill>
+                  <a:srgbClr val="DBA25A"/>
+                </a:solidFill>
+                <a:latin typeface="Consolas"/>
+              </a:rPr>
+              <a:t>ТОЧНОСТЬ И ФОРМАТ</a:t>
+            </a:r>
+          </a:p>
+        </p:txBody>
+      </p:sp>
+      <p:sp>
+        <p:nvSpPr>
+          <p:cNvPr id="20" name="TextBox 19"/>
+          <p:cNvSpPr txBox="1"/>
+          <p:nvPr/>
+        </p:nvSpPr>
+        <p:spPr>
+          <a:xfrm>
+            <a:off x="4526280" y="2240280"/>
+            <a:ext cx="2240280" cy="274320"/>
+          </a:xfrm>
+          <a:prstGeom prst="rect">
+            <a:avLst/>
+          </a:prstGeom>
+          <a:noFill/>
+        </p:spPr>
+        <p:txBody>
+          <a:bodyPr wrap="square" anchor="t">
+            <a:spAutoFit/>
+          </a:bodyPr>
+          <a:lstStyle/>
+          <a:p>
+            <a:pPr algn="l">
+              <a:lnSpc>
+                <a:spcPct val="115000"/>
+              </a:lnSpc>
+            </a:pPr>
+            <a:r>
+              <a:rPr sz="1100" b="1">
+                <a:solidFill>
+                  <a:srgbClr val="EDE6D9"/>
+                </a:solidFill>
+                <a:latin typeface="Segoe UI"/>
+              </a:rPr>
+              <a:t>DQ-03  Формат кода</a:t>
+            </a:r>
+          </a:p>
+        </p:txBody>
+      </p:sp>
+      <p:sp>
+        <p:nvSpPr>
+          <p:cNvPr id="21" name="TextBox 20"/>
+          <p:cNvSpPr txBox="1"/>
+          <p:nvPr/>
+        </p:nvSpPr>
+        <p:spPr>
+          <a:xfrm>
+            <a:off x="6720840" y="2240280"/>
+            <a:ext cx="960120" cy="274320"/>
+          </a:xfrm>
+          <a:prstGeom prst="rect">
+            <a:avLst/>
+          </a:prstGeom>
+          <a:noFill/>
+        </p:spPr>
+        <p:txBody>
+          <a:bodyPr wrap="square" anchor="t">
+            <a:spAutoFit/>
+          </a:bodyPr>
+          <a:lstStyle/>
+          <a:p>
+            <a:pPr algn="r">
+              <a:lnSpc>
+                <a:spcPct val="115000"/>
+              </a:lnSpc>
+            </a:pPr>
+            <a:r>
+              <a:rPr sz="1000" b="1">
+                <a:solidFill>
+                  <a:srgbClr val="E0616B"/>
+                </a:solidFill>
+                <a:latin typeface="Consolas"/>
+              </a:rPr>
+              <a:t>FAIL 90%</a:t>
+            </a:r>
+          </a:p>
+        </p:txBody>
+      </p:sp>
+      <p:sp>
+        <p:nvSpPr>
+          <p:cNvPr id="22" name="TextBox 21"/>
+          <p:cNvSpPr txBox="1"/>
+          <p:nvPr/>
+        </p:nvSpPr>
+        <p:spPr>
+          <a:xfrm>
+            <a:off x="4526280" y="2496312"/>
+            <a:ext cx="3154680" cy="548640"/>
+          </a:xfrm>
+          <a:prstGeom prst="rect">
+            <a:avLst/>
+          </a:prstGeom>
+          <a:noFill/>
+        </p:spPr>
+        <p:txBody>
+          <a:bodyPr wrap="square" anchor="t">
+            <a:spAutoFit/>
+          </a:bodyPr>
+          <a:lstStyle/>
+          <a:p>
+            <a:pPr algn="l">
+              <a:lnSpc>
+                <a:spcPct val="115000"/>
+              </a:lnSpc>
+            </a:pPr>
+            <a:r>
+              <a:rPr sz="1000" b="0">
                 <a:solidFill>
                   <a:srgbClr val="A89C88"/>
                 </a:solidFill>
+                <a:latin typeface="Segoe UI"/>
+              </a:rPr>
+              <a:t>8 цифр с ведущим нулём — иначе не найти в реестре</a:t>
+            </a:r>
+          </a:p>
+        </p:txBody>
+      </p:sp>
+      <p:sp>
+        <p:nvSpPr>
+          <p:cNvPr id="23" name="TextBox 22"/>
+          <p:cNvSpPr txBox="1"/>
+          <p:nvPr/>
+        </p:nvSpPr>
+        <p:spPr>
+          <a:xfrm>
+            <a:off x="4526280" y="3136392"/>
+            <a:ext cx="2240280" cy="274320"/>
+          </a:xfrm>
+          <a:prstGeom prst="rect">
+            <a:avLst/>
+          </a:prstGeom>
+          <a:noFill/>
+        </p:spPr>
+        <p:txBody>
+          <a:bodyPr wrap="square" anchor="t">
+            <a:spAutoFit/>
+          </a:bodyPr>
+          <a:lstStyle/>
+          <a:p>
+            <a:pPr algn="l">
+              <a:lnSpc>
+                <a:spcPct val="115000"/>
+              </a:lnSpc>
+            </a:pPr>
+            <a:r>
+              <a:rPr sz="1100" b="1">
+                <a:solidFill>
+                  <a:srgbClr val="EDE6D9"/>
+                </a:solidFill>
+                <a:latin typeface="Segoe UI"/>
+              </a:rPr>
+              <a:t>DQ-04  Точность vs приёмка</a:t>
+            </a:r>
+          </a:p>
+        </p:txBody>
+      </p:sp>
+      <p:sp>
+        <p:nvSpPr>
+          <p:cNvPr id="24" name="TextBox 23"/>
+          <p:cNvSpPr txBox="1"/>
+          <p:nvPr/>
+        </p:nvSpPr>
+        <p:spPr>
+          <a:xfrm>
+            <a:off x="6720840" y="3136392"/>
+            <a:ext cx="960120" cy="274320"/>
+          </a:xfrm>
+          <a:prstGeom prst="rect">
+            <a:avLst/>
+          </a:prstGeom>
+          <a:noFill/>
+        </p:spPr>
+        <p:txBody>
+          <a:bodyPr wrap="square" anchor="t">
+            <a:spAutoFit/>
+          </a:bodyPr>
+          <a:lstStyle/>
+          <a:p>
+            <a:pPr algn="r">
+              <a:lnSpc>
+                <a:spcPct val="115000"/>
+              </a:lnSpc>
+            </a:pPr>
+            <a:r>
+              <a:rPr sz="1000" b="1">
+                <a:solidFill>
+                  <a:srgbClr val="E0616B"/>
+                </a:solidFill>
                 <a:latin typeface="Consolas"/>
               </a:rPr>
-              <a:t>100%</a:t>
-            </a:r>
-          </a:p>
-        </p:txBody>
-      </p:sp>
-      <p:sp>
-        <p:nvSpPr>
-          <p:cNvPr id="10" name="TextBox 9"/>
-          <p:cNvSpPr txBox="1"/>
-          <p:nvPr/>
-        </p:nvSpPr>
-        <p:spPr>
-          <a:xfrm>
-            <a:off x="6903720" y="2560320"/>
-            <a:ext cx="2286000" cy="274320"/>
+              <a:t>FAIL 90%</a:t>
+            </a:r>
+          </a:p>
+        </p:txBody>
+      </p:sp>
+      <p:sp>
+        <p:nvSpPr>
+          <p:cNvPr id="25" name="TextBox 24"/>
+          <p:cNvSpPr txBox="1"/>
+          <p:nvPr/>
+        </p:nvSpPr>
+        <p:spPr>
+          <a:xfrm>
+            <a:off x="4526280" y="3392424"/>
+            <a:ext cx="3154680" cy="548640"/>
           </a:xfrm>
           <a:prstGeom prst="rect">
             <a:avLst/>
@@ -6435,36 +9354,274 @@
               </a:lnSpc>
             </a:pPr>
             <a:r>
-              <a:rPr sz="1100" b="0">
+              <a:rPr sz="1000" b="0">
                 <a:solidFill>
                   <a:srgbClr val="A89C88"/>
                 </a:solidFill>
+                <a:latin typeface="Segoe UI"/>
+              </a:rPr>
+              <a:t>Код в витрине совпадает с тем, что прислала организация</a:t>
+            </a:r>
+          </a:p>
+        </p:txBody>
+      </p:sp>
+      <p:sp>
+        <p:nvSpPr>
+          <p:cNvPr id="26" name="TextBox 25"/>
+          <p:cNvSpPr txBox="1"/>
+          <p:nvPr/>
+        </p:nvSpPr>
+        <p:spPr>
+          <a:xfrm>
+            <a:off x="4526280" y="4032504"/>
+            <a:ext cx="2240280" cy="274320"/>
+          </a:xfrm>
+          <a:prstGeom prst="rect">
+            <a:avLst/>
+          </a:prstGeom>
+          <a:noFill/>
+        </p:spPr>
+        <p:txBody>
+          <a:bodyPr wrap="square" anchor="t">
+            <a:spAutoFit/>
+          </a:bodyPr>
+          <a:lstStyle/>
+          <a:p>
+            <a:pPr algn="l">
+              <a:lnSpc>
+                <a:spcPct val="115000"/>
+              </a:lnSpc>
+            </a:pPr>
+            <a:r>
+              <a:rPr sz="1100" b="1">
+                <a:solidFill>
+                  <a:srgbClr val="EDE6D9"/>
+                </a:solidFill>
+                <a:latin typeface="Segoe UI"/>
+              </a:rPr>
+              <a:t>DQ-09  Код продукции</a:t>
+            </a:r>
+          </a:p>
+        </p:txBody>
+      </p:sp>
+      <p:sp>
+        <p:nvSpPr>
+          <p:cNvPr id="27" name="TextBox 26"/>
+          <p:cNvSpPr txBox="1"/>
+          <p:nvPr/>
+        </p:nvSpPr>
+        <p:spPr>
+          <a:xfrm>
+            <a:off x="6720840" y="4032504"/>
+            <a:ext cx="960120" cy="274320"/>
+          </a:xfrm>
+          <a:prstGeom prst="rect">
+            <a:avLst/>
+          </a:prstGeom>
+          <a:noFill/>
+        </p:spPr>
+        <p:txBody>
+          <a:bodyPr wrap="square" anchor="t">
+            <a:spAutoFit/>
+          </a:bodyPr>
+          <a:lstStyle/>
+          <a:p>
+            <a:pPr algn="r">
+              <a:lnSpc>
+                <a:spcPct val="115000"/>
+              </a:lnSpc>
+            </a:pPr>
+            <a:r>
+              <a:rPr sz="1000" b="1">
+                <a:solidFill>
+                  <a:srgbClr val="4CAF6D"/>
+                </a:solidFill>
                 <a:latin typeface="Consolas"/>
               </a:rPr>
-              <a:t>DQ-02 Полнота загрузки</a:t>
-            </a:r>
-          </a:p>
-        </p:txBody>
-      </p:sp>
-      <p:sp>
-        <p:nvSpPr>
-          <p:cNvPr id="11" name="Rounded Rectangle 10"/>
+              <a:t>PASS 100%</a:t>
+            </a:r>
+          </a:p>
+        </p:txBody>
+      </p:sp>
+      <p:sp>
+        <p:nvSpPr>
+          <p:cNvPr id="28" name="TextBox 27"/>
+          <p:cNvSpPr txBox="1"/>
+          <p:nvPr/>
+        </p:nvSpPr>
+        <p:spPr>
+          <a:xfrm>
+            <a:off x="4526280" y="4288536"/>
+            <a:ext cx="3154680" cy="548640"/>
+          </a:xfrm>
+          <a:prstGeom prst="rect">
+            <a:avLst/>
+          </a:prstGeom>
+          <a:noFill/>
+        </p:spPr>
+        <p:txBody>
+          <a:bodyPr wrap="square" anchor="t">
+            <a:spAutoFit/>
+          </a:bodyPr>
+          <a:lstStyle/>
+          <a:p>
+            <a:pPr algn="l">
+              <a:lnSpc>
+                <a:spcPct val="115000"/>
+              </a:lnSpc>
+            </a:pPr>
+            <a:r>
+              <a:rPr sz="1000" b="0">
+                <a:solidFill>
+                  <a:srgbClr val="A89C88"/>
+                </a:solidFill>
+                <a:latin typeface="Segoe UI"/>
+              </a:rPr>
+              <a:t>Положительный, правдоподобной длины</a:t>
+            </a:r>
+          </a:p>
+        </p:txBody>
+      </p:sp>
+      <p:sp>
+        <p:nvSpPr>
+          <p:cNvPr id="29" name="TextBox 28"/>
+          <p:cNvSpPr txBox="1"/>
+          <p:nvPr/>
+        </p:nvSpPr>
+        <p:spPr>
+          <a:xfrm>
+            <a:off x="4526280" y="4928616"/>
+            <a:ext cx="2240280" cy="274320"/>
+          </a:xfrm>
+          <a:prstGeom prst="rect">
+            <a:avLst/>
+          </a:prstGeom>
+          <a:noFill/>
+        </p:spPr>
+        <p:txBody>
+          <a:bodyPr wrap="square" anchor="t">
+            <a:spAutoFit/>
+          </a:bodyPr>
+          <a:lstStyle/>
+          <a:p>
+            <a:pPr algn="l">
+              <a:lnSpc>
+                <a:spcPct val="115000"/>
+              </a:lnSpc>
+            </a:pPr>
+            <a:r>
+              <a:rPr sz="1100" b="1">
+                <a:solidFill>
+                  <a:srgbClr val="EDE6D9"/>
+                </a:solidFill>
+                <a:latin typeface="Segoe UI"/>
+              </a:rPr>
+              <a:t>DQ-10  Формат справок</a:t>
+            </a:r>
+          </a:p>
+        </p:txBody>
+      </p:sp>
+      <p:sp>
+        <p:nvSpPr>
+          <p:cNvPr id="30" name="TextBox 29"/>
+          <p:cNvSpPr txBox="1"/>
+          <p:nvPr/>
+        </p:nvSpPr>
+        <p:spPr>
+          <a:xfrm>
+            <a:off x="6720840" y="4928616"/>
+            <a:ext cx="960120" cy="274320"/>
+          </a:xfrm>
+          <a:prstGeom prst="rect">
+            <a:avLst/>
+          </a:prstGeom>
+          <a:noFill/>
+        </p:spPr>
+        <p:txBody>
+          <a:bodyPr wrap="square" anchor="t">
+            <a:spAutoFit/>
+          </a:bodyPr>
+          <a:lstStyle/>
+          <a:p>
+            <a:pPr algn="r">
+              <a:lnSpc>
+                <a:spcPct val="115000"/>
+              </a:lnSpc>
+            </a:pPr>
+            <a:r>
+              <a:rPr sz="1000" b="1">
+                <a:solidFill>
+                  <a:srgbClr val="4CAF6D"/>
+                </a:solidFill>
+                <a:latin typeface="Consolas"/>
+              </a:rPr>
+              <a:t>PASS 100%</a:t>
+            </a:r>
+          </a:p>
+        </p:txBody>
+      </p:sp>
+      <p:sp>
+        <p:nvSpPr>
+          <p:cNvPr id="31" name="TextBox 30"/>
+          <p:cNvSpPr txBox="1"/>
+          <p:nvPr/>
+        </p:nvSpPr>
+        <p:spPr>
+          <a:xfrm>
+            <a:off x="4526280" y="5184648"/>
+            <a:ext cx="3154680" cy="548640"/>
+          </a:xfrm>
+          <a:prstGeom prst="rect">
+            <a:avLst/>
+          </a:prstGeom>
+          <a:noFill/>
+        </p:spPr>
+        <p:txBody>
+          <a:bodyPr wrap="square" anchor="t">
+            <a:spAutoFit/>
+          </a:bodyPr>
+          <a:lstStyle/>
+          <a:p>
+            <a:pPr algn="l">
+              <a:lnSpc>
+                <a:spcPct val="115000"/>
+              </a:lnSpc>
+            </a:pPr>
+            <a:r>
+              <a:rPr sz="1000" b="0">
+                <a:solidFill>
+                  <a:srgbClr val="A89C88"/>
+                </a:solidFill>
+                <a:latin typeface="Segoe UI"/>
+              </a:rPr>
+              <a:t>Номера деклараций соответствуют шаблону</a:t>
+            </a:r>
+          </a:p>
+        </p:txBody>
+      </p:sp>
+      <p:sp>
+        <p:nvSpPr>
+          <p:cNvPr id="32" name="Rounded Rectangle 31"/>
           <p:cNvSpPr/>
           <p:nvPr/>
         </p:nvSpPr>
         <p:spPr>
           <a:xfrm>
-            <a:off x="9281160" y="2578608"/>
-            <a:ext cx="1645920" cy="164592"/>
+            <a:off x="8046719" y="1691640"/>
+            <a:ext cx="3520440" cy="4160520"/>
           </a:xfrm>
           <a:prstGeom prst="roundRect">
-            <a:avLst/>
+            <a:avLst>
+              <a:gd name="adj" fmla="val 6000"/>
+            </a:avLst>
           </a:prstGeom>
           <a:solidFill>
-            <a:srgbClr val="E0616B"/>
+            <a:srgbClr val="1D1A14"/>
           </a:solidFill>
-          <a:ln>
-            <a:noFill/>
+          <a:ln w="12700">
+            <a:solidFill>
+              <a:srgbClr val="332E24"/>
+            </a:solidFill>
           </a:ln>
           <a:effectLst/>
         </p:spPr>
@@ -6492,14 +9649,14 @@
       </p:sp>
       <p:sp>
         <p:nvSpPr>
-          <p:cNvPr id="12" name="TextBox 11"/>
-          <p:cNvSpPr txBox="1"/>
-          <p:nvPr/>
-        </p:nvSpPr>
-        <p:spPr>
-          <a:xfrm>
-            <a:off x="11137392" y="2542032"/>
-            <a:ext cx="822960" cy="274320"/>
+          <p:cNvPr id="33" name="TextBox 32"/>
+          <p:cNvSpPr txBox="1"/>
+          <p:nvPr/>
+        </p:nvSpPr>
+        <p:spPr>
+          <a:xfrm>
+            <a:off x="8229599" y="1828800"/>
+            <a:ext cx="3200400" cy="320040"/>
           </a:xfrm>
           <a:prstGeom prst="rect">
             <a:avLst/>
@@ -6518,27 +9675,222 @@
               </a:lnSpc>
             </a:pPr>
             <a:r>
-              <a:rPr sz="1050" b="0">
+              <a:rPr sz="1100" b="1">
+                <a:solidFill>
+                  <a:srgbClr val="DBA25A"/>
+                </a:solidFill>
+                <a:latin typeface="Consolas"/>
+              </a:rPr>
+              <a:t>БИЗНЕС-ЛОГИКА</a:t>
+            </a:r>
+          </a:p>
+        </p:txBody>
+      </p:sp>
+      <p:sp>
+        <p:nvSpPr>
+          <p:cNvPr id="34" name="TextBox 33"/>
+          <p:cNvSpPr txBox="1"/>
+          <p:nvPr/>
+        </p:nvSpPr>
+        <p:spPr>
+          <a:xfrm>
+            <a:off x="8229599" y="2240280"/>
+            <a:ext cx="2240280" cy="274320"/>
+          </a:xfrm>
+          <a:prstGeom prst="rect">
+            <a:avLst/>
+          </a:prstGeom>
+          <a:noFill/>
+        </p:spPr>
+        <p:txBody>
+          <a:bodyPr wrap="square" anchor="t">
+            <a:spAutoFit/>
+          </a:bodyPr>
+          <a:lstStyle/>
+          <a:p>
+            <a:pPr algn="l">
+              <a:lnSpc>
+                <a:spcPct val="115000"/>
+              </a:lnSpc>
+            </a:pPr>
+            <a:r>
+              <a:rPr sz="1100" b="1">
+                <a:solidFill>
+                  <a:srgbClr val="EDE6D9"/>
+                </a:solidFill>
+                <a:latin typeface="Segoe UI"/>
+              </a:rPr>
+              <a:t>DQ-07  Знак количества</a:t>
+            </a:r>
+          </a:p>
+        </p:txBody>
+      </p:sp>
+      <p:sp>
+        <p:nvSpPr>
+          <p:cNvPr id="35" name="TextBox 34"/>
+          <p:cNvSpPr txBox="1"/>
+          <p:nvPr/>
+        </p:nvSpPr>
+        <p:spPr>
+          <a:xfrm>
+            <a:off x="10424159" y="2240280"/>
+            <a:ext cx="960120" cy="274320"/>
+          </a:xfrm>
+          <a:prstGeom prst="rect">
+            <a:avLst/>
+          </a:prstGeom>
+          <a:noFill/>
+        </p:spPr>
+        <p:txBody>
+          <a:bodyPr wrap="square" anchor="t">
+            <a:spAutoFit/>
+          </a:bodyPr>
+          <a:lstStyle/>
+          <a:p>
+            <a:pPr algn="r">
+              <a:lnSpc>
+                <a:spcPct val="115000"/>
+              </a:lnSpc>
+            </a:pPr>
+            <a:r>
+              <a:rPr sz="1000" b="1">
+                <a:solidFill>
+                  <a:srgbClr val="4CAF6D"/>
+                </a:solidFill>
+                <a:latin typeface="Consolas"/>
+              </a:rPr>
+              <a:t>PASS 100%</a:t>
+            </a:r>
+          </a:p>
+        </p:txBody>
+      </p:sp>
+      <p:sp>
+        <p:nvSpPr>
+          <p:cNvPr id="36" name="TextBox 35"/>
+          <p:cNvSpPr txBox="1"/>
+          <p:nvPr/>
+        </p:nvSpPr>
+        <p:spPr>
+          <a:xfrm>
+            <a:off x="8229599" y="2496312"/>
+            <a:ext cx="3154680" cy="548640"/>
+          </a:xfrm>
+          <a:prstGeom prst="rect">
+            <a:avLst/>
+          </a:prstGeom>
+          <a:noFill/>
+        </p:spPr>
+        <p:txBody>
+          <a:bodyPr wrap="square" anchor="t">
+            <a:spAutoFit/>
+          </a:bodyPr>
+          <a:lstStyle/>
+          <a:p>
+            <a:pPr algn="l">
+              <a:lnSpc>
+                <a:spcPct val="115000"/>
+              </a:lnSpc>
+            </a:pPr>
+            <a:r>
+              <a:rPr sz="1000" b="0">
                 <a:solidFill>
                   <a:srgbClr val="A89C88"/>
                 </a:solidFill>
+                <a:latin typeface="Segoe UI"/>
+              </a:rPr>
+              <a:t>Приход &gt; 0, списание &lt; 0</a:t>
+            </a:r>
+          </a:p>
+        </p:txBody>
+      </p:sp>
+      <p:sp>
+        <p:nvSpPr>
+          <p:cNvPr id="37" name="TextBox 36"/>
+          <p:cNvSpPr txBox="1"/>
+          <p:nvPr/>
+        </p:nvSpPr>
+        <p:spPr>
+          <a:xfrm>
+            <a:off x="8229599" y="3136392"/>
+            <a:ext cx="2240280" cy="274320"/>
+          </a:xfrm>
+          <a:prstGeom prst="rect">
+            <a:avLst/>
+          </a:prstGeom>
+          <a:noFill/>
+        </p:spPr>
+        <p:txBody>
+          <a:bodyPr wrap="square" anchor="t">
+            <a:spAutoFit/>
+          </a:bodyPr>
+          <a:lstStyle/>
+          <a:p>
+            <a:pPr algn="l">
+              <a:lnSpc>
+                <a:spcPct val="115000"/>
+              </a:lnSpc>
+            </a:pPr>
+            <a:r>
+              <a:rPr sz="1100" b="1">
+                <a:solidFill>
+                  <a:srgbClr val="EDE6D9"/>
+                </a:solidFill>
+                <a:latin typeface="Segoe UI"/>
+              </a:rPr>
+              <a:t>DQ-12  Иерархия справок</a:t>
+            </a:r>
+          </a:p>
+        </p:txBody>
+      </p:sp>
+      <p:sp>
+        <p:nvSpPr>
+          <p:cNvPr id="38" name="TextBox 37"/>
+          <p:cNvSpPr txBox="1"/>
+          <p:nvPr/>
+        </p:nvSpPr>
+        <p:spPr>
+          <a:xfrm>
+            <a:off x="10424159" y="3136392"/>
+            <a:ext cx="960120" cy="274320"/>
+          </a:xfrm>
+          <a:prstGeom prst="rect">
+            <a:avLst/>
+          </a:prstGeom>
+          <a:noFill/>
+        </p:spPr>
+        <p:txBody>
+          <a:bodyPr wrap="square" anchor="t">
+            <a:spAutoFit/>
+          </a:bodyPr>
+          <a:lstStyle/>
+          <a:p>
+            <a:pPr algn="r">
+              <a:lnSpc>
+                <a:spcPct val="115000"/>
+              </a:lnSpc>
+            </a:pPr>
+            <a:r>
+              <a:rPr sz="1000" b="1">
+                <a:solidFill>
+                  <a:srgbClr val="4CAF6D"/>
+                </a:solidFill>
                 <a:latin typeface="Consolas"/>
               </a:rPr>
-              <a:t>90%</a:t>
-            </a:r>
-          </a:p>
-        </p:txBody>
-      </p:sp>
-      <p:sp>
-        <p:nvSpPr>
-          <p:cNvPr id="13" name="TextBox 12"/>
-          <p:cNvSpPr txBox="1"/>
-          <p:nvPr/>
-        </p:nvSpPr>
-        <p:spPr>
-          <a:xfrm>
-            <a:off x="6903720" y="2834639"/>
-            <a:ext cx="2286000" cy="274320"/>
+              <a:t>PASS 100%</a:t>
+            </a:r>
+          </a:p>
+        </p:txBody>
+      </p:sp>
+      <p:sp>
+        <p:nvSpPr>
+          <p:cNvPr id="39" name="TextBox 38"/>
+          <p:cNvSpPr txBox="1"/>
+          <p:nvPr/>
+        </p:nvSpPr>
+        <p:spPr>
+          <a:xfrm>
+            <a:off x="8229599" y="3392424"/>
+            <a:ext cx="3154680" cy="548640"/>
           </a:xfrm>
           <a:prstGeom prst="rect">
             <a:avLst/>
@@ -6557,71 +9909,105 @@
               </a:lnSpc>
             </a:pPr>
             <a:r>
-              <a:rPr sz="1100" b="0">
+              <a:rPr sz="1000" b="0">
                 <a:solidFill>
                   <a:srgbClr val="A89C88"/>
                 </a:solidFill>
+                <a:latin typeface="Segoe UI"/>
+              </a:rPr>
+              <a:t>Перемещение принадлежит ровно одной партии</a:t>
+            </a:r>
+          </a:p>
+        </p:txBody>
+      </p:sp>
+      <p:sp>
+        <p:nvSpPr>
+          <p:cNvPr id="40" name="TextBox 39"/>
+          <p:cNvSpPr txBox="1"/>
+          <p:nvPr/>
+        </p:nvSpPr>
+        <p:spPr>
+          <a:xfrm>
+            <a:off x="8229599" y="4032504"/>
+            <a:ext cx="2240280" cy="274320"/>
+          </a:xfrm>
+          <a:prstGeom prst="rect">
+            <a:avLst/>
+          </a:prstGeom>
+          <a:noFill/>
+        </p:spPr>
+        <p:txBody>
+          <a:bodyPr wrap="square" anchor="t">
+            <a:spAutoFit/>
+          </a:bodyPr>
+          <a:lstStyle/>
+          <a:p>
+            <a:pPr algn="l">
+              <a:lnSpc>
+                <a:spcPct val="115000"/>
+              </a:lnSpc>
+            </a:pPr>
+            <a:r>
+              <a:rPr sz="1100" b="1">
+                <a:solidFill>
+                  <a:srgbClr val="EDE6D9"/>
+                </a:solidFill>
+                <a:latin typeface="Segoe UI"/>
+              </a:rPr>
+              <a:t>DQ-13  Однородность</a:t>
+            </a:r>
+          </a:p>
+        </p:txBody>
+      </p:sp>
+      <p:sp>
+        <p:nvSpPr>
+          <p:cNvPr id="41" name="TextBox 40"/>
+          <p:cNvSpPr txBox="1"/>
+          <p:nvPr/>
+        </p:nvSpPr>
+        <p:spPr>
+          <a:xfrm>
+            <a:off x="10424159" y="4032504"/>
+            <a:ext cx="960120" cy="274320"/>
+          </a:xfrm>
+          <a:prstGeom prst="rect">
+            <a:avLst/>
+          </a:prstGeom>
+          <a:noFill/>
+        </p:spPr>
+        <p:txBody>
+          <a:bodyPr wrap="square" anchor="t">
+            <a:spAutoFit/>
+          </a:bodyPr>
+          <a:lstStyle/>
+          <a:p>
+            <a:pPr algn="r">
+              <a:lnSpc>
+                <a:spcPct val="115000"/>
+              </a:lnSpc>
+            </a:pPr>
+            <a:r>
+              <a:rPr sz="1000" b="1">
+                <a:solidFill>
+                  <a:srgbClr val="4CAF6D"/>
+                </a:solidFill>
                 <a:latin typeface="Consolas"/>
               </a:rPr>
-              <a:t>DQ-03 Формат кода</a:t>
-            </a:r>
-          </a:p>
-        </p:txBody>
-      </p:sp>
-      <p:sp>
-        <p:nvSpPr>
-          <p:cNvPr id="14" name="Rounded Rectangle 13"/>
-          <p:cNvSpPr/>
-          <p:nvPr/>
-        </p:nvSpPr>
-        <p:spPr>
-          <a:xfrm>
-            <a:off x="9281160" y="2852927"/>
-            <a:ext cx="1645920" cy="164592"/>
-          </a:xfrm>
-          <a:prstGeom prst="roundRect">
-            <a:avLst/>
-          </a:prstGeom>
-          <a:solidFill>
-            <a:srgbClr val="E0616B"/>
-          </a:solidFill>
-          <a:ln>
-            <a:noFill/>
-          </a:ln>
-          <a:effectLst/>
-        </p:spPr>
-        <p:style>
-          <a:lnRef idx="1">
-            <a:schemeClr val="accent1"/>
-          </a:lnRef>
-          <a:fillRef idx="3">
-            <a:schemeClr val="accent1"/>
-          </a:fillRef>
-          <a:effectRef idx="2">
-            <a:schemeClr val="accent1"/>
-          </a:effectRef>
-          <a:fontRef idx="minor">
-            <a:schemeClr val="lt1"/>
-          </a:fontRef>
-        </p:style>
-        <p:txBody>
-          <a:bodyPr rtlCol="0" anchor="ctr"/>
-          <a:lstStyle/>
-          <a:p>
-            <a:pPr algn="ctr"/>
-          </a:p>
-        </p:txBody>
-      </p:sp>
-      <p:sp>
-        <p:nvSpPr>
-          <p:cNvPr id="15" name="TextBox 14"/>
-          <p:cNvSpPr txBox="1"/>
-          <p:nvPr/>
-        </p:nvSpPr>
-        <p:spPr>
-          <a:xfrm>
-            <a:off x="11137392" y="2816351"/>
-            <a:ext cx="822960" cy="274320"/>
+              <a:t>PASS 100%</a:t>
+            </a:r>
+          </a:p>
+        </p:txBody>
+      </p:sp>
+      <p:sp>
+        <p:nvSpPr>
+          <p:cNvPr id="42" name="TextBox 41"/>
+          <p:cNvSpPr txBox="1"/>
+          <p:nvPr/>
+        </p:nvSpPr>
+        <p:spPr>
+          <a:xfrm>
+            <a:off x="8229599" y="4288536"/>
+            <a:ext cx="3154680" cy="548640"/>
           </a:xfrm>
           <a:prstGeom prst="rect">
             <a:avLst/>
@@ -6640,27 +10026,105 @@
               </a:lnSpc>
             </a:pPr>
             <a:r>
-              <a:rPr sz="1050" b="0">
+              <a:rPr sz="1000" b="0">
                 <a:solidFill>
                   <a:srgbClr val="A89C88"/>
                 </a:solidFill>
+                <a:latin typeface="Segoe UI"/>
+              </a:rPr>
+              <a:t>Внутри справки А один код продукции</a:t>
+            </a:r>
+          </a:p>
+        </p:txBody>
+      </p:sp>
+      <p:sp>
+        <p:nvSpPr>
+          <p:cNvPr id="43" name="TextBox 42"/>
+          <p:cNvSpPr txBox="1"/>
+          <p:nvPr/>
+        </p:nvSpPr>
+        <p:spPr>
+          <a:xfrm>
+            <a:off x="8229599" y="4928616"/>
+            <a:ext cx="2240280" cy="274320"/>
+          </a:xfrm>
+          <a:prstGeom prst="rect">
+            <a:avLst/>
+          </a:prstGeom>
+          <a:noFill/>
+        </p:spPr>
+        <p:txBody>
+          <a:bodyPr wrap="square" anchor="t">
+            <a:spAutoFit/>
+          </a:bodyPr>
+          <a:lstStyle/>
+          <a:p>
+            <a:pPr algn="l">
+              <a:lnSpc>
+                <a:spcPct val="115000"/>
+              </a:lnSpc>
+            </a:pPr>
+            <a:r>
+              <a:rPr sz="1100" b="1">
+                <a:solidFill>
+                  <a:srgbClr val="EDE6D9"/>
+                </a:solidFill>
+                <a:latin typeface="Segoe UI"/>
+              </a:rPr>
+              <a:t>DQ-14  Баланс поставки</a:t>
+            </a:r>
+          </a:p>
+        </p:txBody>
+      </p:sp>
+      <p:sp>
+        <p:nvSpPr>
+          <p:cNvPr id="44" name="TextBox 43"/>
+          <p:cNvSpPr txBox="1"/>
+          <p:nvPr/>
+        </p:nvSpPr>
+        <p:spPr>
+          <a:xfrm>
+            <a:off x="10424159" y="4928616"/>
+            <a:ext cx="960120" cy="274320"/>
+          </a:xfrm>
+          <a:prstGeom prst="rect">
+            <a:avLst/>
+          </a:prstGeom>
+          <a:noFill/>
+        </p:spPr>
+        <p:txBody>
+          <a:bodyPr wrap="square" anchor="t">
+            <a:spAutoFit/>
+          </a:bodyPr>
+          <a:lstStyle/>
+          <a:p>
+            <a:pPr algn="r">
+              <a:lnSpc>
+                <a:spcPct val="115000"/>
+              </a:lnSpc>
+            </a:pPr>
+            <a:r>
+              <a:rPr sz="1000" b="1">
+                <a:solidFill>
+                  <a:srgbClr val="E0616B"/>
+                </a:solidFill>
                 <a:latin typeface="Consolas"/>
               </a:rPr>
-              <a:t>90%</a:t>
-            </a:r>
-          </a:p>
-        </p:txBody>
-      </p:sp>
-      <p:sp>
-        <p:nvSpPr>
-          <p:cNvPr id="16" name="TextBox 15"/>
-          <p:cNvSpPr txBox="1"/>
-          <p:nvPr/>
-        </p:nvSpPr>
-        <p:spPr>
-          <a:xfrm>
-            <a:off x="6903720" y="3108959"/>
-            <a:ext cx="2286000" cy="274320"/>
+              <a:t>FAIL 65%</a:t>
+            </a:r>
+          </a:p>
+        </p:txBody>
+      </p:sp>
+      <p:sp>
+        <p:nvSpPr>
+          <p:cNvPr id="45" name="TextBox 44"/>
+          <p:cNvSpPr txBox="1"/>
+          <p:nvPr/>
+        </p:nvSpPr>
+        <p:spPr>
+          <a:xfrm>
+            <a:off x="8229599" y="5184648"/>
+            <a:ext cx="3154680" cy="548640"/>
           </a:xfrm>
           <a:prstGeom prst="rect">
             <a:avLst/>
@@ -6679,1194 +10143,13 @@
               </a:lnSpc>
             </a:pPr>
             <a:r>
-              <a:rPr sz="1100" b="0">
+              <a:rPr sz="1000" b="0">
                 <a:solidFill>
                   <a:srgbClr val="A89C88"/>
                 </a:solidFill>
-                <a:latin typeface="Consolas"/>
-              </a:rPr>
-              <a:t>DQ-04 Точность кода</a:t>
-            </a:r>
-          </a:p>
-        </p:txBody>
-      </p:sp>
-      <p:sp>
-        <p:nvSpPr>
-          <p:cNvPr id="17" name="Rounded Rectangle 16"/>
-          <p:cNvSpPr/>
-          <p:nvPr/>
-        </p:nvSpPr>
-        <p:spPr>
-          <a:xfrm>
-            <a:off x="9281160" y="3127247"/>
-            <a:ext cx="1645920" cy="164592"/>
-          </a:xfrm>
-          <a:prstGeom prst="roundRect">
-            <a:avLst/>
-          </a:prstGeom>
-          <a:solidFill>
-            <a:srgbClr val="E0616B"/>
-          </a:solidFill>
-          <a:ln>
-            <a:noFill/>
-          </a:ln>
-          <a:effectLst/>
-        </p:spPr>
-        <p:style>
-          <a:lnRef idx="1">
-            <a:schemeClr val="accent1"/>
-          </a:lnRef>
-          <a:fillRef idx="3">
-            <a:schemeClr val="accent1"/>
-          </a:fillRef>
-          <a:effectRef idx="2">
-            <a:schemeClr val="accent1"/>
-          </a:effectRef>
-          <a:fontRef idx="minor">
-            <a:schemeClr val="lt1"/>
-          </a:fontRef>
-        </p:style>
-        <p:txBody>
-          <a:bodyPr rtlCol="0" anchor="ctr"/>
-          <a:lstStyle/>
-          <a:p>
-            <a:pPr algn="ctr"/>
-          </a:p>
-        </p:txBody>
-      </p:sp>
-      <p:sp>
-        <p:nvSpPr>
-          <p:cNvPr id="18" name="TextBox 17"/>
-          <p:cNvSpPr txBox="1"/>
-          <p:nvPr/>
-        </p:nvSpPr>
-        <p:spPr>
-          <a:xfrm>
-            <a:off x="11137392" y="3090671"/>
-            <a:ext cx="822960" cy="274320"/>
-          </a:xfrm>
-          <a:prstGeom prst="rect">
-            <a:avLst/>
-          </a:prstGeom>
-          <a:noFill/>
-        </p:spPr>
-        <p:txBody>
-          <a:bodyPr wrap="square" anchor="t">
-            <a:spAutoFit/>
-          </a:bodyPr>
-          <a:lstStyle/>
-          <a:p>
-            <a:pPr algn="l">
-              <a:lnSpc>
-                <a:spcPct val="115000"/>
-              </a:lnSpc>
-            </a:pPr>
-            <a:r>
-              <a:rPr sz="1050" b="0">
-                <a:solidFill>
-                  <a:srgbClr val="A89C88"/>
-                </a:solidFill>
-                <a:latin typeface="Consolas"/>
-              </a:rPr>
-              <a:t>90%</a:t>
-            </a:r>
-          </a:p>
-        </p:txBody>
-      </p:sp>
-      <p:sp>
-        <p:nvSpPr>
-          <p:cNvPr id="19" name="TextBox 18"/>
-          <p:cNvSpPr txBox="1"/>
-          <p:nvPr/>
-        </p:nvSpPr>
-        <p:spPr>
-          <a:xfrm>
-            <a:off x="6903720" y="3383279"/>
-            <a:ext cx="2286000" cy="274320"/>
-          </a:xfrm>
-          <a:prstGeom prst="rect">
-            <a:avLst/>
-          </a:prstGeom>
-          <a:noFill/>
-        </p:spPr>
-        <p:txBody>
-          <a:bodyPr wrap="square" anchor="t">
-            <a:spAutoFit/>
-          </a:bodyPr>
-          <a:lstStyle/>
-          <a:p>
-            <a:pPr algn="l">
-              <a:lnSpc>
-                <a:spcPct val="115000"/>
-              </a:lnSpc>
-            </a:pPr>
-            <a:r>
-              <a:rPr sz="1100" b="0">
-                <a:solidFill>
-                  <a:srgbClr val="A89C88"/>
-                </a:solidFill>
-                <a:latin typeface="Consolas"/>
-              </a:rPr>
-              <a:t>DQ-05 Уникальность</a:t>
-            </a:r>
-          </a:p>
-        </p:txBody>
-      </p:sp>
-      <p:sp>
-        <p:nvSpPr>
-          <p:cNvPr id="20" name="Rounded Rectangle 19"/>
-          <p:cNvSpPr/>
-          <p:nvPr/>
-        </p:nvSpPr>
-        <p:spPr>
-          <a:xfrm>
-            <a:off x="9281160" y="3401567"/>
-            <a:ext cx="1828800" cy="164592"/>
-          </a:xfrm>
-          <a:prstGeom prst="roundRect">
-            <a:avLst/>
-          </a:prstGeom>
-          <a:solidFill>
-            <a:srgbClr val="4CAF6D"/>
-          </a:solidFill>
-          <a:ln>
-            <a:noFill/>
-          </a:ln>
-          <a:effectLst/>
-        </p:spPr>
-        <p:style>
-          <a:lnRef idx="1">
-            <a:schemeClr val="accent1"/>
-          </a:lnRef>
-          <a:fillRef idx="3">
-            <a:schemeClr val="accent1"/>
-          </a:fillRef>
-          <a:effectRef idx="2">
-            <a:schemeClr val="accent1"/>
-          </a:effectRef>
-          <a:fontRef idx="minor">
-            <a:schemeClr val="lt1"/>
-          </a:fontRef>
-        </p:style>
-        <p:txBody>
-          <a:bodyPr rtlCol="0" anchor="ctr"/>
-          <a:lstStyle/>
-          <a:p>
-            <a:pPr algn="ctr"/>
-          </a:p>
-        </p:txBody>
-      </p:sp>
-      <p:sp>
-        <p:nvSpPr>
-          <p:cNvPr id="21" name="TextBox 20"/>
-          <p:cNvSpPr txBox="1"/>
-          <p:nvPr/>
-        </p:nvSpPr>
-        <p:spPr>
-          <a:xfrm>
-            <a:off x="11137392" y="3364991"/>
-            <a:ext cx="822960" cy="274320"/>
-          </a:xfrm>
-          <a:prstGeom prst="rect">
-            <a:avLst/>
-          </a:prstGeom>
-          <a:noFill/>
-        </p:spPr>
-        <p:txBody>
-          <a:bodyPr wrap="square" anchor="t">
-            <a:spAutoFit/>
-          </a:bodyPr>
-          <a:lstStyle/>
-          <a:p>
-            <a:pPr algn="l">
-              <a:lnSpc>
-                <a:spcPct val="115000"/>
-              </a:lnSpc>
-            </a:pPr>
-            <a:r>
-              <a:rPr sz="1050" b="0">
-                <a:solidFill>
-                  <a:srgbClr val="A89C88"/>
-                </a:solidFill>
-                <a:latin typeface="Consolas"/>
-              </a:rPr>
-              <a:t>100%</a:t>
-            </a:r>
-          </a:p>
-        </p:txBody>
-      </p:sp>
-      <p:sp>
-        <p:nvSpPr>
-          <p:cNvPr id="22" name="TextBox 21"/>
-          <p:cNvSpPr txBox="1"/>
-          <p:nvPr/>
-        </p:nvSpPr>
-        <p:spPr>
-          <a:xfrm>
-            <a:off x="6903720" y="3657599"/>
-            <a:ext cx="2286000" cy="274320"/>
-          </a:xfrm>
-          <a:prstGeom prst="rect">
-            <a:avLst/>
-          </a:prstGeom>
-          <a:noFill/>
-        </p:spPr>
-        <p:txBody>
-          <a:bodyPr wrap="square" anchor="t">
-            <a:spAutoFit/>
-          </a:bodyPr>
-          <a:lstStyle/>
-          <a:p>
-            <a:pPr algn="l">
-              <a:lnSpc>
-                <a:spcPct val="115000"/>
-              </a:lnSpc>
-            </a:pPr>
-            <a:r>
-              <a:rPr sz="1100" b="0">
-                <a:solidFill>
-                  <a:srgbClr val="A89C88"/>
-                </a:solidFill>
-                <a:latin typeface="Consolas"/>
-              </a:rPr>
-              <a:t>DQ-06 Тип документа</a:t>
-            </a:r>
-          </a:p>
-        </p:txBody>
-      </p:sp>
-      <p:sp>
-        <p:nvSpPr>
-          <p:cNvPr id="23" name="Rounded Rectangle 22"/>
-          <p:cNvSpPr/>
-          <p:nvPr/>
-        </p:nvSpPr>
-        <p:spPr>
-          <a:xfrm>
-            <a:off x="9281160" y="3675887"/>
-            <a:ext cx="1828800" cy="164592"/>
-          </a:xfrm>
-          <a:prstGeom prst="roundRect">
-            <a:avLst/>
-          </a:prstGeom>
-          <a:solidFill>
-            <a:srgbClr val="4CAF6D"/>
-          </a:solidFill>
-          <a:ln>
-            <a:noFill/>
-          </a:ln>
-          <a:effectLst/>
-        </p:spPr>
-        <p:style>
-          <a:lnRef idx="1">
-            <a:schemeClr val="accent1"/>
-          </a:lnRef>
-          <a:fillRef idx="3">
-            <a:schemeClr val="accent1"/>
-          </a:fillRef>
-          <a:effectRef idx="2">
-            <a:schemeClr val="accent1"/>
-          </a:effectRef>
-          <a:fontRef idx="minor">
-            <a:schemeClr val="lt1"/>
-          </a:fontRef>
-        </p:style>
-        <p:txBody>
-          <a:bodyPr rtlCol="0" anchor="ctr"/>
-          <a:lstStyle/>
-          <a:p>
-            <a:pPr algn="ctr"/>
-          </a:p>
-        </p:txBody>
-      </p:sp>
-      <p:sp>
-        <p:nvSpPr>
-          <p:cNvPr id="24" name="TextBox 23"/>
-          <p:cNvSpPr txBox="1"/>
-          <p:nvPr/>
-        </p:nvSpPr>
-        <p:spPr>
-          <a:xfrm>
-            <a:off x="11137392" y="3639311"/>
-            <a:ext cx="822960" cy="274320"/>
-          </a:xfrm>
-          <a:prstGeom prst="rect">
-            <a:avLst/>
-          </a:prstGeom>
-          <a:noFill/>
-        </p:spPr>
-        <p:txBody>
-          <a:bodyPr wrap="square" anchor="t">
-            <a:spAutoFit/>
-          </a:bodyPr>
-          <a:lstStyle/>
-          <a:p>
-            <a:pPr algn="l">
-              <a:lnSpc>
-                <a:spcPct val="115000"/>
-              </a:lnSpc>
-            </a:pPr>
-            <a:r>
-              <a:rPr sz="1050" b="0">
-                <a:solidFill>
-                  <a:srgbClr val="A89C88"/>
-                </a:solidFill>
-                <a:latin typeface="Consolas"/>
-              </a:rPr>
-              <a:t>100%</a:t>
-            </a:r>
-          </a:p>
-        </p:txBody>
-      </p:sp>
-      <p:sp>
-        <p:nvSpPr>
-          <p:cNvPr id="25" name="TextBox 24"/>
-          <p:cNvSpPr txBox="1"/>
-          <p:nvPr/>
-        </p:nvSpPr>
-        <p:spPr>
-          <a:xfrm>
-            <a:off x="6903720" y="3931919"/>
-            <a:ext cx="2286000" cy="274320"/>
-          </a:xfrm>
-          <a:prstGeom prst="rect">
-            <a:avLst/>
-          </a:prstGeom>
-          <a:noFill/>
-        </p:spPr>
-        <p:txBody>
-          <a:bodyPr wrap="square" anchor="t">
-            <a:spAutoFit/>
-          </a:bodyPr>
-          <a:lstStyle/>
-          <a:p>
-            <a:pPr algn="l">
-              <a:lnSpc>
-                <a:spcPct val="115000"/>
-              </a:lnSpc>
-            </a:pPr>
-            <a:r>
-              <a:rPr sz="1100" b="0">
-                <a:solidFill>
-                  <a:srgbClr val="A89C88"/>
-                </a:solidFill>
-                <a:latin typeface="Consolas"/>
-              </a:rPr>
-              <a:t>DQ-07 Знак количества</a:t>
-            </a:r>
-          </a:p>
-        </p:txBody>
-      </p:sp>
-      <p:sp>
-        <p:nvSpPr>
-          <p:cNvPr id="26" name="Rounded Rectangle 25"/>
-          <p:cNvSpPr/>
-          <p:nvPr/>
-        </p:nvSpPr>
-        <p:spPr>
-          <a:xfrm>
-            <a:off x="9281160" y="3950207"/>
-            <a:ext cx="1828800" cy="164592"/>
-          </a:xfrm>
-          <a:prstGeom prst="roundRect">
-            <a:avLst/>
-          </a:prstGeom>
-          <a:solidFill>
-            <a:srgbClr val="4CAF6D"/>
-          </a:solidFill>
-          <a:ln>
-            <a:noFill/>
-          </a:ln>
-          <a:effectLst/>
-        </p:spPr>
-        <p:style>
-          <a:lnRef idx="1">
-            <a:schemeClr val="accent1"/>
-          </a:lnRef>
-          <a:fillRef idx="3">
-            <a:schemeClr val="accent1"/>
-          </a:fillRef>
-          <a:effectRef idx="2">
-            <a:schemeClr val="accent1"/>
-          </a:effectRef>
-          <a:fontRef idx="minor">
-            <a:schemeClr val="lt1"/>
-          </a:fontRef>
-        </p:style>
-        <p:txBody>
-          <a:bodyPr rtlCol="0" anchor="ctr"/>
-          <a:lstStyle/>
-          <a:p>
-            <a:pPr algn="ctr"/>
-          </a:p>
-        </p:txBody>
-      </p:sp>
-      <p:sp>
-        <p:nvSpPr>
-          <p:cNvPr id="27" name="TextBox 26"/>
-          <p:cNvSpPr txBox="1"/>
-          <p:nvPr/>
-        </p:nvSpPr>
-        <p:spPr>
-          <a:xfrm>
-            <a:off x="11137392" y="3913631"/>
-            <a:ext cx="822960" cy="274320"/>
-          </a:xfrm>
-          <a:prstGeom prst="rect">
-            <a:avLst/>
-          </a:prstGeom>
-          <a:noFill/>
-        </p:spPr>
-        <p:txBody>
-          <a:bodyPr wrap="square" anchor="t">
-            <a:spAutoFit/>
-          </a:bodyPr>
-          <a:lstStyle/>
-          <a:p>
-            <a:pPr algn="l">
-              <a:lnSpc>
-                <a:spcPct val="115000"/>
-              </a:lnSpc>
-            </a:pPr>
-            <a:r>
-              <a:rPr sz="1050" b="0">
-                <a:solidFill>
-                  <a:srgbClr val="A89C88"/>
-                </a:solidFill>
-                <a:latin typeface="Consolas"/>
-              </a:rPr>
-              <a:t>100%</a:t>
-            </a:r>
-          </a:p>
-        </p:txBody>
-      </p:sp>
-      <p:sp>
-        <p:nvSpPr>
-          <p:cNvPr id="28" name="TextBox 27"/>
-          <p:cNvSpPr txBox="1"/>
-          <p:nvPr/>
-        </p:nvSpPr>
-        <p:spPr>
-          <a:xfrm>
-            <a:off x="6903720" y="4206239"/>
-            <a:ext cx="2286000" cy="274320"/>
-          </a:xfrm>
-          <a:prstGeom prst="rect">
-            <a:avLst/>
-          </a:prstGeom>
-          <a:noFill/>
-        </p:spPr>
-        <p:txBody>
-          <a:bodyPr wrap="square" anchor="t">
-            <a:spAutoFit/>
-          </a:bodyPr>
-          <a:lstStyle/>
-          <a:p>
-            <a:pPr algn="l">
-              <a:lnSpc>
-                <a:spcPct val="115000"/>
-              </a:lnSpc>
-            </a:pPr>
-            <a:r>
-              <a:rPr sz="1100" b="0">
-                <a:solidFill>
-                  <a:srgbClr val="A89C88"/>
-                </a:solidFill>
-                <a:latin typeface="Consolas"/>
-              </a:rPr>
-              <a:t>DQ-08 Свежесть дат</a:t>
-            </a:r>
-          </a:p>
-        </p:txBody>
-      </p:sp>
-      <p:sp>
-        <p:nvSpPr>
-          <p:cNvPr id="29" name="Rounded Rectangle 28"/>
-          <p:cNvSpPr/>
-          <p:nvPr/>
-        </p:nvSpPr>
-        <p:spPr>
-          <a:xfrm>
-            <a:off x="9281160" y="4224527"/>
-            <a:ext cx="1828800" cy="164592"/>
-          </a:xfrm>
-          <a:prstGeom prst="roundRect">
-            <a:avLst/>
-          </a:prstGeom>
-          <a:solidFill>
-            <a:srgbClr val="4CAF6D"/>
-          </a:solidFill>
-          <a:ln>
-            <a:noFill/>
-          </a:ln>
-          <a:effectLst/>
-        </p:spPr>
-        <p:style>
-          <a:lnRef idx="1">
-            <a:schemeClr val="accent1"/>
-          </a:lnRef>
-          <a:fillRef idx="3">
-            <a:schemeClr val="accent1"/>
-          </a:fillRef>
-          <a:effectRef idx="2">
-            <a:schemeClr val="accent1"/>
-          </a:effectRef>
-          <a:fontRef idx="minor">
-            <a:schemeClr val="lt1"/>
-          </a:fontRef>
-        </p:style>
-        <p:txBody>
-          <a:bodyPr rtlCol="0" anchor="ctr"/>
-          <a:lstStyle/>
-          <a:p>
-            <a:pPr algn="ctr"/>
-          </a:p>
-        </p:txBody>
-      </p:sp>
-      <p:sp>
-        <p:nvSpPr>
-          <p:cNvPr id="30" name="TextBox 29"/>
-          <p:cNvSpPr txBox="1"/>
-          <p:nvPr/>
-        </p:nvSpPr>
-        <p:spPr>
-          <a:xfrm>
-            <a:off x="11137392" y="4187951"/>
-            <a:ext cx="822960" cy="274320"/>
-          </a:xfrm>
-          <a:prstGeom prst="rect">
-            <a:avLst/>
-          </a:prstGeom>
-          <a:noFill/>
-        </p:spPr>
-        <p:txBody>
-          <a:bodyPr wrap="square" anchor="t">
-            <a:spAutoFit/>
-          </a:bodyPr>
-          <a:lstStyle/>
-          <a:p>
-            <a:pPr algn="l">
-              <a:lnSpc>
-                <a:spcPct val="115000"/>
-              </a:lnSpc>
-            </a:pPr>
-            <a:r>
-              <a:rPr sz="1050" b="0">
-                <a:solidFill>
-                  <a:srgbClr val="A89C88"/>
-                </a:solidFill>
-                <a:latin typeface="Consolas"/>
-              </a:rPr>
-              <a:t>100%</a:t>
-            </a:r>
-          </a:p>
-        </p:txBody>
-      </p:sp>
-      <p:sp>
-        <p:nvSpPr>
-          <p:cNvPr id="31" name="TextBox 30"/>
-          <p:cNvSpPr txBox="1"/>
-          <p:nvPr/>
-        </p:nvSpPr>
-        <p:spPr>
-          <a:xfrm>
-            <a:off x="6903720" y="4480559"/>
-            <a:ext cx="2286000" cy="274320"/>
-          </a:xfrm>
-          <a:prstGeom prst="rect">
-            <a:avLst/>
-          </a:prstGeom>
-          <a:noFill/>
-        </p:spPr>
-        <p:txBody>
-          <a:bodyPr wrap="square" anchor="t">
-            <a:spAutoFit/>
-          </a:bodyPr>
-          <a:lstStyle/>
-          <a:p>
-            <a:pPr algn="l">
-              <a:lnSpc>
-                <a:spcPct val="115000"/>
-              </a:lnSpc>
-            </a:pPr>
-            <a:r>
-              <a:rPr sz="1100" b="0">
-                <a:solidFill>
-                  <a:srgbClr val="A89C88"/>
-                </a:solidFill>
-                <a:latin typeface="Consolas"/>
-              </a:rPr>
-              <a:t>DQ-09 Код продукции</a:t>
-            </a:r>
-          </a:p>
-        </p:txBody>
-      </p:sp>
-      <p:sp>
-        <p:nvSpPr>
-          <p:cNvPr id="32" name="Rounded Rectangle 31"/>
-          <p:cNvSpPr/>
-          <p:nvPr/>
-        </p:nvSpPr>
-        <p:spPr>
-          <a:xfrm>
-            <a:off x="9281160" y="4498847"/>
-            <a:ext cx="1828800" cy="164592"/>
-          </a:xfrm>
-          <a:prstGeom prst="roundRect">
-            <a:avLst/>
-          </a:prstGeom>
-          <a:solidFill>
-            <a:srgbClr val="4CAF6D"/>
-          </a:solidFill>
-          <a:ln>
-            <a:noFill/>
-          </a:ln>
-          <a:effectLst/>
-        </p:spPr>
-        <p:style>
-          <a:lnRef idx="1">
-            <a:schemeClr val="accent1"/>
-          </a:lnRef>
-          <a:fillRef idx="3">
-            <a:schemeClr val="accent1"/>
-          </a:fillRef>
-          <a:effectRef idx="2">
-            <a:schemeClr val="accent1"/>
-          </a:effectRef>
-          <a:fontRef idx="minor">
-            <a:schemeClr val="lt1"/>
-          </a:fontRef>
-        </p:style>
-        <p:txBody>
-          <a:bodyPr rtlCol="0" anchor="ctr"/>
-          <a:lstStyle/>
-          <a:p>
-            <a:pPr algn="ctr"/>
-          </a:p>
-        </p:txBody>
-      </p:sp>
-      <p:sp>
-        <p:nvSpPr>
-          <p:cNvPr id="33" name="TextBox 32"/>
-          <p:cNvSpPr txBox="1"/>
-          <p:nvPr/>
-        </p:nvSpPr>
-        <p:spPr>
-          <a:xfrm>
-            <a:off x="11137392" y="4462271"/>
-            <a:ext cx="822960" cy="274320"/>
-          </a:xfrm>
-          <a:prstGeom prst="rect">
-            <a:avLst/>
-          </a:prstGeom>
-          <a:noFill/>
-        </p:spPr>
-        <p:txBody>
-          <a:bodyPr wrap="square" anchor="t">
-            <a:spAutoFit/>
-          </a:bodyPr>
-          <a:lstStyle/>
-          <a:p>
-            <a:pPr algn="l">
-              <a:lnSpc>
-                <a:spcPct val="115000"/>
-              </a:lnSpc>
-            </a:pPr>
-            <a:r>
-              <a:rPr sz="1050" b="0">
-                <a:solidFill>
-                  <a:srgbClr val="A89C88"/>
-                </a:solidFill>
-                <a:latin typeface="Consolas"/>
-              </a:rPr>
-              <a:t>100%</a:t>
-            </a:r>
-          </a:p>
-        </p:txBody>
-      </p:sp>
-      <p:sp>
-        <p:nvSpPr>
-          <p:cNvPr id="34" name="TextBox 33"/>
-          <p:cNvSpPr txBox="1"/>
-          <p:nvPr/>
-        </p:nvSpPr>
-        <p:spPr>
-          <a:xfrm>
-            <a:off x="6903720" y="4754879"/>
-            <a:ext cx="2286000" cy="274320"/>
-          </a:xfrm>
-          <a:prstGeom prst="rect">
-            <a:avLst/>
-          </a:prstGeom>
-          <a:noFill/>
-        </p:spPr>
-        <p:txBody>
-          <a:bodyPr wrap="square" anchor="t">
-            <a:spAutoFit/>
-          </a:bodyPr>
-          <a:lstStyle/>
-          <a:p>
-            <a:pPr algn="l">
-              <a:lnSpc>
-                <a:spcPct val="115000"/>
-              </a:lnSpc>
-            </a:pPr>
-            <a:r>
-              <a:rPr sz="1100" b="0">
-                <a:solidFill>
-                  <a:srgbClr val="A89C88"/>
-                </a:solidFill>
-                <a:latin typeface="Consolas"/>
-              </a:rPr>
-              <a:t>DQ-10 Формат справок</a:t>
-            </a:r>
-          </a:p>
-        </p:txBody>
-      </p:sp>
-      <p:sp>
-        <p:nvSpPr>
-          <p:cNvPr id="35" name="Rounded Rectangle 34"/>
-          <p:cNvSpPr/>
-          <p:nvPr/>
-        </p:nvSpPr>
-        <p:spPr>
-          <a:xfrm>
-            <a:off x="9281160" y="4773167"/>
-            <a:ext cx="1828800" cy="164592"/>
-          </a:xfrm>
-          <a:prstGeom prst="roundRect">
-            <a:avLst/>
-          </a:prstGeom>
-          <a:solidFill>
-            <a:srgbClr val="4CAF6D"/>
-          </a:solidFill>
-          <a:ln>
-            <a:noFill/>
-          </a:ln>
-          <a:effectLst/>
-        </p:spPr>
-        <p:style>
-          <a:lnRef idx="1">
-            <a:schemeClr val="accent1"/>
-          </a:lnRef>
-          <a:fillRef idx="3">
-            <a:schemeClr val="accent1"/>
-          </a:fillRef>
-          <a:effectRef idx="2">
-            <a:schemeClr val="accent1"/>
-          </a:effectRef>
-          <a:fontRef idx="minor">
-            <a:schemeClr val="lt1"/>
-          </a:fontRef>
-        </p:style>
-        <p:txBody>
-          <a:bodyPr rtlCol="0" anchor="ctr"/>
-          <a:lstStyle/>
-          <a:p>
-            <a:pPr algn="ctr"/>
-          </a:p>
-        </p:txBody>
-      </p:sp>
-      <p:sp>
-        <p:nvSpPr>
-          <p:cNvPr id="36" name="TextBox 35"/>
-          <p:cNvSpPr txBox="1"/>
-          <p:nvPr/>
-        </p:nvSpPr>
-        <p:spPr>
-          <a:xfrm>
-            <a:off x="11137392" y="4736591"/>
-            <a:ext cx="822960" cy="274320"/>
-          </a:xfrm>
-          <a:prstGeom prst="rect">
-            <a:avLst/>
-          </a:prstGeom>
-          <a:noFill/>
-        </p:spPr>
-        <p:txBody>
-          <a:bodyPr wrap="square" anchor="t">
-            <a:spAutoFit/>
-          </a:bodyPr>
-          <a:lstStyle/>
-          <a:p>
-            <a:pPr algn="l">
-              <a:lnSpc>
-                <a:spcPct val="115000"/>
-              </a:lnSpc>
-            </a:pPr>
-            <a:r>
-              <a:rPr sz="1050" b="0">
-                <a:solidFill>
-                  <a:srgbClr val="A89C88"/>
-                </a:solidFill>
-                <a:latin typeface="Consolas"/>
-              </a:rPr>
-              <a:t>100%</a:t>
-            </a:r>
-          </a:p>
-        </p:txBody>
-      </p:sp>
-      <p:sp>
-        <p:nvSpPr>
-          <p:cNvPr id="37" name="TextBox 36"/>
-          <p:cNvSpPr txBox="1"/>
-          <p:nvPr/>
-        </p:nvSpPr>
-        <p:spPr>
-          <a:xfrm>
-            <a:off x="6903720" y="5029199"/>
-            <a:ext cx="2286000" cy="274320"/>
-          </a:xfrm>
-          <a:prstGeom prst="rect">
-            <a:avLst/>
-          </a:prstGeom>
-          <a:noFill/>
-        </p:spPr>
-        <p:txBody>
-          <a:bodyPr wrap="square" anchor="t">
-            <a:spAutoFit/>
-          </a:bodyPr>
-          <a:lstStyle/>
-          <a:p>
-            <a:pPr algn="l">
-              <a:lnSpc>
-                <a:spcPct val="115000"/>
-              </a:lnSpc>
-            </a:pPr>
-            <a:r>
-              <a:rPr sz="1100" b="0">
-                <a:solidFill>
-                  <a:srgbClr val="A89C88"/>
-                </a:solidFill>
-                <a:latin typeface="Consolas"/>
-              </a:rPr>
-              <a:t>DQ-11 Происхождение</a:t>
-            </a:r>
-          </a:p>
-        </p:txBody>
-      </p:sp>
-      <p:sp>
-        <p:nvSpPr>
-          <p:cNvPr id="38" name="Rounded Rectangle 37"/>
-          <p:cNvSpPr/>
-          <p:nvPr/>
-        </p:nvSpPr>
-        <p:spPr>
-          <a:xfrm>
-            <a:off x="9281160" y="5047487"/>
-            <a:ext cx="1828800" cy="164592"/>
-          </a:xfrm>
-          <a:prstGeom prst="roundRect">
-            <a:avLst/>
-          </a:prstGeom>
-          <a:solidFill>
-            <a:srgbClr val="4CAF6D"/>
-          </a:solidFill>
-          <a:ln>
-            <a:noFill/>
-          </a:ln>
-          <a:effectLst/>
-        </p:spPr>
-        <p:style>
-          <a:lnRef idx="1">
-            <a:schemeClr val="accent1"/>
-          </a:lnRef>
-          <a:fillRef idx="3">
-            <a:schemeClr val="accent1"/>
-          </a:fillRef>
-          <a:effectRef idx="2">
-            <a:schemeClr val="accent1"/>
-          </a:effectRef>
-          <a:fontRef idx="minor">
-            <a:schemeClr val="lt1"/>
-          </a:fontRef>
-        </p:style>
-        <p:txBody>
-          <a:bodyPr rtlCol="0" anchor="ctr"/>
-          <a:lstStyle/>
-          <a:p>
-            <a:pPr algn="ctr"/>
-          </a:p>
-        </p:txBody>
-      </p:sp>
-      <p:sp>
-        <p:nvSpPr>
-          <p:cNvPr id="39" name="TextBox 38"/>
-          <p:cNvSpPr txBox="1"/>
-          <p:nvPr/>
-        </p:nvSpPr>
-        <p:spPr>
-          <a:xfrm>
-            <a:off x="11137392" y="5010911"/>
-            <a:ext cx="822960" cy="274320"/>
-          </a:xfrm>
-          <a:prstGeom prst="rect">
-            <a:avLst/>
-          </a:prstGeom>
-          <a:noFill/>
-        </p:spPr>
-        <p:txBody>
-          <a:bodyPr wrap="square" anchor="t">
-            <a:spAutoFit/>
-          </a:bodyPr>
-          <a:lstStyle/>
-          <a:p>
-            <a:pPr algn="l">
-              <a:lnSpc>
-                <a:spcPct val="115000"/>
-              </a:lnSpc>
-            </a:pPr>
-            <a:r>
-              <a:rPr sz="1050" b="0">
-                <a:solidFill>
-                  <a:srgbClr val="A89C88"/>
-                </a:solidFill>
-                <a:latin typeface="Consolas"/>
-              </a:rPr>
-              <a:t>100%</a:t>
-            </a:r>
-          </a:p>
-        </p:txBody>
-      </p:sp>
-      <p:sp>
-        <p:nvSpPr>
-          <p:cNvPr id="40" name="TextBox 39"/>
-          <p:cNvSpPr txBox="1"/>
-          <p:nvPr/>
-        </p:nvSpPr>
-        <p:spPr>
-          <a:xfrm>
-            <a:off x="6903720" y="5303519"/>
-            <a:ext cx="2286000" cy="274320"/>
-          </a:xfrm>
-          <a:prstGeom prst="rect">
-            <a:avLst/>
-          </a:prstGeom>
-          <a:noFill/>
-        </p:spPr>
-        <p:txBody>
-          <a:bodyPr wrap="square" anchor="t">
-            <a:spAutoFit/>
-          </a:bodyPr>
-          <a:lstStyle/>
-          <a:p>
-            <a:pPr algn="l">
-              <a:lnSpc>
-                <a:spcPct val="115000"/>
-              </a:lnSpc>
-            </a:pPr>
-            <a:r>
-              <a:rPr sz="1100" b="0">
-                <a:solidFill>
-                  <a:srgbClr val="A89C88"/>
-                </a:solidFill>
-                <a:latin typeface="Consolas"/>
-              </a:rPr>
-              <a:t>DQ-12 Иерархия справок</a:t>
-            </a:r>
-          </a:p>
-        </p:txBody>
-      </p:sp>
-      <p:sp>
-        <p:nvSpPr>
-          <p:cNvPr id="41" name="Rounded Rectangle 40"/>
-          <p:cNvSpPr/>
-          <p:nvPr/>
-        </p:nvSpPr>
-        <p:spPr>
-          <a:xfrm>
-            <a:off x="9281160" y="5321807"/>
-            <a:ext cx="1828800" cy="164592"/>
-          </a:xfrm>
-          <a:prstGeom prst="roundRect">
-            <a:avLst/>
-          </a:prstGeom>
-          <a:solidFill>
-            <a:srgbClr val="4CAF6D"/>
-          </a:solidFill>
-          <a:ln>
-            <a:noFill/>
-          </a:ln>
-          <a:effectLst/>
-        </p:spPr>
-        <p:style>
-          <a:lnRef idx="1">
-            <a:schemeClr val="accent1"/>
-          </a:lnRef>
-          <a:fillRef idx="3">
-            <a:schemeClr val="accent1"/>
-          </a:fillRef>
-          <a:effectRef idx="2">
-            <a:schemeClr val="accent1"/>
-          </a:effectRef>
-          <a:fontRef idx="minor">
-            <a:schemeClr val="lt1"/>
-          </a:fontRef>
-        </p:style>
-        <p:txBody>
-          <a:bodyPr rtlCol="0" anchor="ctr"/>
-          <a:lstStyle/>
-          <a:p>
-            <a:pPr algn="ctr"/>
-          </a:p>
-        </p:txBody>
-      </p:sp>
-      <p:sp>
-        <p:nvSpPr>
-          <p:cNvPr id="42" name="TextBox 41"/>
-          <p:cNvSpPr txBox="1"/>
-          <p:nvPr/>
-        </p:nvSpPr>
-        <p:spPr>
-          <a:xfrm>
-            <a:off x="11137392" y="5285231"/>
-            <a:ext cx="822960" cy="274320"/>
-          </a:xfrm>
-          <a:prstGeom prst="rect">
-            <a:avLst/>
-          </a:prstGeom>
-          <a:noFill/>
-        </p:spPr>
-        <p:txBody>
-          <a:bodyPr wrap="square" anchor="t">
-            <a:spAutoFit/>
-          </a:bodyPr>
-          <a:lstStyle/>
-          <a:p>
-            <a:pPr algn="l">
-              <a:lnSpc>
-                <a:spcPct val="115000"/>
-              </a:lnSpc>
-            </a:pPr>
-            <a:r>
-              <a:rPr sz="1050" b="0">
-                <a:solidFill>
-                  <a:srgbClr val="A89C88"/>
-                </a:solidFill>
-                <a:latin typeface="Consolas"/>
-              </a:rPr>
-              <a:t>100%</a:t>
-            </a:r>
-          </a:p>
-        </p:txBody>
-      </p:sp>
-      <p:sp>
-        <p:nvSpPr>
-          <p:cNvPr id="43" name="TextBox 42"/>
-          <p:cNvSpPr txBox="1"/>
-          <p:nvPr/>
-        </p:nvSpPr>
-        <p:spPr>
-          <a:xfrm>
-            <a:off x="6903720" y="5577839"/>
-            <a:ext cx="2286000" cy="274320"/>
-          </a:xfrm>
-          <a:prstGeom prst="rect">
-            <a:avLst/>
-          </a:prstGeom>
-          <a:noFill/>
-        </p:spPr>
-        <p:txBody>
-          <a:bodyPr wrap="square" anchor="t">
-            <a:spAutoFit/>
-          </a:bodyPr>
-          <a:lstStyle/>
-          <a:p>
-            <a:pPr algn="l">
-              <a:lnSpc>
-                <a:spcPct val="115000"/>
-              </a:lnSpc>
-            </a:pPr>
-            <a:r>
-              <a:rPr sz="1100" b="0">
-                <a:solidFill>
-                  <a:srgbClr val="A89C88"/>
-                </a:solidFill>
-                <a:latin typeface="Consolas"/>
-              </a:rPr>
-              <a:t>DQ-13 Однородность</a:t>
-            </a:r>
-          </a:p>
-        </p:txBody>
-      </p:sp>
-      <p:sp>
-        <p:nvSpPr>
-          <p:cNvPr id="44" name="Rounded Rectangle 43"/>
-          <p:cNvSpPr/>
-          <p:nvPr/>
-        </p:nvSpPr>
-        <p:spPr>
-          <a:xfrm>
-            <a:off x="9281160" y="5596127"/>
-            <a:ext cx="1828800" cy="164592"/>
-          </a:xfrm>
-          <a:prstGeom prst="roundRect">
-            <a:avLst/>
-          </a:prstGeom>
-          <a:solidFill>
-            <a:srgbClr val="4CAF6D"/>
-          </a:solidFill>
-          <a:ln>
-            <a:noFill/>
-          </a:ln>
-          <a:effectLst/>
-        </p:spPr>
-        <p:style>
-          <a:lnRef idx="1">
-            <a:schemeClr val="accent1"/>
-          </a:lnRef>
-          <a:fillRef idx="3">
-            <a:schemeClr val="accent1"/>
-          </a:fillRef>
-          <a:effectRef idx="2">
-            <a:schemeClr val="accent1"/>
-          </a:effectRef>
-          <a:fontRef idx="minor">
-            <a:schemeClr val="lt1"/>
-          </a:fontRef>
-        </p:style>
-        <p:txBody>
-          <a:bodyPr rtlCol="0" anchor="ctr"/>
-          <a:lstStyle/>
-          <a:p>
-            <a:pPr algn="ctr"/>
-          </a:p>
-        </p:txBody>
-      </p:sp>
-      <p:sp>
-        <p:nvSpPr>
-          <p:cNvPr id="45" name="TextBox 44"/>
-          <p:cNvSpPr txBox="1"/>
-          <p:nvPr/>
-        </p:nvSpPr>
-        <p:spPr>
-          <a:xfrm>
-            <a:off x="11137392" y="5559551"/>
-            <a:ext cx="822960" cy="274320"/>
-          </a:xfrm>
-          <a:prstGeom prst="rect">
-            <a:avLst/>
-          </a:prstGeom>
-          <a:noFill/>
-        </p:spPr>
-        <p:txBody>
-          <a:bodyPr wrap="square" anchor="t">
-            <a:spAutoFit/>
-          </a:bodyPr>
-          <a:lstStyle/>
-          <a:p>
-            <a:pPr algn="l">
-              <a:lnSpc>
-                <a:spcPct val="115000"/>
-              </a:lnSpc>
-            </a:pPr>
-            <a:r>
-              <a:rPr sz="1050" b="0">
-                <a:solidFill>
-                  <a:srgbClr val="A89C88"/>
-                </a:solidFill>
-                <a:latin typeface="Consolas"/>
-              </a:rPr>
-              <a:t>100%</a:t>
+                <a:latin typeface="Segoe UI"/>
+              </a:rPr>
+              <a:t>Списать по справке Б больше, чем получено, нельзя</a:t>
             </a:r>
           </a:p>
         </p:txBody>
@@ -7879,123 +10162,43 @@
         </p:nvSpPr>
         <p:spPr>
           <a:xfrm>
-            <a:off x="6903720" y="5852159"/>
-            <a:ext cx="2286000" cy="274320"/>
-          </a:xfrm>
-          <a:prstGeom prst="rect">
-            <a:avLst/>
-          </a:prstGeom>
-          <a:noFill/>
-        </p:spPr>
-        <p:txBody>
-          <a:bodyPr wrap="square" anchor="t">
-            <a:spAutoFit/>
-          </a:bodyPr>
-          <a:lstStyle/>
-          <a:p>
-            <a:pPr algn="l">
-              <a:lnSpc>
-                <a:spcPct val="115000"/>
-              </a:lnSpc>
-            </a:pPr>
-            <a:r>
-              <a:rPr sz="1100" b="0">
-                <a:solidFill>
-                  <a:srgbClr val="A89C88"/>
-                </a:solidFill>
-                <a:latin typeface="Consolas"/>
-              </a:rPr>
-              <a:t>DQ-14 Баланс</a:t>
-            </a:r>
-          </a:p>
-        </p:txBody>
-      </p:sp>
-      <p:sp>
-        <p:nvSpPr>
-          <p:cNvPr id="47" name="Rounded Rectangle 46"/>
-          <p:cNvSpPr/>
-          <p:nvPr/>
-        </p:nvSpPr>
-        <p:spPr>
-          <a:xfrm>
-            <a:off x="9281160" y="5870447"/>
-            <a:ext cx="1188720" cy="164592"/>
-          </a:xfrm>
-          <a:prstGeom prst="roundRect">
-            <a:avLst/>
-          </a:prstGeom>
-          <a:solidFill>
-            <a:srgbClr val="E0616B"/>
-          </a:solidFill>
-          <a:ln>
-            <a:noFill/>
-          </a:ln>
-          <a:effectLst/>
-        </p:spPr>
-        <p:style>
-          <a:lnRef idx="1">
-            <a:schemeClr val="accent1"/>
-          </a:lnRef>
-          <a:fillRef idx="3">
-            <a:schemeClr val="accent1"/>
-          </a:fillRef>
-          <a:effectRef idx="2">
-            <a:schemeClr val="accent1"/>
-          </a:effectRef>
-          <a:fontRef idx="minor">
-            <a:schemeClr val="lt1"/>
-          </a:fontRef>
-        </p:style>
-        <p:txBody>
-          <a:bodyPr rtlCol="0" anchor="ctr"/>
-          <a:lstStyle/>
-          <a:p>
-            <a:pPr algn="ctr"/>
-          </a:p>
-        </p:txBody>
-      </p:sp>
-      <p:sp>
-        <p:nvSpPr>
-          <p:cNvPr id="48" name="TextBox 47"/>
-          <p:cNvSpPr txBox="1"/>
-          <p:nvPr/>
-        </p:nvSpPr>
-        <p:spPr>
-          <a:xfrm>
-            <a:off x="11137392" y="5833871"/>
-            <a:ext cx="822960" cy="274320"/>
-          </a:xfrm>
-          <a:prstGeom prst="rect">
-            <a:avLst/>
-          </a:prstGeom>
-          <a:noFill/>
-        </p:spPr>
-        <p:txBody>
-          <a:bodyPr wrap="square" anchor="t">
-            <a:spAutoFit/>
-          </a:bodyPr>
-          <a:lstStyle/>
-          <a:p>
-            <a:pPr algn="l">
-              <a:lnSpc>
-                <a:spcPct val="115000"/>
-              </a:lnSpc>
-            </a:pPr>
-            <a:r>
-              <a:rPr sz="1050" b="0">
-                <a:solidFill>
-                  <a:srgbClr val="A89C88"/>
-                </a:solidFill>
-                <a:latin typeface="Consolas"/>
-              </a:rPr>
-              <a:t>65%</a:t>
-            </a:r>
-          </a:p>
-        </p:txBody>
-      </p:sp>
-      <p:sp>
-        <p:nvSpPr>
-          <p:cNvPr id="49" name="TextBox 48"/>
+            <a:off x="640080" y="5943600"/>
+            <a:ext cx="10881360" cy="731520"/>
+          </a:xfrm>
+          <a:prstGeom prst="rect">
+            <a:avLst/>
+          </a:prstGeom>
+          <a:noFill/>
+        </p:spPr>
+        <p:txBody>
+          <a:bodyPr wrap="square">
+            <a:spAutoFit/>
+          </a:bodyPr>
+          <a:lstStyle/>
+          <a:p>
+            <a:pPr>
+              <a:lnSpc>
+                <a:spcPct val="125000"/>
+              </a:lnSpc>
+              <a:spcAft>
+                <a:spcPts val="0"/>
+              </a:spcAft>
+            </a:pPr>
+            <a:r>
+              <a:rPr sz="1100">
+                <a:solidFill>
+                  <a:srgbClr val="756A5A"/>
+                </a:solidFill>
+                <a:latin typeface="Segoe UI"/>
+              </a:rPr>
+              <a:t>―  Ещё два технических правила — DQ-06 тип документа и DQ-08 свежесть — зелёные. Пять критичных (DQ-02/03/04/11/14) блокируют публикацию. Каждое правило — SQL (02_dq_rules.sql) и SodaCL (checks.yml); оба движка на реальной БД дали одинаковый вердикт.</a:t>
+            </a:r>
+          </a:p>
+        </p:txBody>
+      </p:sp>
+      <p:sp>
+        <p:nvSpPr>
+          <p:cNvPr id="47" name="TextBox 46"/>
           <p:cNvSpPr txBox="1"/>
           <p:nvPr/>
         </p:nvSpPr>
@@ -8131,7 +10334,7 @@
                 </a:solidFill>
                 <a:latin typeface="Segoe UI Semibold"/>
               </a:rPr>
-              <a:t>Два дашборда: инженерам и контролю рынка</a:t>
+              <a:t>Два дашборда: инженерам и бизнесу</a:t>
             </a:r>
           </a:p>
         </p:txBody>
@@ -8144,8 +10347,8 @@
         </p:nvSpPr>
         <p:spPr>
           <a:xfrm>
-            <a:off x="640080" y="1828800"/>
-            <a:ext cx="5303520" cy="4206240"/>
+            <a:off x="640080" y="1645920"/>
+            <a:ext cx="5623560" cy="4709160"/>
           </a:xfrm>
           <a:prstGeom prst="roundRect">
             <a:avLst>
@@ -8192,8 +10395,8 @@
         </p:nvSpPr>
         <p:spPr>
           <a:xfrm>
-            <a:off x="868680" y="2011680"/>
-            <a:ext cx="4846320" cy="365760"/>
+            <a:off x="868680" y="1783080"/>
+            <a:ext cx="5212080" cy="320040"/>
           </a:xfrm>
           <a:prstGeom prst="rect">
             <a:avLst/>
@@ -8212,27 +10415,51 @@
               </a:lnSpc>
             </a:pPr>
             <a:r>
-              <a:rPr sz="1200" b="1">
+              <a:rPr sz="1100" b="1">
                 <a:solidFill>
                   <a:srgbClr val="DBA25A"/>
                 </a:solidFill>
                 <a:latin typeface="Consolas"/>
               </a:rPr>
-              <a:t>ТЕХНИЧЕСКИЙ (DQ / IT)</a:t>
-            </a:r>
-          </a:p>
-        </p:txBody>
-      </p:sp>
-      <p:sp>
-        <p:nvSpPr>
-          <p:cNvPr id="6" name="TextBox 5"/>
-          <p:cNvSpPr txBox="1"/>
-          <p:nvPr/>
-        </p:nvSpPr>
-        <p:spPr>
-          <a:xfrm>
-            <a:off x="868680" y="2468880"/>
-            <a:ext cx="4846320" cy="3383280"/>
+              <a:t>ТЕХНИЧЕСКИЙ · GRAFANA, РАЗВЁРНУТ</a:t>
+            </a:r>
+          </a:p>
+        </p:txBody>
+      </p:sp>
+      <p:pic>
+        <p:nvPicPr>
+          <p:cNvPr id="6" name="Picture 5" descr="grafana_dq_monitoring.png"/>
+          <p:cNvPicPr>
+            <a:picLocks noChangeAspect="1"/>
+          </p:cNvPicPr>
+          <p:nvPr/>
+        </p:nvPicPr>
+        <p:blipFill>
+          <a:blip r:embed="rId2"/>
+          <a:stretch>
+            <a:fillRect/>
+          </a:stretch>
+        </p:blipFill>
+        <p:spPr>
+          <a:xfrm>
+            <a:off x="868680" y="2148840"/>
+            <a:ext cx="5166360" cy="2612112"/>
+          </a:xfrm>
+          <a:prstGeom prst="rect">
+            <a:avLst/>
+          </a:prstGeom>
+        </p:spPr>
+      </p:pic>
+      <p:sp>
+        <p:nvSpPr>
+          <p:cNvPr id="7" name="TextBox 6"/>
+          <p:cNvSpPr txBox="1"/>
+          <p:nvPr/>
+        </p:nvSpPr>
+        <p:spPr>
+          <a:xfrm>
+            <a:off x="868680" y="5029200"/>
+            <a:ext cx="5212080" cy="1280160"/>
           </a:xfrm>
           <a:prstGeom prst="rect">
             <a:avLst/>
@@ -8250,17 +10477,17 @@
                 <a:spcPct val="125000"/>
               </a:lnSpc>
               <a:spcAft>
-                <a:spcPts val="800"/>
+                <a:spcPts val="300"/>
               </a:spcAft>
             </a:pPr>
             <a:r>
-              <a:rPr sz="1400">
+              <a:rPr sz="1100">
                 <a:solidFill>
                   <a:srgbClr val="A89C88"/>
                 </a:solidFill>
                 <a:latin typeface="Segoe UI"/>
               </a:rPr>
-              <a:t>―  14 правил, pass rate по каждому</a:t>
+              <a:t>―  Pass rate по каждому из 14 правил, тренд критичных по дням</a:t>
             </a:r>
           </a:p>
           <a:p>
@@ -8269,17 +10496,17 @@
                 <a:spcPct val="125000"/>
               </a:lnSpc>
               <a:spcAft>
-                <a:spcPts val="800"/>
+                <a:spcPts val="300"/>
               </a:spcAft>
             </a:pPr>
             <a:r>
-              <a:rPr sz="1400">
+              <a:rPr sz="1100">
                 <a:solidFill>
                   <a:srgbClr val="A89C88"/>
                 </a:solidFill>
                 <a:latin typeface="Segoe UI"/>
               </a:rPr>
-              <a:t>―  Тренд critical-правил по дням</a:t>
+              <a:t>―  Полная история запусков пайплайна — 40+ прогонов из dq_run_history</a:t>
             </a:r>
           </a:p>
           <a:p>
@@ -8288,69 +10515,31 @@
                 <a:spcPct val="125000"/>
               </a:lnSpc>
               <a:spcAft>
-                <a:spcPts val="800"/>
+                <a:spcPts val="300"/>
               </a:spcAft>
             </a:pPr>
             <a:r>
-              <a:rPr sz="1400">
+              <a:rPr sz="1100">
                 <a:solidFill>
                   <a:srgbClr val="A89C88"/>
                 </a:solidFill>
                 <a:latin typeface="Segoe UI"/>
               </a:rPr>
-              <a:t>―  Полная история запусков пайплайна</a:t>
-            </a:r>
-          </a:p>
-          <a:p>
-            <a:pPr>
-              <a:lnSpc>
-                <a:spcPct val="125000"/>
-              </a:lnSpc>
-              <a:spcAft>
-                <a:spcPts val="800"/>
-              </a:spcAft>
-            </a:pPr>
-            <a:r>
-              <a:rPr sz="1400">
-                <a:solidFill>
-                  <a:srgbClr val="A89C88"/>
-                </a:solidFill>
-                <a:latin typeface="Segoe UI"/>
-              </a:rPr>
-              <a:t>―  Собирается скриптом из БД: ноль ручных цифр</a:t>
-            </a:r>
-          </a:p>
-          <a:p>
-            <a:pPr>
-              <a:lnSpc>
-                <a:spcPct val="125000"/>
-              </a:lnSpc>
-              <a:spcAft>
-                <a:spcPts val="800"/>
-              </a:spcAft>
-            </a:pPr>
-            <a:r>
-              <a:rPr sz="1400">
-                <a:solidFill>
-                  <a:srgbClr val="A89C88"/>
-                </a:solidFill>
-                <a:latin typeface="Segoe UI"/>
-              </a:rPr>
-              <a:t>―  Прод-вариант — Grafana</a:t>
-            </a:r>
-          </a:p>
-        </p:txBody>
-      </p:sp>
-      <p:sp>
-        <p:nvSpPr>
-          <p:cNvPr id="7" name="Rounded Rectangle 6"/>
+              <a:t>―  Детали последнего FAIL-прогона: какие пары, сколько строк, порог</a:t>
+            </a:r>
+          </a:p>
+        </p:txBody>
+      </p:sp>
+      <p:sp>
+        <p:nvSpPr>
+          <p:cNvPr id="8" name="Rounded Rectangle 7"/>
           <p:cNvSpPr/>
           <p:nvPr/>
         </p:nvSpPr>
         <p:spPr>
           <a:xfrm>
-            <a:off x="6263640" y="1828800"/>
-            <a:ext cx="5257800" cy="4206240"/>
+            <a:off x="6537960" y="1645920"/>
+            <a:ext cx="4983480" cy="4709160"/>
           </a:xfrm>
           <a:prstGeom prst="roundRect">
             <a:avLst>
@@ -8391,14 +10580,14 @@
       </p:sp>
       <p:sp>
         <p:nvSpPr>
-          <p:cNvPr id="8" name="TextBox 7"/>
-          <p:cNvSpPr txBox="1"/>
-          <p:nvPr/>
-        </p:nvSpPr>
-        <p:spPr>
-          <a:xfrm>
-            <a:off x="6492240" y="2011680"/>
-            <a:ext cx="4754880" cy="365760"/>
+          <p:cNvPr id="9" name="TextBox 8"/>
+          <p:cNvSpPr txBox="1"/>
+          <p:nvPr/>
+        </p:nvSpPr>
+        <p:spPr>
+          <a:xfrm>
+            <a:off x="6766560" y="1783080"/>
+            <a:ext cx="4572000" cy="320040"/>
           </a:xfrm>
           <a:prstGeom prst="rect">
             <a:avLst/>
@@ -8417,27 +10606,51 @@
               </a:lnSpc>
             </a:pPr>
             <a:r>
-              <a:rPr sz="1200" b="1">
+              <a:rPr sz="1100" b="1">
                 <a:solidFill>
                   <a:srgbClr val="DBA25A"/>
                 </a:solidFill>
                 <a:latin typeface="Consolas"/>
               </a:rPr>
-              <a:t>БИЗНЕС (КОНТРОЛЬ РЫНКА)</a:t>
-            </a:r>
-          </a:p>
-        </p:txBody>
-      </p:sp>
-      <p:sp>
-        <p:nvSpPr>
-          <p:cNvPr id="9" name="TextBox 8"/>
-          <p:cNvSpPr txBox="1"/>
-          <p:nvPr/>
-        </p:nvSpPr>
-        <p:spPr>
-          <a:xfrm>
-            <a:off x="6492240" y="2468880"/>
-            <a:ext cx="4754880" cy="3383280"/>
+              <a:t>БИЗНЕС · МОДЕЛЬ ДЛЯ GRAFANA</a:t>
+            </a:r>
+          </a:p>
+        </p:txBody>
+      </p:sp>
+      <p:pic>
+        <p:nvPicPr>
+          <p:cNvPr id="10" name="Picture 9" descr="dashboard_business.png"/>
+          <p:cNvPicPr>
+            <a:picLocks noChangeAspect="1"/>
+          </p:cNvPicPr>
+          <p:nvPr/>
+        </p:nvPicPr>
+        <p:blipFill>
+          <a:blip r:embed="rId3"/>
+          <a:stretch>
+            <a:fillRect/>
+          </a:stretch>
+        </p:blipFill>
+        <p:spPr>
+          <a:xfrm>
+            <a:off x="7315200" y="2148840"/>
+            <a:ext cx="3200400" cy="2743200"/>
+          </a:xfrm>
+          <a:prstGeom prst="rect">
+            <a:avLst/>
+          </a:prstGeom>
+        </p:spPr>
+      </p:pic>
+      <p:sp>
+        <p:nvSpPr>
+          <p:cNvPr id="11" name="TextBox 10"/>
+          <p:cNvSpPr txBox="1"/>
+          <p:nvPr/>
+        </p:nvSpPr>
+        <p:spPr>
+          <a:xfrm>
+            <a:off x="6766560" y="5029200"/>
+            <a:ext cx="4572000" cy="1280160"/>
           </a:xfrm>
           <a:prstGeom prst="rect">
             <a:avLst/>
@@ -8455,11 +10668,11 @@
                 <a:spcPct val="125000"/>
               </a:lnSpc>
               <a:spcAft>
-                <a:spcPts val="800"/>
+                <a:spcPts val="300"/>
               </a:spcAft>
             </a:pPr>
             <a:r>
-              <a:rPr sz="1400">
+              <a:rPr sz="1100">
                 <a:solidFill>
                   <a:srgbClr val="A89C88"/>
                 </a:solidFill>
@@ -8474,17 +10687,17 @@
                 <a:spcPct val="125000"/>
               </a:lnSpc>
               <a:spcAft>
-                <a:spcPts val="800"/>
+                <a:spcPts val="300"/>
               </a:spcAft>
             </a:pPr>
             <a:r>
-              <a:rPr sz="1400">
+              <a:rPr sz="1100">
                 <a:solidFill>
                   <a:srgbClr val="A89C88"/>
                 </a:solidFill>
                 <a:latin typeface="Segoe UI"/>
               </a:rPr>
-              <a:t>―  Явно сказано: организации отчитались корректно</a:t>
+              <a:t>―  Три числа: не доехало, искажён код, не сходится баланс</a:t>
             </a:r>
           </a:p>
           <a:p>
@@ -8493,24 +10706,24 @@
                 <a:spcPct val="125000"/>
               </a:lnSpc>
               <a:spcAft>
-                <a:spcPts val="800"/>
+                <a:spcPts val="300"/>
               </a:spcAft>
             </a:pPr>
             <a:r>
-              <a:rPr sz="1400">
+              <a:rPr sz="1100">
                 <a:solidFill>
                   <a:srgbClr val="A89C88"/>
                 </a:solidFill>
                 <a:latin typeface="Segoe UI"/>
               </a:rPr>
-              <a:t>―  Обновляется тем же скриптом после каждого прогона</a:t>
-            </a:r>
-          </a:p>
-        </p:txBody>
-      </p:sp>
-      <p:sp>
-        <p:nvSpPr>
-          <p:cNvPr id="10" name="TextBox 9"/>
+              <a:t>―  Явно сказано: организации отчитались корректно, проблема у нас</a:t>
+            </a:r>
+          </a:p>
+        </p:txBody>
+      </p:sp>
+      <p:sp>
+        <p:nvSpPr>
+          <p:cNvPr id="12" name="TextBox 11"/>
           <p:cNvSpPr txBox="1"/>
           <p:nvPr/>
         </p:nvSpPr>

--- a/presentation/presentation.pptx
+++ b/presentation/presentation.pptx
@@ -5545,7 +5545,7 @@
                           </a:solidFill>
                           <a:latin typeface="Consolas"/>
                         </a:rPr>
-                        <a:t>bottling_date и wbpid не заполнены ни разу</a:t>
+                        <a:t>bottling_date и wbpid не заполнены ни разу (поля есть в схеме)</a:t>
                       </a:r>
                     </a:p>
                   </a:txBody>
@@ -5567,7 +5567,7 @@
                           </a:solidFill>
                           <a:latin typeface="Consolas"/>
                         </a:rPr>
-                        <a:t>Полнота (схема)</a:t>
+                        <a:t>Схема → контракт</a:t>
                       </a:r>
                     </a:p>
                   </a:txBody>
@@ -5746,8 +5746,8 @@
         </p:nvSpPr>
         <p:spPr>
           <a:xfrm>
-            <a:off x="640080" y="5303520"/>
-            <a:ext cx="10881360" cy="1188720"/>
+            <a:off x="640080" y="5230368"/>
+            <a:ext cx="10881360" cy="1280160"/>
           </a:xfrm>
           <a:prstGeom prst="rect">
             <a:avLst/>
@@ -5765,11 +5765,11 @@
                 <a:spcPct val="125000"/>
               </a:lnSpc>
               <a:spcAft>
-                <a:spcPts val="400"/>
+                <a:spcPts val="300"/>
               </a:spcAft>
             </a:pPr>
             <a:r>
-              <a:rPr sz="1250">
+              <a:rPr sz="1150">
                 <a:solidFill>
                   <a:srgbClr val="756A5A"/>
                 </a:solidFill>
@@ -5784,17 +5784,36 @@
                 <a:spcPct val="125000"/>
               </a:lnSpc>
               <a:spcAft>
-                <a:spcPts val="400"/>
+                <a:spcPts val="300"/>
               </a:spcAft>
             </a:pPr>
             <a:r>
-              <a:rPr sz="1250">
+              <a:rPr sz="1150">
                 <a:solidFill>
                   <a:srgbClr val="756A5A"/>
                 </a:solidFill>
                 <a:latin typeface="Segoe UI"/>
               </a:rPr>
               <a:t>―  Проблема 2 — следствие попытки починить проблему 1. Проблема 3 — их общее последствие и одновременно инструмент разбора.</a:t>
+            </a:r>
+          </a:p>
+          <a:p>
+            <a:pPr>
+              <a:lnSpc>
+                <a:spcPct val="125000"/>
+              </a:lnSpc>
+              <a:spcAft>
+                <a:spcPts val="300"/>
+              </a:spcAft>
+            </a:pPr>
+            <a:r>
+              <a:rPr sz="1150">
+                <a:solidFill>
+                  <a:srgbClr val="756A5A"/>
+                </a:solidFill>
+                <a:latin typeface="Segoe UI"/>
+              </a:rPr>
+              <a:t>―  Проблема 5 закрывается не правилом, а контрактом: поле, которое никто не обязан заполнять, либо проектируется осознанно, либо удаляется (минимизация по 152-ФЗ).</a:t>
             </a:r>
           </a:p>
         </p:txBody>
@@ -8310,45 +8329,6 @@
       <p:sp>
         <p:nvSpPr>
           <p:cNvPr id="58" name="TextBox 57"/>
-          <p:cNvSpPr txBox="1"/>
-          <p:nvPr/>
-        </p:nvSpPr>
-        <p:spPr>
-          <a:xfrm>
-            <a:off x="6949440" y="4846320"/>
-            <a:ext cx="4572000" cy="1280160"/>
-          </a:xfrm>
-          <a:prstGeom prst="rect">
-            <a:avLst/>
-          </a:prstGeom>
-          <a:noFill/>
-        </p:spPr>
-        <p:txBody>
-          <a:bodyPr wrap="square" anchor="t">
-            <a:spAutoFit/>
-          </a:bodyPr>
-          <a:lstStyle/>
-          <a:p>
-            <a:pPr algn="l">
-              <a:lnSpc>
-                <a:spcPct val="125000"/>
-              </a:lnSpc>
-            </a:pPr>
-            <a:r>
-              <a:rPr sz="1100" b="0">
-                <a:solidFill>
-                  <a:srgbClr val="A89C88"/>
-                </a:solidFill>
-                <a:latin typeface="Segoe UI"/>
-              </a:rPr>
-              <a:t>Гейт и алерт — разные вещи: алерт сообщает людям, гейт не выпускает данные. Провал критичного правила (DQ-02/03/04/11/14) → DAG красный → таск публикации не запускается.</a:t>
-            </a:r>
-          </a:p>
-        </p:txBody>
-      </p:sp>
-      <p:sp>
-        <p:nvSpPr>
-          <p:cNvPr id="59" name="TextBox 58"/>
           <p:cNvSpPr txBox="1"/>
           <p:nvPr/>
         </p:nvSpPr>
